--- a/deck/output/Farmer Acquisition 5-11 Oct 2026.pptx
+++ b/deck/output/Farmer Acquisition 5-11 Oct 2026.pptx
@@ -2050,7 +2050,7 @@
                 <a:ea typeface="Plus Jakarta Sans" pitchFamily="34" charset="-122"/>
                 <a:cs typeface="Plus Jakarta Sans" pitchFamily="34" charset="-120"/>
               </a:rPr>
-              <a:t>376 farmers joined last week, −103 (−22%); 99% came without a Duta and none through a real Duta</a:t>
+              <a:t>376 farmers joined last week, −103 (−22%): 4 through Dutas (−4) and 372 without (−99)</a:t>
             </a:r>
             <a:endParaRPr lang="en-US" sz="2300" dirty="0"/>
           </a:p>
@@ -2380,7 +2380,7 @@
                 <a:ea typeface="Plus Jakarta Sans" pitchFamily="34" charset="-122"/>
                 <a:cs typeface="Plus Jakarta Sans" pitchFamily="34" charset="-120"/>
               </a:rPr>
-              <a:t>under a Duta: −4 (−50%); all from test Duta accounts</a:t>
+              <a:t>under a Duta: −4 (−50%) on the week before</a:t>
             </a:r>
             <a:endParaRPr lang="en-US" sz="950" dirty="0"/>
           </a:p>
@@ -2446,11 +2446,22 @@
                 <a:ea typeface="Plus Jakarta Sans" pitchFamily="34" charset="-122"/>
                 <a:cs typeface="Plus Jakarta Sans" pitchFamily="34" charset="-120"/>
               </a:rPr>
-              <a:t>0</a:t>
+              <a:t>3</a:t>
             </a:r>
             <a:pPr indent="0" marL="0">
               <a:buNone/>
             </a:pPr>
+            <a:r>
+              <a:rPr lang="en-US" sz="1400" b="1" dirty="0">
+                <a:solidFill>
+                  <a:srgbClr val="4A653B"/>
+                </a:solidFill>
+                <a:latin typeface="Plus Jakarta Sans" pitchFamily="34" charset="0"/>
+                <a:ea typeface="Plus Jakarta Sans" pitchFamily="34" charset="-122"/>
+                <a:cs typeface="Plus Jakarta Sans" pitchFamily="34" charset="-120"/>
+              </a:rPr>
+              <a:t>/8</a:t>
+            </a:r>
             <a:endParaRPr lang="en-US" sz="2800" dirty="0"/>
           </a:p>
         </p:txBody>
@@ -2490,7 +2501,7 @@
                 <a:ea typeface="Plus Jakarta Sans" pitchFamily="34" charset="-122"/>
                 <a:cs typeface="Plus Jakarta Sans" pitchFamily="34" charset="-120"/>
               </a:rPr>
-              <a:t>from real Dutas last week; 1 in 7 weeks</a:t>
+              <a:t>Dutas registered a farmer last week (Rudi, Satria K, Sazali Wandana)</a:t>
             </a:r>
             <a:endParaRPr lang="en-US" sz="950" dirty="0"/>
           </a:p>
@@ -2597,7 +2608,7 @@
                 <a:ea typeface="Plus Jakarta Sans" pitchFamily="34" charset="-122"/>
                 <a:cs typeface="Plus Jakarta Sans" pitchFamily="34" charset="-120"/>
               </a:rPr>
-              <a:t>Under Duta is test accounts, not Dutas</a:t>
+              <a:t>Dutas halved, from a small base</a:t>
             </a:r>
             <a:endParaRPr lang="en-US" sz="1300" dirty="0"/>
           </a:p>
@@ -2617,7 +2628,7 @@
                 <a:ea typeface="Plus Jakarta Sans" pitchFamily="34" charset="-122"/>
                 <a:cs typeface="Plus Jakarta Sans" pitchFamily="34" charset="-120"/>
               </a:rPr>
-              <a:t>4 of 4 under-Duta farmers last week and 8 of 8 the week before sit under test Duta accounts. Only 1 farmer in 7 weeks came through a real Duta.</a:t>
+              <a:t>8 → 4 farmers (1.1% of all). 3 of 8 Dutas registered a farmer last week; Rudi leads with 9 in 7 weeks. 7 of the 8 are internal team, external Dutas brought 1.</a:t>
             </a:r>
             <a:endParaRPr lang="en-US" sz="1300" dirty="0"/>
           </a:p>
@@ -2784,7 +2795,7 @@
                 <a:ea typeface="Plus Jakarta Sans" pitchFamily="34" charset="-122"/>
                 <a:cs typeface="Plus Jakarta Sans" pitchFamily="34" charset="-120"/>
               </a:rPr>
-              <a:t>Non-Duta channels bring 99% of farmers; the Duta channel has not yet brought real farmers. Win back organic registrations and start real Dutas.</a:t>
+              <a:t>Non-Duta channels bring 99% of farmers. Win back organic registrations, and get every Duta registering farmers each week.</a:t>
             </a:r>
             <a:endParaRPr lang="en-US" sz="950" dirty="0"/>
           </a:p>
@@ -2801,7 +2812,7 @@
                 <a:ea typeface="Plus Jakarta Sans" pitchFamily="34" charset="-122"/>
                 <a:cs typeface="Plus Jakarta Sans" pitchFamily="34" charset="-120"/>
               </a:rPr>
-              <a:t>Farmers counted by registration week (minggu_register). The week of 12 Oct is in progress and left out. Under Duta = akuisisi_type “Under Duta”; test = is_test_duta 1 or “Test” in the Duta name.</a:t>
+              <a:t>Farmers counted by registration week (minggu_register). The week of 12 Oct is in progress and left out. Duta = akuisisi_type “Under Duta”, internal-team and external Dutas alike.</a:t>
             </a:r>
             <a:endParaRPr lang="en-US" sz="950" dirty="0"/>
           </a:p>
@@ -3126,7 +3137,7 @@
                 <a:ea typeface="Plus Jakarta Sans" pitchFamily="34" charset="-122"/>
                 <a:cs typeface="Plus Jakarta Sans" pitchFamily="34" charset="-120"/>
               </a:rPr>
-              <a:t>376 farmers joined last week, −103 (−22%) on the week before; none came through a real Duta</a:t>
+              <a:t>Dutas brought 4 farmers last week (−4), 1.1% of 376; non-Duta 372 (−99)</a:t>
             </a:r>
             <a:endParaRPr lang="en-US" sz="2300" dirty="0"/>
           </a:p>
@@ -3141,121 +3152,11 @@
         <p:spPr>
           <a:xfrm>
             <a:off x="762000" y="1714500"/>
-            <a:ext cx="2457450" cy="800100"/>
+            <a:ext cx="5308600" cy="3543300"/>
           </a:xfrm>
           <a:prstGeom prst="roundRect">
             <a:avLst>
-              <a:gd name="adj" fmla="val 13714"/>
-            </a:avLst>
-          </a:prstGeom>
-          <a:solidFill>
-            <a:srgbClr val="4A653B"/>
-          </a:solidFill>
-          <a:ln w="12700">
-            <a:solidFill>
-              <a:srgbClr val="4A653B"/>
-            </a:solidFill>
-            <a:prstDash val="solid"/>
-          </a:ln>
-        </p:spPr>
-      </p:sp>
-      <p:sp>
-        <p:nvSpPr>
-          <p:cNvPr id="12" name="Text 7"/>
-          <p:cNvSpPr txBox="1"/>
-          <p:nvPr/>
-        </p:nvSpPr>
-        <p:spPr>
-          <a:xfrm>
-            <a:off x="914400" y="1828800"/>
-            <a:ext cx="2152650" cy="457200"/>
-          </a:xfrm>
-          <a:prstGeom prst="rect">
-            <a:avLst/>
-          </a:prstGeom>
-          <a:noFill/>
-          <a:ln/>
-        </p:spPr>
-        <p:txBody>
-          <a:bodyPr wrap="square" lIns="0" tIns="0" rIns="0" bIns="0" rtlCol="0" anchor="t"/>
-          <a:lstStyle/>
-          <a:p>
-            <a:pPr indent="0" marL="0">
-              <a:buNone/>
-            </a:pPr>
-            <a:r>
-              <a:rPr lang="en-US" sz="2800" b="1" dirty="0">
-                <a:solidFill>
-                  <a:srgbClr val="FFFFFF"/>
-                </a:solidFill>
-                <a:latin typeface="Plus Jakarta Sans" pitchFamily="34" charset="0"/>
-                <a:ea typeface="Plus Jakarta Sans" pitchFamily="34" charset="-122"/>
-                <a:cs typeface="Plus Jakarta Sans" pitchFamily="34" charset="-120"/>
-              </a:rPr>
-              <a:t>376</a:t>
-            </a:r>
-            <a:pPr indent="0" marL="0">
-              <a:buNone/>
-            </a:pPr>
-            <a:endParaRPr lang="en-US" sz="2800" dirty="0"/>
-          </a:p>
-        </p:txBody>
-      </p:sp>
-      <p:sp>
-        <p:nvSpPr>
-          <p:cNvPr id="13" name="Text 8"/>
-          <p:cNvSpPr txBox="1"/>
-          <p:nvPr/>
-        </p:nvSpPr>
-        <p:spPr>
-          <a:xfrm>
-            <a:off x="914400" y="2247900"/>
-            <a:ext cx="2152650" cy="209550"/>
-          </a:xfrm>
-          <a:prstGeom prst="rect">
-            <a:avLst/>
-          </a:prstGeom>
-          <a:noFill/>
-          <a:ln/>
-        </p:spPr>
-        <p:txBody>
-          <a:bodyPr wrap="square" lIns="0" tIns="0" rIns="0" bIns="0" rtlCol="0" anchor="t">
-            <a:normAutofit/>
-          </a:bodyPr>
-          <a:lstStyle/>
-          <a:p>
-            <a:pPr indent="0" marL="0">
-              <a:buNone/>
-            </a:pPr>
-            <a:r>
-              <a:rPr lang="en-US" sz="950" dirty="0">
-                <a:solidFill>
-                  <a:srgbClr val="E4ECDD"/>
-                </a:solidFill>
-                <a:latin typeface="Plus Jakarta Sans" pitchFamily="34" charset="0"/>
-                <a:ea typeface="Plus Jakarta Sans" pitchFamily="34" charset="-122"/>
-                <a:cs typeface="Plus Jakarta Sans" pitchFamily="34" charset="-120"/>
-              </a:rPr>
-              <a:t>farmers registered 5–11 Oct (479 the week before, −22%)</a:t>
-            </a:r>
-            <a:endParaRPr lang="en-US" sz="950" dirty="0"/>
-          </a:p>
-        </p:txBody>
-      </p:sp>
-      <p:sp>
-        <p:nvSpPr>
-          <p:cNvPr id="14" name="Shape 9"/>
-          <p:cNvSpPr/>
-          <p:nvPr/>
-        </p:nvSpPr>
-        <p:spPr>
-          <a:xfrm>
-            <a:off x="3371850" y="1714500"/>
-            <a:ext cx="2457450" cy="800100"/>
-          </a:xfrm>
-          <a:prstGeom prst="roundRect">
-            <a:avLst>
-              <a:gd name="adj" fmla="val 13714"/>
+              <a:gd name="adj" fmla="val 3097"/>
             </a:avLst>
           </a:prstGeom>
           <a:solidFill>
@@ -3271,344 +3172,14 @@
       </p:sp>
       <p:sp>
         <p:nvSpPr>
-          <p:cNvPr id="15" name="Text 10"/>
+          <p:cNvPr id="12" name="Text 7"/>
           <p:cNvSpPr txBox="1"/>
           <p:nvPr/>
         </p:nvSpPr>
         <p:spPr>
           <a:xfrm>
-            <a:off x="3524250" y="1828800"/>
-            <a:ext cx="2152650" cy="457200"/>
-          </a:xfrm>
-          <a:prstGeom prst="rect">
-            <a:avLst/>
-          </a:prstGeom>
-          <a:noFill/>
-          <a:ln/>
-        </p:spPr>
-        <p:txBody>
-          <a:bodyPr wrap="square" lIns="0" tIns="0" rIns="0" bIns="0" rtlCol="0" anchor="t"/>
-          <a:lstStyle/>
-          <a:p>
-            <a:pPr indent="0" marL="0">
-              <a:buNone/>
-            </a:pPr>
-            <a:r>
-              <a:rPr lang="en-US" sz="2800" b="1" dirty="0">
-                <a:solidFill>
-                  <a:srgbClr val="274E13"/>
-                </a:solidFill>
-                <a:latin typeface="Plus Jakarta Sans" pitchFamily="34" charset="0"/>
-                <a:ea typeface="Plus Jakarta Sans" pitchFamily="34" charset="-122"/>
-                <a:cs typeface="Plus Jakarta Sans" pitchFamily="34" charset="-120"/>
-              </a:rPr>
-              <a:t>372</a:t>
-            </a:r>
-            <a:pPr indent="0" marL="0">
-              <a:buNone/>
-            </a:pPr>
-            <a:endParaRPr lang="en-US" sz="2800" dirty="0"/>
-          </a:p>
-        </p:txBody>
-      </p:sp>
-      <p:sp>
-        <p:nvSpPr>
-          <p:cNvPr id="16" name="Text 11"/>
-          <p:cNvSpPr txBox="1"/>
-          <p:nvPr/>
-        </p:nvSpPr>
-        <p:spPr>
-          <a:xfrm>
-            <a:off x="3524250" y="2247900"/>
-            <a:ext cx="2152650" cy="209550"/>
-          </a:xfrm>
-          <a:prstGeom prst="rect">
-            <a:avLst/>
-          </a:prstGeom>
-          <a:noFill/>
-          <a:ln/>
-        </p:spPr>
-        <p:txBody>
-          <a:bodyPr wrap="square" lIns="0" tIns="0" rIns="0" bIns="0" rtlCol="0" anchor="t">
-            <a:normAutofit/>
-          </a:bodyPr>
-          <a:lstStyle/>
-          <a:p>
-            <a:pPr indent="0" marL="0">
-              <a:buNone/>
-            </a:pPr>
-            <a:r>
-              <a:rPr lang="en-US" sz="950" dirty="0">
-                <a:solidFill>
-                  <a:srgbClr val="535353"/>
-                </a:solidFill>
-                <a:latin typeface="Plus Jakarta Sans" pitchFamily="34" charset="0"/>
-                <a:ea typeface="Plus Jakarta Sans" pitchFamily="34" charset="-122"/>
-                <a:cs typeface="Plus Jakarta Sans" pitchFamily="34" charset="-120"/>
-              </a:rPr>
-              <a:t>non-Duta (98.9% of farmers), −99 on the week before</a:t>
-            </a:r>
-            <a:endParaRPr lang="en-US" sz="950" dirty="0"/>
-          </a:p>
-        </p:txBody>
-      </p:sp>
-      <p:sp>
-        <p:nvSpPr>
-          <p:cNvPr id="17" name="Shape 12"/>
-          <p:cNvSpPr/>
-          <p:nvPr/>
-        </p:nvSpPr>
-        <p:spPr>
-          <a:xfrm>
-            <a:off x="5981700" y="1714500"/>
-            <a:ext cx="2457450" cy="800100"/>
-          </a:xfrm>
-          <a:prstGeom prst="roundRect">
-            <a:avLst>
-              <a:gd name="adj" fmla="val 13714"/>
-            </a:avLst>
-          </a:prstGeom>
-          <a:solidFill>
-            <a:srgbClr val="FFFFFF"/>
-          </a:solidFill>
-          <a:ln w="12700">
-            <a:solidFill>
-              <a:srgbClr val="FFFFFF"/>
-            </a:solidFill>
-            <a:prstDash val="solid"/>
-          </a:ln>
-        </p:spPr>
-      </p:sp>
-      <p:sp>
-        <p:nvSpPr>
-          <p:cNvPr id="18" name="Text 13"/>
-          <p:cNvSpPr txBox="1"/>
-          <p:nvPr/>
-        </p:nvSpPr>
-        <p:spPr>
-          <a:xfrm>
-            <a:off x="6134100" y="1828800"/>
-            <a:ext cx="2152650" cy="457200"/>
-          </a:xfrm>
-          <a:prstGeom prst="rect">
-            <a:avLst/>
-          </a:prstGeom>
-          <a:noFill/>
-          <a:ln/>
-        </p:spPr>
-        <p:txBody>
-          <a:bodyPr wrap="square" lIns="0" tIns="0" rIns="0" bIns="0" rtlCol="0" anchor="t"/>
-          <a:lstStyle/>
-          <a:p>
-            <a:pPr indent="0" marL="0">
-              <a:buNone/>
-            </a:pPr>
-            <a:r>
-              <a:rPr lang="en-US" sz="2800" b="1" dirty="0">
-                <a:solidFill>
-                  <a:srgbClr val="274E13"/>
-                </a:solidFill>
-                <a:latin typeface="Plus Jakarta Sans" pitchFamily="34" charset="0"/>
-                <a:ea typeface="Plus Jakarta Sans" pitchFamily="34" charset="-122"/>
-                <a:cs typeface="Plus Jakarta Sans" pitchFamily="34" charset="-120"/>
-              </a:rPr>
-              <a:t>4</a:t>
-            </a:r>
-            <a:pPr indent="0" marL="0">
-              <a:buNone/>
-            </a:pPr>
-            <a:endParaRPr lang="en-US" sz="2800" dirty="0"/>
-          </a:p>
-        </p:txBody>
-      </p:sp>
-      <p:sp>
-        <p:nvSpPr>
-          <p:cNvPr id="19" name="Text 14"/>
-          <p:cNvSpPr txBox="1"/>
-          <p:nvPr/>
-        </p:nvSpPr>
-        <p:spPr>
-          <a:xfrm>
-            <a:off x="6134100" y="2247900"/>
-            <a:ext cx="2152650" cy="209550"/>
-          </a:xfrm>
-          <a:prstGeom prst="rect">
-            <a:avLst/>
-          </a:prstGeom>
-          <a:noFill/>
-          <a:ln/>
-        </p:spPr>
-        <p:txBody>
-          <a:bodyPr wrap="square" lIns="0" tIns="0" rIns="0" bIns="0" rtlCol="0" anchor="t">
-            <a:normAutofit/>
-          </a:bodyPr>
-          <a:lstStyle/>
-          <a:p>
-            <a:pPr indent="0" marL="0">
-              <a:buNone/>
-            </a:pPr>
-            <a:r>
-              <a:rPr lang="en-US" sz="950" dirty="0">
-                <a:solidFill>
-                  <a:srgbClr val="535353"/>
-                </a:solidFill>
-                <a:latin typeface="Plus Jakarta Sans" pitchFamily="34" charset="0"/>
-                <a:ea typeface="Plus Jakarta Sans" pitchFamily="34" charset="-122"/>
-                <a:cs typeface="Plus Jakarta Sans" pitchFamily="34" charset="-120"/>
-              </a:rPr>
-              <a:t>under a Duta, −4 on the week before; 4 from test Duta accounts</a:t>
-            </a:r>
-            <a:endParaRPr lang="en-US" sz="950" dirty="0"/>
-          </a:p>
-        </p:txBody>
-      </p:sp>
-      <p:sp>
-        <p:nvSpPr>
-          <p:cNvPr id="20" name="Shape 15"/>
-          <p:cNvSpPr/>
-          <p:nvPr/>
-        </p:nvSpPr>
-        <p:spPr>
-          <a:xfrm>
-            <a:off x="8591550" y="1714500"/>
-            <a:ext cx="2457450" cy="800100"/>
-          </a:xfrm>
-          <a:prstGeom prst="roundRect">
-            <a:avLst>
-              <a:gd name="adj" fmla="val 13714"/>
-            </a:avLst>
-          </a:prstGeom>
-          <a:solidFill>
-            <a:srgbClr val="FFFFFF"/>
-          </a:solidFill>
-          <a:ln w="12700">
-            <a:solidFill>
-              <a:srgbClr val="FFFFFF"/>
-            </a:solidFill>
-            <a:prstDash val="solid"/>
-          </a:ln>
-        </p:spPr>
-      </p:sp>
-      <p:sp>
-        <p:nvSpPr>
-          <p:cNvPr id="21" name="Text 16"/>
-          <p:cNvSpPr txBox="1"/>
-          <p:nvPr/>
-        </p:nvSpPr>
-        <p:spPr>
-          <a:xfrm>
-            <a:off x="8743950" y="1828800"/>
-            <a:ext cx="2152650" cy="457200"/>
-          </a:xfrm>
-          <a:prstGeom prst="rect">
-            <a:avLst/>
-          </a:prstGeom>
-          <a:noFill/>
-          <a:ln/>
-        </p:spPr>
-        <p:txBody>
-          <a:bodyPr wrap="square" lIns="0" tIns="0" rIns="0" bIns="0" rtlCol="0" anchor="t"/>
-          <a:lstStyle/>
-          <a:p>
-            <a:pPr indent="0" marL="0">
-              <a:buNone/>
-            </a:pPr>
-            <a:r>
-              <a:rPr lang="en-US" sz="2800" b="1" dirty="0">
-                <a:solidFill>
-                  <a:srgbClr val="274E13"/>
-                </a:solidFill>
-                <a:latin typeface="Plus Jakarta Sans" pitchFamily="34" charset="0"/>
-                <a:ea typeface="Plus Jakarta Sans" pitchFamily="34" charset="-122"/>
-                <a:cs typeface="Plus Jakarta Sans" pitchFamily="34" charset="-120"/>
-              </a:rPr>
-              <a:t>0</a:t>
-            </a:r>
-            <a:pPr indent="0" marL="0">
-              <a:buNone/>
-            </a:pPr>
-            <a:endParaRPr lang="en-US" sz="2800" dirty="0"/>
-          </a:p>
-        </p:txBody>
-      </p:sp>
-      <p:sp>
-        <p:nvSpPr>
-          <p:cNvPr id="22" name="Text 17"/>
-          <p:cNvSpPr txBox="1"/>
-          <p:nvPr/>
-        </p:nvSpPr>
-        <p:spPr>
-          <a:xfrm>
-            <a:off x="8743950" y="2247900"/>
-            <a:ext cx="2152650" cy="209550"/>
-          </a:xfrm>
-          <a:prstGeom prst="rect">
-            <a:avLst/>
-          </a:prstGeom>
-          <a:noFill/>
-          <a:ln/>
-        </p:spPr>
-        <p:txBody>
-          <a:bodyPr wrap="square" lIns="0" tIns="0" rIns="0" bIns="0" rtlCol="0" anchor="t">
-            <a:normAutofit/>
-          </a:bodyPr>
-          <a:lstStyle/>
-          <a:p>
-            <a:pPr indent="0" marL="0">
-              <a:buNone/>
-            </a:pPr>
-            <a:r>
-              <a:rPr lang="en-US" sz="950" dirty="0">
-                <a:solidFill>
-                  <a:srgbClr val="535353"/>
-                </a:solidFill>
-                <a:latin typeface="Plus Jakarta Sans" pitchFamily="34" charset="0"/>
-                <a:ea typeface="Plus Jakarta Sans" pitchFamily="34" charset="-122"/>
-                <a:cs typeface="Plus Jakarta Sans" pitchFamily="34" charset="-120"/>
-              </a:rPr>
-              <a:t>from real Dutas last week; 1 in all 7 weeks</a:t>
-            </a:r>
-            <a:endParaRPr lang="en-US" sz="950" dirty="0"/>
-          </a:p>
-        </p:txBody>
-      </p:sp>
-      <p:sp>
-        <p:nvSpPr>
-          <p:cNvPr id="23" name="Shape 18"/>
-          <p:cNvSpPr/>
-          <p:nvPr/>
-        </p:nvSpPr>
-        <p:spPr>
-          <a:xfrm>
-            <a:off x="762000" y="2647950"/>
-            <a:ext cx="5998029" cy="2609850"/>
-          </a:xfrm>
-          <a:prstGeom prst="roundRect">
-            <a:avLst>
-              <a:gd name="adj" fmla="val 4204"/>
-            </a:avLst>
-          </a:prstGeom>
-          <a:solidFill>
-            <a:srgbClr val="FFFFFF"/>
-          </a:solidFill>
-          <a:ln w="12700">
-            <a:solidFill>
-              <a:srgbClr val="FFFFFF"/>
-            </a:solidFill>
-            <a:prstDash val="solid"/>
-          </a:ln>
-        </p:spPr>
-      </p:sp>
-      <p:sp>
-        <p:nvSpPr>
-          <p:cNvPr id="24" name="Text 19"/>
-          <p:cNvSpPr txBox="1"/>
-          <p:nvPr/>
-        </p:nvSpPr>
-        <p:spPr>
-          <a:xfrm>
-            <a:off x="952500" y="2800350"/>
-            <a:ext cx="5617029" cy="256032"/>
+            <a:off x="952500" y="1866900"/>
+            <a:ext cx="4927600" cy="256032"/>
           </a:xfrm>
           <a:prstGeom prst="rect">
             <a:avLst/>
@@ -3640,14 +3211,14 @@
       </p:sp>
       <p:sp>
         <p:nvSpPr>
-          <p:cNvPr id="25" name="Text 20"/>
+          <p:cNvPr id="13" name="Text 8"/>
           <p:cNvSpPr txBox="1"/>
           <p:nvPr/>
         </p:nvSpPr>
         <p:spPr>
           <a:xfrm>
-            <a:off x="952500" y="3028950"/>
-            <a:ext cx="5617029" cy="228600"/>
+            <a:off x="952500" y="2095500"/>
+            <a:ext cx="4927600" cy="228600"/>
           </a:xfrm>
           <a:prstGeom prst="rect">
             <a:avLst/>
@@ -3694,20 +3265,20 @@
           </p:nvPr>
         </p:nvGraphicFramePr>
         <p:xfrm>
-          <a:off x="914400" y="3314700"/>
-          <a:ext cx="5693229" cy="914400"/>
+          <a:off x="914400" y="2381250"/>
+          <a:ext cx="5003800" cy="914400"/>
         </p:xfrm>
         <a:graphic>
           <a:graphicData uri="http://schemas.openxmlformats.org/drawingml/2006/table">
             <a:tbl>
               <a:tblPr/>
               <a:tblGrid>
-                <a:gridCol w="1856488"/>
-                <a:gridCol w="804478"/>
-                <a:gridCol w="804478"/>
-                <a:gridCol w="742595"/>
-                <a:gridCol w="680712"/>
-                <a:gridCol w="804478"/>
+                <a:gridCol w="1631674"/>
+                <a:gridCol w="707059"/>
+                <a:gridCol w="707059"/>
+                <a:gridCol w="652670"/>
+                <a:gridCol w="598280"/>
+                <a:gridCol w="707059"/>
               </a:tblGrid>
               <a:tr h="0">
                 <a:tc>
@@ -3795,7 +3366,7 @@
                           <a:ea typeface="Plus Jakarta Sans" pitchFamily="34" charset="-122"/>
                           <a:cs typeface="Plus Jakarta Sans" pitchFamily="34" charset="-120"/>
                         </a:rPr>
-                        <a:t>Week before (28 Sep)</a:t>
+                        <a:t>Week of 28 Sep</a:t>
                       </a:r>
                       <a:endParaRPr lang="en-US" sz="900" dirty="0">
                         <a:latin typeface="Plus Jakarta Sans" charset="0"/>
@@ -3863,7 +3434,7 @@
                           <a:ea typeface="Plus Jakarta Sans" pitchFamily="34" charset="-122"/>
                           <a:cs typeface="Plus Jakarta Sans" pitchFamily="34" charset="-120"/>
                         </a:rPr>
-                        <a:t>Last week (5 Oct)</a:t>
+                        <a:t>Week of 5 Oct</a:t>
                       </a:r>
                       <a:endParaRPr lang="en-US" sz="900" dirty="0">
                         <a:latin typeface="Plus Jakarta Sans" charset="0"/>
@@ -4137,7 +3708,7 @@
                           <a:ea typeface="Plus Jakarta Sans" pitchFamily="34" charset="-122"/>
                           <a:cs typeface="Plus Jakarta Sans" pitchFamily="34" charset="-120"/>
                         </a:rPr>
-                        <a:t>Under Duta</a:t>
+                        <a:t>Duta</a:t>
                       </a:r>
                       <a:endParaRPr lang="en-US" sz="900" dirty="0">
                         <a:latin typeface="Plus Jakarta Sans" charset="0"/>
@@ -4529,7 +4100,7 @@
                           <a:ea typeface="Plus Jakarta Sans" pitchFamily="34" charset="-122"/>
                           <a:cs typeface="Plus Jakarta Sans" pitchFamily="34" charset="-120"/>
                         </a:rPr>
-                        <a:t>   of which test Duta accounts</a:t>
+                        <a:t>   Internal-team Dutas</a:t>
                       </a:r>
                       <a:endParaRPr lang="en-US" sz="900" dirty="0">
                         <a:latin typeface="Plus Jakarta Sans" charset="0"/>
@@ -4910,7 +4481,7 @@
                           <a:ea typeface="Plus Jakarta Sans" pitchFamily="34" charset="-122"/>
                           <a:cs typeface="Plus Jakarta Sans" pitchFamily="34" charset="-120"/>
                         </a:rPr>
-                        <a:t>   of which real Dutas</a:t>
+                        <a:t>   External Dutas</a:t>
                       </a:r>
                       <a:endParaRPr lang="en-US" sz="900" dirty="0">
                         <a:latin typeface="Plus Jakarta Sans" charset="0"/>
@@ -6063,18 +5634,18 @@
       </p:graphicFrame>
       <p:sp>
         <p:nvSpPr>
-          <p:cNvPr id="27" name="Shape 21"/>
+          <p:cNvPr id="15" name="Shape 9"/>
           <p:cNvSpPr/>
           <p:nvPr/>
         </p:nvSpPr>
         <p:spPr>
           <a:xfrm>
-            <a:off x="6912429" y="2647950"/>
-            <a:ext cx="4136571" cy="2609850"/>
+            <a:off x="6223000" y="1714500"/>
+            <a:ext cx="4826000" cy="3543300"/>
           </a:xfrm>
           <a:prstGeom prst="roundRect">
             <a:avLst>
-              <a:gd name="adj" fmla="val 4204"/>
+              <a:gd name="adj" fmla="val 3097"/>
             </a:avLst>
           </a:prstGeom>
           <a:solidFill>
@@ -6090,14 +5661,14 @@
       </p:sp>
       <p:sp>
         <p:nvSpPr>
-          <p:cNvPr id="28" name="Text 22"/>
+          <p:cNvPr id="16" name="Text 10"/>
           <p:cNvSpPr txBox="1"/>
           <p:nvPr/>
         </p:nvSpPr>
         <p:spPr>
           <a:xfrm>
-            <a:off x="7102929" y="2800350"/>
-            <a:ext cx="3755571" cy="256032"/>
+            <a:off x="6413500" y="1866900"/>
+            <a:ext cx="4445000" cy="256032"/>
           </a:xfrm>
           <a:prstGeom prst="rect">
             <a:avLst/>
@@ -6121,7 +5692,7 @@
                 <a:ea typeface="Plus Jakarta Sans" pitchFamily="34" charset="-122"/>
                 <a:cs typeface="Plus Jakarta Sans" pitchFamily="34" charset="-120"/>
               </a:rPr>
-              <a:t>Under-Duta farmers by week</a:t>
+              <a:t>Farmers by Duta</a:t>
             </a:r>
             <a:endParaRPr lang="en-US" sz="1300" dirty="0"/>
           </a:p>
@@ -6129,14 +5700,14 @@
       </p:sp>
       <p:sp>
         <p:nvSpPr>
-          <p:cNvPr id="29" name="Text 23"/>
+          <p:cNvPr id="17" name="Text 11"/>
           <p:cNvSpPr txBox="1"/>
           <p:nvPr/>
         </p:nvSpPr>
         <p:spPr>
           <a:xfrm>
-            <a:off x="7102929" y="3028950"/>
-            <a:ext cx="3755571" cy="228600"/>
+            <a:off x="6413500" y="2095500"/>
+            <a:ext cx="4445000" cy="228600"/>
           </a:xfrm>
           <a:prstGeom prst="rect">
             <a:avLst/>
@@ -6162,1190 +5733,3595 @@
                 <a:ea typeface="Plus Jakarta Sans" pitchFamily="34" charset="-122"/>
                 <a:cs typeface="Plus Jakarta Sans" pitchFamily="34" charset="-120"/>
               </a:rPr>
-              <a:t>Test Duta accounts vs real Dutas</a:t>
+              <a:t>Last week first; 7 weeks = 24 Aug – 5 Oct</a:t>
             </a:r>
             <a:endParaRPr lang="en-US" sz="950" dirty="0"/>
           </a:p>
         </p:txBody>
       </p:sp>
-      <p:sp>
-        <p:nvSpPr>
-          <p:cNvPr id="30" name="Shape 24"/>
-          <p:cNvSpPr/>
-          <p:nvPr/>
-        </p:nvSpPr>
-        <p:spPr>
-          <a:xfrm>
-            <a:off x="7121979" y="3343275"/>
-            <a:ext cx="104775" cy="104775"/>
-          </a:xfrm>
-          <a:prstGeom prst="roundRect">
-            <a:avLst>
-              <a:gd name="adj" fmla="val 18182"/>
-            </a:avLst>
-          </a:prstGeom>
-          <a:solidFill>
-            <a:srgbClr val="B9C2B0"/>
-          </a:solidFill>
-          <a:ln w="12700">
-            <a:solidFill>
-              <a:srgbClr val="B9C2B0"/>
-            </a:solidFill>
-            <a:prstDash val="solid"/>
-          </a:ln>
-        </p:spPr>
-      </p:sp>
-      <p:sp>
-        <p:nvSpPr>
-          <p:cNvPr id="31" name="Text 25"/>
-          <p:cNvSpPr txBox="1"/>
-          <p:nvPr/>
-        </p:nvSpPr>
-        <p:spPr>
-          <a:xfrm>
-            <a:off x="7274379" y="3314700"/>
-            <a:ext cx="1176147" cy="161925"/>
-          </a:xfrm>
-          <a:prstGeom prst="rect">
-            <a:avLst/>
-          </a:prstGeom>
-          <a:noFill/>
-          <a:ln/>
-        </p:spPr>
-        <p:txBody>
-          <a:bodyPr wrap="square" lIns="0" tIns="0" rIns="0" bIns="0" rtlCol="0" anchor="ctr"/>
-          <a:lstStyle/>
-          <a:p>
-            <a:pPr algn="l" indent="0" marL="0">
-              <a:lnSpc>
-                <a:spcPct val="95000"/>
-              </a:lnSpc>
-              <a:buNone/>
-            </a:pPr>
-            <a:r>
-              <a:rPr lang="en-US" sz="860" dirty="0">
-                <a:solidFill>
-                  <a:srgbClr val="535353"/>
-                </a:solidFill>
-                <a:latin typeface="Plus Jakarta Sans" pitchFamily="34" charset="0"/>
-                <a:ea typeface="Plus Jakarta Sans" pitchFamily="34" charset="-122"/>
-                <a:cs typeface="Plus Jakarta Sans" pitchFamily="34" charset="-120"/>
-              </a:rPr>
-              <a:t>Test Duta account</a:t>
-            </a:r>
-            <a:endParaRPr lang="en-US" sz="860" dirty="0"/>
-          </a:p>
-        </p:txBody>
-      </p:sp>
-      <p:sp>
-        <p:nvSpPr>
-          <p:cNvPr id="32" name="Shape 26"/>
-          <p:cNvSpPr/>
-          <p:nvPr/>
-        </p:nvSpPr>
-        <p:spPr>
-          <a:xfrm>
-            <a:off x="8450526" y="3343275"/>
-            <a:ext cx="104775" cy="104775"/>
-          </a:xfrm>
-          <a:prstGeom prst="roundRect">
-            <a:avLst>
-              <a:gd name="adj" fmla="val 18182"/>
-            </a:avLst>
-          </a:prstGeom>
-          <a:solidFill>
-            <a:srgbClr val="B85A28"/>
-          </a:solidFill>
-          <a:ln w="12700">
-            <a:solidFill>
-              <a:srgbClr val="B85A28"/>
-            </a:solidFill>
-            <a:prstDash val="solid"/>
-          </a:ln>
-        </p:spPr>
-      </p:sp>
-      <p:sp>
-        <p:nvSpPr>
-          <p:cNvPr id="33" name="Text 27"/>
-          <p:cNvSpPr txBox="1"/>
-          <p:nvPr/>
-        </p:nvSpPr>
-        <p:spPr>
-          <a:xfrm>
-            <a:off x="8602926" y="3314700"/>
-            <a:ext cx="685419" cy="161925"/>
-          </a:xfrm>
-          <a:prstGeom prst="rect">
-            <a:avLst/>
-          </a:prstGeom>
-          <a:noFill/>
-          <a:ln/>
-        </p:spPr>
-        <p:txBody>
-          <a:bodyPr wrap="square" lIns="0" tIns="0" rIns="0" bIns="0" rtlCol="0" anchor="ctr"/>
-          <a:lstStyle/>
-          <a:p>
-            <a:pPr algn="l" indent="0" marL="0">
-              <a:lnSpc>
-                <a:spcPct val="95000"/>
-              </a:lnSpc>
-              <a:buNone/>
-            </a:pPr>
-            <a:r>
-              <a:rPr lang="en-US" sz="860" dirty="0">
-                <a:solidFill>
-                  <a:srgbClr val="535353"/>
-                </a:solidFill>
-                <a:latin typeface="Plus Jakarta Sans" pitchFamily="34" charset="0"/>
-                <a:ea typeface="Plus Jakarta Sans" pitchFamily="34" charset="-122"/>
-                <a:cs typeface="Plus Jakarta Sans" pitchFamily="34" charset="-120"/>
-              </a:rPr>
-              <a:t>Real Duta</a:t>
-            </a:r>
-            <a:endParaRPr lang="en-US" sz="860" dirty="0"/>
-          </a:p>
-        </p:txBody>
-      </p:sp>
-      <p:sp>
-        <p:nvSpPr>
-          <p:cNvPr id="34" name="Shape 28"/>
-          <p:cNvSpPr/>
-          <p:nvPr/>
-        </p:nvSpPr>
-        <p:spPr>
-          <a:xfrm>
-            <a:off x="7222881" y="4752975"/>
-            <a:ext cx="329262" cy="142875"/>
-          </a:xfrm>
-          <a:prstGeom prst="roundRect">
-            <a:avLst>
-              <a:gd name="adj" fmla="val 20000"/>
-            </a:avLst>
-          </a:prstGeom>
-          <a:solidFill>
-            <a:srgbClr val="B9C2B0"/>
-          </a:solidFill>
-          <a:ln w="12700">
-            <a:solidFill>
-              <a:srgbClr val="B9C2B0"/>
-            </a:solidFill>
-            <a:prstDash val="solid"/>
-          </a:ln>
-        </p:spPr>
-      </p:sp>
-      <p:sp>
-        <p:nvSpPr>
-          <p:cNvPr id="35" name="Text 29"/>
-          <p:cNvSpPr txBox="1"/>
-          <p:nvPr/>
-        </p:nvSpPr>
-        <p:spPr>
-          <a:xfrm>
-            <a:off x="7006512" y="4581525"/>
-            <a:ext cx="762000" cy="152400"/>
-          </a:xfrm>
-          <a:prstGeom prst="rect">
-            <a:avLst/>
-          </a:prstGeom>
-          <a:noFill/>
-          <a:ln/>
-        </p:spPr>
-        <p:txBody>
-          <a:bodyPr wrap="square" lIns="0" tIns="0" rIns="0" bIns="0" rtlCol="0" anchor="ctr"/>
-          <a:lstStyle/>
-          <a:p>
-            <a:pPr algn="ctr" indent="0" marL="0">
-              <a:lnSpc>
-                <a:spcPct val="95000"/>
-              </a:lnSpc>
-              <a:buNone/>
-            </a:pPr>
-            <a:r>
-              <a:rPr lang="en-US" sz="860" b="1" dirty="0">
-                <a:solidFill>
-                  <a:srgbClr val="2B2F28"/>
-                </a:solidFill>
-                <a:latin typeface="Plus Jakarta Sans" pitchFamily="34" charset="0"/>
-                <a:ea typeface="Plus Jakarta Sans" pitchFamily="34" charset="-122"/>
-                <a:cs typeface="Plus Jakarta Sans" pitchFamily="34" charset="-120"/>
-              </a:rPr>
-              <a:t>1</a:t>
-            </a:r>
-            <a:endParaRPr lang="en-US" sz="860" dirty="0"/>
-          </a:p>
-        </p:txBody>
-      </p:sp>
-      <p:sp>
-        <p:nvSpPr>
-          <p:cNvPr id="36" name="Text 30"/>
-          <p:cNvSpPr txBox="1"/>
-          <p:nvPr/>
-        </p:nvSpPr>
-        <p:spPr>
-          <a:xfrm>
-            <a:off x="7131504" y="4943475"/>
-            <a:ext cx="512017" cy="180975"/>
-          </a:xfrm>
-          <a:prstGeom prst="rect">
-            <a:avLst/>
-          </a:prstGeom>
-          <a:noFill/>
-          <a:ln/>
-        </p:spPr>
-        <p:txBody>
-          <a:bodyPr wrap="square" lIns="0" tIns="0" rIns="0" bIns="0" rtlCol="0" anchor="t"/>
-          <a:lstStyle/>
-          <a:p>
-            <a:pPr algn="ctr" indent="0" marL="0">
-              <a:lnSpc>
-                <a:spcPct val="95000"/>
-              </a:lnSpc>
-              <a:buNone/>
-            </a:pPr>
-            <a:r>
-              <a:rPr lang="en-US" sz="830" dirty="0">
-                <a:solidFill>
-                  <a:srgbClr val="2B2F28"/>
-                </a:solidFill>
-                <a:latin typeface="Plus Jakarta Sans" pitchFamily="34" charset="0"/>
-                <a:ea typeface="Plus Jakarta Sans" pitchFamily="34" charset="-122"/>
-                <a:cs typeface="Plus Jakarta Sans" pitchFamily="34" charset="-120"/>
-              </a:rPr>
-              <a:t>24 Aug</a:t>
-            </a:r>
-            <a:endParaRPr lang="en-US" sz="830" dirty="0"/>
-          </a:p>
-        </p:txBody>
-      </p:sp>
-      <p:sp>
-        <p:nvSpPr>
-          <p:cNvPr id="37" name="Shape 31"/>
-          <p:cNvSpPr/>
-          <p:nvPr/>
-        </p:nvSpPr>
-        <p:spPr>
-          <a:xfrm>
-            <a:off x="7753949" y="4467225"/>
-            <a:ext cx="329262" cy="428625"/>
-          </a:xfrm>
-          <a:prstGeom prst="roundRect">
-            <a:avLst>
-              <a:gd name="adj" fmla="val 8678"/>
-            </a:avLst>
-          </a:prstGeom>
-          <a:solidFill>
-            <a:srgbClr val="B9C2B0"/>
-          </a:solidFill>
-          <a:ln w="12700">
-            <a:solidFill>
-              <a:srgbClr val="B9C2B0"/>
-            </a:solidFill>
-            <a:prstDash val="solid"/>
-          </a:ln>
-        </p:spPr>
-      </p:sp>
-      <p:sp>
-        <p:nvSpPr>
-          <p:cNvPr id="38" name="Text 32"/>
-          <p:cNvSpPr txBox="1"/>
-          <p:nvPr/>
-        </p:nvSpPr>
-        <p:spPr>
-          <a:xfrm>
-            <a:off x="7753949" y="4467225"/>
-            <a:ext cx="329262" cy="428625"/>
-          </a:xfrm>
-          <a:prstGeom prst="rect">
-            <a:avLst/>
-          </a:prstGeom>
-          <a:noFill/>
-          <a:ln/>
-        </p:spPr>
-        <p:txBody>
-          <a:bodyPr wrap="square" lIns="0" tIns="0" rIns="0" bIns="0" rtlCol="0" anchor="ctr"/>
-          <a:lstStyle/>
-          <a:p>
-            <a:pPr algn="ctr" indent="0" marL="0">
-              <a:lnSpc>
-                <a:spcPct val="95000"/>
-              </a:lnSpc>
-              <a:buNone/>
-            </a:pPr>
-            <a:r>
-              <a:rPr lang="en-US" sz="800" b="1" dirty="0">
-                <a:solidFill>
-                  <a:srgbClr val="2B2F28"/>
-                </a:solidFill>
-                <a:latin typeface="Plus Jakarta Sans" pitchFamily="34" charset="0"/>
-                <a:ea typeface="Plus Jakarta Sans" pitchFamily="34" charset="-122"/>
-                <a:cs typeface="Plus Jakarta Sans" pitchFamily="34" charset="-120"/>
-              </a:rPr>
-              <a:t>3</a:t>
-            </a:r>
-            <a:endParaRPr lang="en-US" sz="800" dirty="0"/>
-          </a:p>
-        </p:txBody>
-      </p:sp>
-      <p:sp>
-        <p:nvSpPr>
-          <p:cNvPr id="39" name="Text 33"/>
-          <p:cNvSpPr txBox="1"/>
-          <p:nvPr/>
-        </p:nvSpPr>
-        <p:spPr>
-          <a:xfrm>
-            <a:off x="7537580" y="4295775"/>
-            <a:ext cx="762000" cy="152400"/>
-          </a:xfrm>
-          <a:prstGeom prst="rect">
-            <a:avLst/>
-          </a:prstGeom>
-          <a:noFill/>
-          <a:ln/>
-        </p:spPr>
-        <p:txBody>
-          <a:bodyPr wrap="square" lIns="0" tIns="0" rIns="0" bIns="0" rtlCol="0" anchor="ctr"/>
-          <a:lstStyle/>
-          <a:p>
-            <a:pPr algn="ctr" indent="0" marL="0">
-              <a:lnSpc>
-                <a:spcPct val="95000"/>
-              </a:lnSpc>
-              <a:buNone/>
-            </a:pPr>
-            <a:r>
-              <a:rPr lang="en-US" sz="860" b="1" dirty="0">
-                <a:solidFill>
-                  <a:srgbClr val="2B2F28"/>
-                </a:solidFill>
-                <a:latin typeface="Plus Jakarta Sans" pitchFamily="34" charset="0"/>
-                <a:ea typeface="Plus Jakarta Sans" pitchFamily="34" charset="-122"/>
-                <a:cs typeface="Plus Jakarta Sans" pitchFamily="34" charset="-120"/>
-              </a:rPr>
-              <a:t>3</a:t>
-            </a:r>
-            <a:endParaRPr lang="en-US" sz="860" dirty="0"/>
-          </a:p>
-        </p:txBody>
-      </p:sp>
-      <p:sp>
-        <p:nvSpPr>
-          <p:cNvPr id="40" name="Text 34"/>
-          <p:cNvSpPr txBox="1"/>
-          <p:nvPr/>
-        </p:nvSpPr>
-        <p:spPr>
-          <a:xfrm>
-            <a:off x="7662571" y="4943475"/>
-            <a:ext cx="512017" cy="180975"/>
-          </a:xfrm>
-          <a:prstGeom prst="rect">
-            <a:avLst/>
-          </a:prstGeom>
-          <a:noFill/>
-          <a:ln/>
-        </p:spPr>
-        <p:txBody>
-          <a:bodyPr wrap="square" lIns="0" tIns="0" rIns="0" bIns="0" rtlCol="0" anchor="t"/>
-          <a:lstStyle/>
-          <a:p>
-            <a:pPr algn="ctr" indent="0" marL="0">
-              <a:lnSpc>
-                <a:spcPct val="95000"/>
-              </a:lnSpc>
-              <a:buNone/>
-            </a:pPr>
-            <a:r>
-              <a:rPr lang="en-US" sz="830" dirty="0">
-                <a:solidFill>
-                  <a:srgbClr val="2B2F28"/>
-                </a:solidFill>
-                <a:latin typeface="Plus Jakarta Sans" pitchFamily="34" charset="0"/>
-                <a:ea typeface="Plus Jakarta Sans" pitchFamily="34" charset="-122"/>
-                <a:cs typeface="Plus Jakarta Sans" pitchFamily="34" charset="-120"/>
-              </a:rPr>
-              <a:t>31 Aug</a:t>
-            </a:r>
-            <a:endParaRPr lang="en-US" sz="830" dirty="0"/>
-          </a:p>
-        </p:txBody>
-      </p:sp>
-      <p:sp>
-        <p:nvSpPr>
-          <p:cNvPr id="41" name="Shape 35"/>
-          <p:cNvSpPr/>
-          <p:nvPr/>
-        </p:nvSpPr>
-        <p:spPr>
-          <a:xfrm>
-            <a:off x="8285016" y="4752975"/>
-            <a:ext cx="329262" cy="142875"/>
-          </a:xfrm>
-          <a:prstGeom prst="roundRect">
-            <a:avLst>
-              <a:gd name="adj" fmla="val 20000"/>
-            </a:avLst>
-          </a:prstGeom>
-          <a:solidFill>
-            <a:srgbClr val="B9C2B0"/>
-          </a:solidFill>
-          <a:ln w="12700">
-            <a:solidFill>
-              <a:srgbClr val="B9C2B0"/>
-            </a:solidFill>
-            <a:prstDash val="solid"/>
-          </a:ln>
-        </p:spPr>
-      </p:sp>
-      <p:sp>
-        <p:nvSpPr>
-          <p:cNvPr id="42" name="Shape 36"/>
-          <p:cNvSpPr/>
-          <p:nvPr/>
-        </p:nvSpPr>
-        <p:spPr>
-          <a:xfrm>
-            <a:off x="8285016" y="4610100"/>
-            <a:ext cx="329262" cy="123825"/>
-          </a:xfrm>
-          <a:prstGeom prst="roundRect">
-            <a:avLst>
-              <a:gd name="adj" fmla="val 23077"/>
-            </a:avLst>
-          </a:prstGeom>
-          <a:solidFill>
-            <a:srgbClr val="B85A28"/>
-          </a:solidFill>
-          <a:ln w="12700">
-            <a:solidFill>
-              <a:srgbClr val="B85A28"/>
-            </a:solidFill>
-            <a:prstDash val="solid"/>
-          </a:ln>
-        </p:spPr>
-      </p:sp>
-      <p:sp>
-        <p:nvSpPr>
-          <p:cNvPr id="43" name="Text 37"/>
-          <p:cNvSpPr txBox="1"/>
-          <p:nvPr/>
-        </p:nvSpPr>
-        <p:spPr>
-          <a:xfrm>
-            <a:off x="8068647" y="4438650"/>
-            <a:ext cx="762000" cy="152400"/>
-          </a:xfrm>
-          <a:prstGeom prst="rect">
-            <a:avLst/>
-          </a:prstGeom>
-          <a:noFill/>
-          <a:ln/>
-        </p:spPr>
-        <p:txBody>
-          <a:bodyPr wrap="square" lIns="0" tIns="0" rIns="0" bIns="0" rtlCol="0" anchor="ctr"/>
-          <a:lstStyle/>
-          <a:p>
-            <a:pPr algn="ctr" indent="0" marL="0">
-              <a:lnSpc>
-                <a:spcPct val="95000"/>
-              </a:lnSpc>
-              <a:buNone/>
-            </a:pPr>
-            <a:r>
-              <a:rPr lang="en-US" sz="860" b="1" dirty="0">
-                <a:solidFill>
-                  <a:srgbClr val="2B2F28"/>
-                </a:solidFill>
-                <a:latin typeface="Plus Jakarta Sans" pitchFamily="34" charset="0"/>
-                <a:ea typeface="Plus Jakarta Sans" pitchFamily="34" charset="-122"/>
-                <a:cs typeface="Plus Jakarta Sans" pitchFamily="34" charset="-120"/>
-              </a:rPr>
-              <a:t>2</a:t>
-            </a:r>
-            <a:endParaRPr lang="en-US" sz="860" dirty="0"/>
-          </a:p>
-        </p:txBody>
-      </p:sp>
-      <p:sp>
-        <p:nvSpPr>
-          <p:cNvPr id="44" name="Text 38"/>
-          <p:cNvSpPr txBox="1"/>
-          <p:nvPr/>
-        </p:nvSpPr>
-        <p:spPr>
-          <a:xfrm>
-            <a:off x="8193638" y="4943475"/>
-            <a:ext cx="512017" cy="180975"/>
-          </a:xfrm>
-          <a:prstGeom prst="rect">
-            <a:avLst/>
-          </a:prstGeom>
-          <a:noFill/>
-          <a:ln/>
-        </p:spPr>
-        <p:txBody>
-          <a:bodyPr wrap="square" lIns="0" tIns="0" rIns="0" bIns="0" rtlCol="0" anchor="t"/>
-          <a:lstStyle/>
-          <a:p>
-            <a:pPr algn="ctr" indent="0" marL="0">
-              <a:lnSpc>
-                <a:spcPct val="95000"/>
-              </a:lnSpc>
-              <a:buNone/>
-            </a:pPr>
-            <a:r>
-              <a:rPr lang="en-US" sz="830" dirty="0">
-                <a:solidFill>
-                  <a:srgbClr val="2B2F28"/>
-                </a:solidFill>
-                <a:latin typeface="Plus Jakarta Sans" pitchFamily="34" charset="0"/>
-                <a:ea typeface="Plus Jakarta Sans" pitchFamily="34" charset="-122"/>
-                <a:cs typeface="Plus Jakarta Sans" pitchFamily="34" charset="-120"/>
-              </a:rPr>
-              <a:t>7 Sep</a:t>
-            </a:r>
-            <a:endParaRPr lang="en-US" sz="830" dirty="0"/>
-          </a:p>
-        </p:txBody>
-      </p:sp>
-      <p:sp>
-        <p:nvSpPr>
-          <p:cNvPr id="45" name="Shape 39"/>
-          <p:cNvSpPr/>
-          <p:nvPr/>
-        </p:nvSpPr>
-        <p:spPr>
-          <a:xfrm>
-            <a:off x="8816083" y="4610100"/>
-            <a:ext cx="329262" cy="285750"/>
-          </a:xfrm>
-          <a:prstGeom prst="roundRect">
-            <a:avLst>
-              <a:gd name="adj" fmla="val 10000"/>
-            </a:avLst>
-          </a:prstGeom>
-          <a:solidFill>
-            <a:srgbClr val="B9C2B0"/>
-          </a:solidFill>
-          <a:ln w="12700">
-            <a:solidFill>
-              <a:srgbClr val="B9C2B0"/>
-            </a:solidFill>
-            <a:prstDash val="solid"/>
-          </a:ln>
-        </p:spPr>
-      </p:sp>
-      <p:sp>
-        <p:nvSpPr>
-          <p:cNvPr id="46" name="Text 40"/>
-          <p:cNvSpPr txBox="1"/>
-          <p:nvPr/>
-        </p:nvSpPr>
-        <p:spPr>
-          <a:xfrm>
-            <a:off x="8816083" y="4610100"/>
-            <a:ext cx="329262" cy="285750"/>
-          </a:xfrm>
-          <a:prstGeom prst="rect">
-            <a:avLst/>
-          </a:prstGeom>
-          <a:noFill/>
-          <a:ln/>
-        </p:spPr>
-        <p:txBody>
-          <a:bodyPr wrap="square" lIns="0" tIns="0" rIns="0" bIns="0" rtlCol="0" anchor="ctr"/>
-          <a:lstStyle/>
-          <a:p>
-            <a:pPr algn="ctr" indent="0" marL="0">
-              <a:lnSpc>
-                <a:spcPct val="95000"/>
-              </a:lnSpc>
-              <a:buNone/>
-            </a:pPr>
-            <a:r>
-              <a:rPr lang="en-US" sz="800" b="1" dirty="0">
-                <a:solidFill>
-                  <a:srgbClr val="2B2F28"/>
-                </a:solidFill>
-                <a:latin typeface="Plus Jakarta Sans" pitchFamily="34" charset="0"/>
-                <a:ea typeface="Plus Jakarta Sans" pitchFamily="34" charset="-122"/>
-                <a:cs typeface="Plus Jakarta Sans" pitchFamily="34" charset="-120"/>
-              </a:rPr>
-              <a:t>2</a:t>
-            </a:r>
-            <a:endParaRPr lang="en-US" sz="800" dirty="0"/>
-          </a:p>
-        </p:txBody>
-      </p:sp>
-      <p:sp>
-        <p:nvSpPr>
-          <p:cNvPr id="47" name="Text 41"/>
-          <p:cNvSpPr txBox="1"/>
-          <p:nvPr/>
-        </p:nvSpPr>
-        <p:spPr>
-          <a:xfrm>
-            <a:off x="8599714" y="4438650"/>
-            <a:ext cx="762000" cy="152400"/>
-          </a:xfrm>
-          <a:prstGeom prst="rect">
-            <a:avLst/>
-          </a:prstGeom>
-          <a:noFill/>
-          <a:ln/>
-        </p:spPr>
-        <p:txBody>
-          <a:bodyPr wrap="square" lIns="0" tIns="0" rIns="0" bIns="0" rtlCol="0" anchor="ctr"/>
-          <a:lstStyle/>
-          <a:p>
-            <a:pPr algn="ctr" indent="0" marL="0">
-              <a:lnSpc>
-                <a:spcPct val="95000"/>
-              </a:lnSpc>
-              <a:buNone/>
-            </a:pPr>
-            <a:r>
-              <a:rPr lang="en-US" sz="860" b="1" dirty="0">
-                <a:solidFill>
-                  <a:srgbClr val="2B2F28"/>
-                </a:solidFill>
-                <a:latin typeface="Plus Jakarta Sans" pitchFamily="34" charset="0"/>
-                <a:ea typeface="Plus Jakarta Sans" pitchFamily="34" charset="-122"/>
-                <a:cs typeface="Plus Jakarta Sans" pitchFamily="34" charset="-120"/>
-              </a:rPr>
-              <a:t>2</a:t>
-            </a:r>
-            <a:endParaRPr lang="en-US" sz="860" dirty="0"/>
-          </a:p>
-        </p:txBody>
-      </p:sp>
-      <p:sp>
-        <p:nvSpPr>
-          <p:cNvPr id="48" name="Text 42"/>
-          <p:cNvSpPr txBox="1"/>
-          <p:nvPr/>
-        </p:nvSpPr>
-        <p:spPr>
-          <a:xfrm>
-            <a:off x="8724706" y="4943475"/>
-            <a:ext cx="512017" cy="180975"/>
-          </a:xfrm>
-          <a:prstGeom prst="rect">
-            <a:avLst/>
-          </a:prstGeom>
-          <a:noFill/>
-          <a:ln/>
-        </p:spPr>
-        <p:txBody>
-          <a:bodyPr wrap="square" lIns="0" tIns="0" rIns="0" bIns="0" rtlCol="0" anchor="t"/>
-          <a:lstStyle/>
-          <a:p>
-            <a:pPr algn="ctr" indent="0" marL="0">
-              <a:lnSpc>
-                <a:spcPct val="95000"/>
-              </a:lnSpc>
-              <a:buNone/>
-            </a:pPr>
-            <a:r>
-              <a:rPr lang="en-US" sz="830" dirty="0">
-                <a:solidFill>
-                  <a:srgbClr val="2B2F28"/>
-                </a:solidFill>
-                <a:latin typeface="Plus Jakarta Sans" pitchFamily="34" charset="0"/>
-                <a:ea typeface="Plus Jakarta Sans" pitchFamily="34" charset="-122"/>
-                <a:cs typeface="Plus Jakarta Sans" pitchFamily="34" charset="-120"/>
-              </a:rPr>
-              <a:t>14 Sep</a:t>
-            </a:r>
-            <a:endParaRPr lang="en-US" sz="830" dirty="0"/>
-          </a:p>
-        </p:txBody>
-      </p:sp>
-      <p:sp>
-        <p:nvSpPr>
-          <p:cNvPr id="49" name="Shape 43"/>
-          <p:cNvSpPr/>
-          <p:nvPr/>
-        </p:nvSpPr>
-        <p:spPr>
-          <a:xfrm>
-            <a:off x="9347151" y="4610100"/>
-            <a:ext cx="329262" cy="285750"/>
-          </a:xfrm>
-          <a:prstGeom prst="roundRect">
-            <a:avLst>
-              <a:gd name="adj" fmla="val 10000"/>
-            </a:avLst>
-          </a:prstGeom>
-          <a:solidFill>
-            <a:srgbClr val="B9C2B0"/>
-          </a:solidFill>
-          <a:ln w="12700">
-            <a:solidFill>
-              <a:srgbClr val="B9C2B0"/>
-            </a:solidFill>
-            <a:prstDash val="solid"/>
-          </a:ln>
-        </p:spPr>
-      </p:sp>
-      <p:sp>
-        <p:nvSpPr>
-          <p:cNvPr id="50" name="Text 44"/>
-          <p:cNvSpPr txBox="1"/>
-          <p:nvPr/>
-        </p:nvSpPr>
-        <p:spPr>
-          <a:xfrm>
-            <a:off x="9347151" y="4610100"/>
-            <a:ext cx="329262" cy="285750"/>
-          </a:xfrm>
-          <a:prstGeom prst="rect">
-            <a:avLst/>
-          </a:prstGeom>
-          <a:noFill/>
-          <a:ln/>
-        </p:spPr>
-        <p:txBody>
-          <a:bodyPr wrap="square" lIns="0" tIns="0" rIns="0" bIns="0" rtlCol="0" anchor="ctr"/>
-          <a:lstStyle/>
-          <a:p>
-            <a:pPr algn="ctr" indent="0" marL="0">
-              <a:lnSpc>
-                <a:spcPct val="95000"/>
-              </a:lnSpc>
-              <a:buNone/>
-            </a:pPr>
-            <a:r>
-              <a:rPr lang="en-US" sz="800" b="1" dirty="0">
-                <a:solidFill>
-                  <a:srgbClr val="2B2F28"/>
-                </a:solidFill>
-                <a:latin typeface="Plus Jakarta Sans" pitchFamily="34" charset="0"/>
-                <a:ea typeface="Plus Jakarta Sans" pitchFamily="34" charset="-122"/>
-                <a:cs typeface="Plus Jakarta Sans" pitchFamily="34" charset="-120"/>
-              </a:rPr>
-              <a:t>2</a:t>
-            </a:r>
-            <a:endParaRPr lang="en-US" sz="800" dirty="0"/>
-          </a:p>
-        </p:txBody>
-      </p:sp>
-      <p:sp>
-        <p:nvSpPr>
-          <p:cNvPr id="51" name="Text 45"/>
-          <p:cNvSpPr txBox="1"/>
-          <p:nvPr/>
-        </p:nvSpPr>
-        <p:spPr>
-          <a:xfrm>
-            <a:off x="9130782" y="4438650"/>
-            <a:ext cx="762000" cy="152400"/>
-          </a:xfrm>
-          <a:prstGeom prst="rect">
-            <a:avLst/>
-          </a:prstGeom>
-          <a:noFill/>
-          <a:ln/>
-        </p:spPr>
-        <p:txBody>
-          <a:bodyPr wrap="square" lIns="0" tIns="0" rIns="0" bIns="0" rtlCol="0" anchor="ctr"/>
-          <a:lstStyle/>
-          <a:p>
-            <a:pPr algn="ctr" indent="0" marL="0">
-              <a:lnSpc>
-                <a:spcPct val="95000"/>
-              </a:lnSpc>
-              <a:buNone/>
-            </a:pPr>
-            <a:r>
-              <a:rPr lang="en-US" sz="860" b="1" dirty="0">
-                <a:solidFill>
-                  <a:srgbClr val="2B2F28"/>
-                </a:solidFill>
-                <a:latin typeface="Plus Jakarta Sans" pitchFamily="34" charset="0"/>
-                <a:ea typeface="Plus Jakarta Sans" pitchFamily="34" charset="-122"/>
-                <a:cs typeface="Plus Jakarta Sans" pitchFamily="34" charset="-120"/>
-              </a:rPr>
-              <a:t>2</a:t>
-            </a:r>
-            <a:endParaRPr lang="en-US" sz="860" dirty="0"/>
-          </a:p>
-        </p:txBody>
-      </p:sp>
-      <p:sp>
-        <p:nvSpPr>
-          <p:cNvPr id="52" name="Text 46"/>
-          <p:cNvSpPr txBox="1"/>
-          <p:nvPr/>
-        </p:nvSpPr>
-        <p:spPr>
-          <a:xfrm>
-            <a:off x="9255773" y="4943475"/>
-            <a:ext cx="512017" cy="180975"/>
-          </a:xfrm>
-          <a:prstGeom prst="rect">
-            <a:avLst/>
-          </a:prstGeom>
-          <a:noFill/>
-          <a:ln/>
-        </p:spPr>
-        <p:txBody>
-          <a:bodyPr wrap="square" lIns="0" tIns="0" rIns="0" bIns="0" rtlCol="0" anchor="t"/>
-          <a:lstStyle/>
-          <a:p>
-            <a:pPr algn="ctr" indent="0" marL="0">
-              <a:lnSpc>
-                <a:spcPct val="95000"/>
-              </a:lnSpc>
-              <a:buNone/>
-            </a:pPr>
-            <a:r>
-              <a:rPr lang="en-US" sz="830" dirty="0">
-                <a:solidFill>
-                  <a:srgbClr val="2B2F28"/>
-                </a:solidFill>
-                <a:latin typeface="Plus Jakarta Sans" pitchFamily="34" charset="0"/>
-                <a:ea typeface="Plus Jakarta Sans" pitchFamily="34" charset="-122"/>
-                <a:cs typeface="Plus Jakarta Sans" pitchFamily="34" charset="-120"/>
-              </a:rPr>
-              <a:t>21 Sep</a:t>
-            </a:r>
-            <a:endParaRPr lang="en-US" sz="830" dirty="0"/>
-          </a:p>
-        </p:txBody>
-      </p:sp>
-      <p:sp>
-        <p:nvSpPr>
-          <p:cNvPr id="53" name="Shape 47"/>
-          <p:cNvSpPr/>
-          <p:nvPr/>
-        </p:nvSpPr>
-        <p:spPr>
-          <a:xfrm>
-            <a:off x="9878218" y="3752850"/>
-            <a:ext cx="329262" cy="1143000"/>
-          </a:xfrm>
-          <a:prstGeom prst="roundRect">
-            <a:avLst>
-              <a:gd name="adj" fmla="val 8678"/>
-            </a:avLst>
-          </a:prstGeom>
-          <a:solidFill>
-            <a:srgbClr val="B9C2B0"/>
-          </a:solidFill>
-          <a:ln w="12700">
-            <a:solidFill>
-              <a:srgbClr val="B9C2B0"/>
-            </a:solidFill>
-            <a:prstDash val="solid"/>
-          </a:ln>
-        </p:spPr>
-      </p:sp>
-      <p:sp>
-        <p:nvSpPr>
-          <p:cNvPr id="54" name="Text 48"/>
-          <p:cNvSpPr txBox="1"/>
-          <p:nvPr/>
-        </p:nvSpPr>
-        <p:spPr>
-          <a:xfrm>
-            <a:off x="9878218" y="3752850"/>
-            <a:ext cx="329262" cy="1143000"/>
-          </a:xfrm>
-          <a:prstGeom prst="rect">
-            <a:avLst/>
-          </a:prstGeom>
-          <a:noFill/>
-          <a:ln/>
-        </p:spPr>
-        <p:txBody>
-          <a:bodyPr wrap="square" lIns="0" tIns="0" rIns="0" bIns="0" rtlCol="0" anchor="ctr"/>
-          <a:lstStyle/>
-          <a:p>
-            <a:pPr algn="ctr" indent="0" marL="0">
-              <a:lnSpc>
-                <a:spcPct val="95000"/>
-              </a:lnSpc>
-              <a:buNone/>
-            </a:pPr>
-            <a:r>
-              <a:rPr lang="en-US" sz="800" b="1" dirty="0">
-                <a:solidFill>
-                  <a:srgbClr val="2B2F28"/>
-                </a:solidFill>
-                <a:latin typeface="Plus Jakarta Sans" pitchFamily="34" charset="0"/>
-                <a:ea typeface="Plus Jakarta Sans" pitchFamily="34" charset="-122"/>
-                <a:cs typeface="Plus Jakarta Sans" pitchFamily="34" charset="-120"/>
-              </a:rPr>
-              <a:t>8</a:t>
-            </a:r>
-            <a:endParaRPr lang="en-US" sz="800" dirty="0"/>
-          </a:p>
-        </p:txBody>
-      </p:sp>
-      <p:sp>
-        <p:nvSpPr>
-          <p:cNvPr id="55" name="Text 49"/>
-          <p:cNvSpPr txBox="1"/>
-          <p:nvPr/>
-        </p:nvSpPr>
-        <p:spPr>
-          <a:xfrm>
-            <a:off x="9661849" y="3581400"/>
-            <a:ext cx="762000" cy="152400"/>
-          </a:xfrm>
-          <a:prstGeom prst="rect">
-            <a:avLst/>
-          </a:prstGeom>
-          <a:noFill/>
-          <a:ln/>
-        </p:spPr>
-        <p:txBody>
-          <a:bodyPr wrap="square" lIns="0" tIns="0" rIns="0" bIns="0" rtlCol="0" anchor="ctr"/>
-          <a:lstStyle/>
-          <a:p>
-            <a:pPr algn="ctr" indent="0" marL="0">
-              <a:lnSpc>
-                <a:spcPct val="95000"/>
-              </a:lnSpc>
-              <a:buNone/>
-            </a:pPr>
-            <a:r>
-              <a:rPr lang="en-US" sz="860" b="1" dirty="0">
-                <a:solidFill>
-                  <a:srgbClr val="2B2F28"/>
-                </a:solidFill>
-                <a:latin typeface="Plus Jakarta Sans" pitchFamily="34" charset="0"/>
-                <a:ea typeface="Plus Jakarta Sans" pitchFamily="34" charset="-122"/>
-                <a:cs typeface="Plus Jakarta Sans" pitchFamily="34" charset="-120"/>
-              </a:rPr>
-              <a:t>8</a:t>
-            </a:r>
-            <a:endParaRPr lang="en-US" sz="860" dirty="0"/>
-          </a:p>
-        </p:txBody>
-      </p:sp>
-      <p:sp>
-        <p:nvSpPr>
-          <p:cNvPr id="56" name="Text 50"/>
-          <p:cNvSpPr txBox="1"/>
-          <p:nvPr/>
-        </p:nvSpPr>
-        <p:spPr>
-          <a:xfrm>
-            <a:off x="9786840" y="4943475"/>
-            <a:ext cx="512017" cy="180975"/>
-          </a:xfrm>
-          <a:prstGeom prst="rect">
-            <a:avLst/>
-          </a:prstGeom>
-          <a:noFill/>
-          <a:ln/>
-        </p:spPr>
-        <p:txBody>
-          <a:bodyPr wrap="square" lIns="0" tIns="0" rIns="0" bIns="0" rtlCol="0" anchor="t"/>
-          <a:lstStyle/>
-          <a:p>
-            <a:pPr algn="ctr" indent="0" marL="0">
-              <a:lnSpc>
-                <a:spcPct val="95000"/>
-              </a:lnSpc>
-              <a:buNone/>
-            </a:pPr>
-            <a:r>
-              <a:rPr lang="en-US" sz="830" dirty="0">
-                <a:solidFill>
-                  <a:srgbClr val="2B2F28"/>
-                </a:solidFill>
-                <a:latin typeface="Plus Jakarta Sans" pitchFamily="34" charset="0"/>
-                <a:ea typeface="Plus Jakarta Sans" pitchFamily="34" charset="-122"/>
-                <a:cs typeface="Plus Jakarta Sans" pitchFamily="34" charset="-120"/>
-              </a:rPr>
-              <a:t>28 Sep</a:t>
-            </a:r>
-            <a:endParaRPr lang="en-US" sz="830" dirty="0"/>
-          </a:p>
-        </p:txBody>
-      </p:sp>
-      <p:sp>
-        <p:nvSpPr>
-          <p:cNvPr id="57" name="Shape 51"/>
-          <p:cNvSpPr/>
-          <p:nvPr/>
-        </p:nvSpPr>
-        <p:spPr>
-          <a:xfrm>
-            <a:off x="10409285" y="4324350"/>
-            <a:ext cx="329262" cy="571500"/>
-          </a:xfrm>
-          <a:prstGeom prst="roundRect">
-            <a:avLst>
-              <a:gd name="adj" fmla="val 8678"/>
-            </a:avLst>
-          </a:prstGeom>
-          <a:solidFill>
-            <a:srgbClr val="B9C2B0"/>
-          </a:solidFill>
-          <a:ln w="12700">
-            <a:solidFill>
-              <a:srgbClr val="B9C2B0"/>
-            </a:solidFill>
-            <a:prstDash val="solid"/>
-          </a:ln>
-        </p:spPr>
-      </p:sp>
-      <p:sp>
-        <p:nvSpPr>
-          <p:cNvPr id="58" name="Text 52"/>
-          <p:cNvSpPr txBox="1"/>
-          <p:nvPr/>
-        </p:nvSpPr>
-        <p:spPr>
-          <a:xfrm>
-            <a:off x="10409285" y="4324350"/>
-            <a:ext cx="329262" cy="571500"/>
-          </a:xfrm>
-          <a:prstGeom prst="rect">
-            <a:avLst/>
-          </a:prstGeom>
-          <a:noFill/>
-          <a:ln/>
-        </p:spPr>
-        <p:txBody>
-          <a:bodyPr wrap="square" lIns="0" tIns="0" rIns="0" bIns="0" rtlCol="0" anchor="ctr"/>
-          <a:lstStyle/>
-          <a:p>
-            <a:pPr algn="ctr" indent="0" marL="0">
-              <a:lnSpc>
-                <a:spcPct val="95000"/>
-              </a:lnSpc>
-              <a:buNone/>
-            </a:pPr>
-            <a:r>
-              <a:rPr lang="en-US" sz="800" b="1" dirty="0">
-                <a:solidFill>
-                  <a:srgbClr val="2B2F28"/>
-                </a:solidFill>
-                <a:latin typeface="Plus Jakarta Sans" pitchFamily="34" charset="0"/>
-                <a:ea typeface="Plus Jakarta Sans" pitchFamily="34" charset="-122"/>
-                <a:cs typeface="Plus Jakarta Sans" pitchFamily="34" charset="-120"/>
-              </a:rPr>
-              <a:t>4</a:t>
-            </a:r>
-            <a:endParaRPr lang="en-US" sz="800" dirty="0"/>
-          </a:p>
-        </p:txBody>
-      </p:sp>
-      <p:sp>
-        <p:nvSpPr>
-          <p:cNvPr id="59" name="Text 53"/>
-          <p:cNvSpPr txBox="1"/>
-          <p:nvPr/>
-        </p:nvSpPr>
-        <p:spPr>
-          <a:xfrm>
-            <a:off x="10192916" y="4152900"/>
-            <a:ext cx="762000" cy="152400"/>
-          </a:xfrm>
-          <a:prstGeom prst="rect">
-            <a:avLst/>
-          </a:prstGeom>
-          <a:noFill/>
-          <a:ln/>
-        </p:spPr>
-        <p:txBody>
-          <a:bodyPr wrap="square" lIns="0" tIns="0" rIns="0" bIns="0" rtlCol="0" anchor="ctr"/>
-          <a:lstStyle/>
-          <a:p>
-            <a:pPr algn="ctr" indent="0" marL="0">
-              <a:lnSpc>
-                <a:spcPct val="95000"/>
-              </a:lnSpc>
-              <a:buNone/>
-            </a:pPr>
-            <a:r>
-              <a:rPr lang="en-US" sz="860" b="1" dirty="0">
-                <a:solidFill>
-                  <a:srgbClr val="2B2F28"/>
-                </a:solidFill>
-                <a:latin typeface="Plus Jakarta Sans" pitchFamily="34" charset="0"/>
-                <a:ea typeface="Plus Jakarta Sans" pitchFamily="34" charset="-122"/>
-                <a:cs typeface="Plus Jakarta Sans" pitchFamily="34" charset="-120"/>
-              </a:rPr>
-              <a:t>4</a:t>
-            </a:r>
-            <a:endParaRPr lang="en-US" sz="860" dirty="0"/>
-          </a:p>
-        </p:txBody>
-      </p:sp>
-      <p:sp>
-        <p:nvSpPr>
-          <p:cNvPr id="60" name="Text 54"/>
-          <p:cNvSpPr txBox="1"/>
-          <p:nvPr/>
-        </p:nvSpPr>
-        <p:spPr>
-          <a:xfrm>
-            <a:off x="10317908" y="4943475"/>
-            <a:ext cx="512017" cy="180975"/>
-          </a:xfrm>
-          <a:prstGeom prst="rect">
-            <a:avLst/>
-          </a:prstGeom>
-          <a:noFill/>
-          <a:ln/>
-        </p:spPr>
-        <p:txBody>
-          <a:bodyPr wrap="square" lIns="0" tIns="0" rIns="0" bIns="0" rtlCol="0" anchor="t"/>
-          <a:lstStyle/>
-          <a:p>
-            <a:pPr algn="ctr" indent="0" marL="0">
-              <a:lnSpc>
-                <a:spcPct val="95000"/>
-              </a:lnSpc>
-              <a:buNone/>
-            </a:pPr>
-            <a:r>
-              <a:rPr lang="en-US" sz="830" dirty="0">
-                <a:solidFill>
-                  <a:srgbClr val="2B2F28"/>
-                </a:solidFill>
-                <a:latin typeface="Plus Jakarta Sans" pitchFamily="34" charset="0"/>
-                <a:ea typeface="Plus Jakarta Sans" pitchFamily="34" charset="-122"/>
-                <a:cs typeface="Plus Jakarta Sans" pitchFamily="34" charset="-120"/>
-              </a:rPr>
-              <a:t>5 Oct</a:t>
-            </a:r>
-            <a:endParaRPr lang="en-US" sz="830" dirty="0"/>
-          </a:p>
-        </p:txBody>
-      </p:sp>
-      <p:sp>
-        <p:nvSpPr>
-          <p:cNvPr id="61" name="Shape 55"/>
-          <p:cNvSpPr/>
-          <p:nvPr/>
-        </p:nvSpPr>
-        <p:spPr>
-          <a:xfrm>
-            <a:off x="7121979" y="4895850"/>
-            <a:ext cx="3717471" cy="0"/>
-          </a:xfrm>
-          <a:prstGeom prst="line">
-            <a:avLst/>
-          </a:prstGeom>
-          <a:noFill/>
-          <a:ln w="9525">
-            <a:solidFill>
-              <a:srgbClr val="B9C2B0"/>
-            </a:solidFill>
-            <a:prstDash val="solid"/>
-          </a:ln>
-        </p:spPr>
-      </p:sp>
-      <p:sp>
-        <p:nvSpPr>
-          <p:cNvPr id="62" name="Shape 56"/>
+      <p:graphicFrame>
+        <p:nvGraphicFramePr>
+          <p:cNvPr id="7" name="Table 1"/>
+          <p:cNvGraphicFramePr>
+            <a:graphicFrameLocks noGrp="1"/>
+          </p:cNvGraphicFramePr>
+          <p:nvPr>
+            <p:extLst>
+              <p:ext uri="{D42A27DB-BD31-4B8C-83A1-F6EECF244321}">
+                <p14:modId xmlns:p14="http://schemas.microsoft.com/office/powerpoint/2010/main" val="1579011935"/>
+              </p:ext>
+            </p:extLst>
+          </p:nvPr>
+        </p:nvGraphicFramePr>
+        <p:xfrm>
+          <a:off x="6375400" y="2381250"/>
+          <a:ext cx="4521200" cy="914400"/>
+        </p:xfrm>
+        <a:graphic>
+          <a:graphicData uri="http://schemas.openxmlformats.org/drawingml/2006/table">
+            <a:tbl>
+              <a:tblPr/>
+              <a:tblGrid>
+                <a:gridCol w="1279585"/>
+                <a:gridCol w="938362"/>
+                <a:gridCol w="554487"/>
+                <a:gridCol w="554487"/>
+                <a:gridCol w="511834"/>
+                <a:gridCol w="682445"/>
+              </a:tblGrid>
+              <a:tr h="0">
+                <a:tc>
+                  <a:txBody>
+                    <a:bodyPr/>
+                    <a:lstStyle/>
+                    <a:p>
+                      <a:pPr algn="l" indent="0" marL="0">
+                        <a:buNone/>
+                      </a:pPr>
+                      <a:r>
+                        <a:rPr lang="en-US" sz="900" b="1" dirty="0">
+                          <a:solidFill>
+                            <a:srgbClr val="FFFFFF"/>
+                          </a:solidFill>
+                          <a:latin typeface="Plus Jakarta Sans" pitchFamily="34" charset="0"/>
+                          <a:ea typeface="Plus Jakarta Sans" pitchFamily="34" charset="-122"/>
+                          <a:cs typeface="Plus Jakarta Sans" pitchFamily="34" charset="-120"/>
+                        </a:rPr>
+                        <a:t>Duta</a:t>
+                      </a:r>
+                      <a:endParaRPr lang="en-US" sz="900" dirty="0">
+                        <a:latin typeface="Plus Jakarta Sans" charset="0"/>
+                        <a:ea typeface="Plus Jakarta Sans" charset="0"/>
+                        <a:cs typeface="Plus Jakarta Sans" charset="0"/>
+                      </a:endParaRPr>
+                    </a:p>
+                  </a:txBody>
+                  <a:tcPr marL="36576" marR="36576" marT="36576" marB="36576" anchor="ctr">
+                    <a:lnL w="6350" cap="flat" cmpd="sng" algn="ctr">
+                      <a:solidFill>
+                        <a:srgbClr val="DCE2D6"/>
+                      </a:solidFill>
+                      <a:prstDash val="solid"/>
+                      <a:round/>
+                      <a:headEnd type="none" w="med" len="med"/>
+                      <a:tailEnd type="none" w="med" len="med"/>
+                    </a:lnL>
+                    <a:lnR w="6350" cap="flat" cmpd="sng" algn="ctr">
+                      <a:solidFill>
+                        <a:srgbClr val="DCE2D6"/>
+                      </a:solidFill>
+                      <a:prstDash val="solid"/>
+                      <a:round/>
+                      <a:headEnd type="none" w="med" len="med"/>
+                      <a:tailEnd type="none" w="med" len="med"/>
+                    </a:lnR>
+                    <a:lnT w="6350" cap="flat" cmpd="sng" algn="ctr">
+                      <a:solidFill>
+                        <a:srgbClr val="DCE2D6"/>
+                      </a:solidFill>
+                      <a:prstDash val="solid"/>
+                      <a:round/>
+                      <a:headEnd type="none" w="med" len="med"/>
+                      <a:tailEnd type="none" w="med" len="med"/>
+                    </a:lnT>
+                    <a:lnB w="6350" cap="flat" cmpd="sng" algn="ctr">
+                      <a:solidFill>
+                        <a:srgbClr val="DCE2D6"/>
+                      </a:solidFill>
+                      <a:prstDash val="solid"/>
+                      <a:round/>
+                      <a:headEnd type="none" w="med" len="med"/>
+                      <a:tailEnd type="none" w="med" len="med"/>
+                    </a:lnB>
+                    <a:solidFill>
+                      <a:srgbClr val="4A653B"/>
+                    </a:solidFill>
+                  </a:tcPr>
+                </a:tc>
+                <a:tc>
+                  <a:txBody>
+                    <a:bodyPr/>
+                    <a:lstStyle/>
+                    <a:p>
+                      <a:pPr algn="l" indent="0" marL="0">
+                        <a:buNone/>
+                      </a:pPr>
+                      <a:r>
+                        <a:rPr lang="en-US" sz="900" b="1" dirty="0">
+                          <a:solidFill>
+                            <a:srgbClr val="FFFFFF"/>
+                          </a:solidFill>
+                          <a:latin typeface="Plus Jakarta Sans" pitchFamily="34" charset="0"/>
+                          <a:ea typeface="Plus Jakarta Sans" pitchFamily="34" charset="-122"/>
+                          <a:cs typeface="Plus Jakarta Sans" pitchFamily="34" charset="-120"/>
+                        </a:rPr>
+                        <a:t>Type</a:t>
+                      </a:r>
+                      <a:endParaRPr lang="en-US" sz="900" dirty="0">
+                        <a:latin typeface="Plus Jakarta Sans" charset="0"/>
+                        <a:ea typeface="Plus Jakarta Sans" charset="0"/>
+                        <a:cs typeface="Plus Jakarta Sans" charset="0"/>
+                      </a:endParaRPr>
+                    </a:p>
+                  </a:txBody>
+                  <a:tcPr marL="36576" marR="36576" marT="36576" marB="36576" anchor="ctr">
+                    <a:lnL w="6350" cap="flat" cmpd="sng" algn="ctr">
+                      <a:solidFill>
+                        <a:srgbClr val="DCE2D6"/>
+                      </a:solidFill>
+                      <a:prstDash val="solid"/>
+                      <a:round/>
+                      <a:headEnd type="none" w="med" len="med"/>
+                      <a:tailEnd type="none" w="med" len="med"/>
+                    </a:lnL>
+                    <a:lnR w="6350" cap="flat" cmpd="sng" algn="ctr">
+                      <a:solidFill>
+                        <a:srgbClr val="DCE2D6"/>
+                      </a:solidFill>
+                      <a:prstDash val="solid"/>
+                      <a:round/>
+                      <a:headEnd type="none" w="med" len="med"/>
+                      <a:tailEnd type="none" w="med" len="med"/>
+                    </a:lnR>
+                    <a:lnT w="6350" cap="flat" cmpd="sng" algn="ctr">
+                      <a:solidFill>
+                        <a:srgbClr val="DCE2D6"/>
+                      </a:solidFill>
+                      <a:prstDash val="solid"/>
+                      <a:round/>
+                      <a:headEnd type="none" w="med" len="med"/>
+                      <a:tailEnd type="none" w="med" len="med"/>
+                    </a:lnT>
+                    <a:lnB w="6350" cap="flat" cmpd="sng" algn="ctr">
+                      <a:solidFill>
+                        <a:srgbClr val="DCE2D6"/>
+                      </a:solidFill>
+                      <a:prstDash val="solid"/>
+                      <a:round/>
+                      <a:headEnd type="none" w="med" len="med"/>
+                      <a:tailEnd type="none" w="med" len="med"/>
+                    </a:lnB>
+                    <a:solidFill>
+                      <a:srgbClr val="4A653B"/>
+                    </a:solidFill>
+                  </a:tcPr>
+                </a:tc>
+                <a:tc>
+                  <a:txBody>
+                    <a:bodyPr/>
+                    <a:lstStyle/>
+                    <a:p>
+                      <a:pPr algn="r" indent="0" marL="0">
+                        <a:buNone/>
+                      </a:pPr>
+                      <a:r>
+                        <a:rPr lang="en-US" sz="900" b="1" dirty="0">
+                          <a:solidFill>
+                            <a:srgbClr val="FFFFFF"/>
+                          </a:solidFill>
+                          <a:latin typeface="Plus Jakarta Sans" pitchFamily="34" charset="0"/>
+                          <a:ea typeface="Plus Jakarta Sans" pitchFamily="34" charset="-122"/>
+                          <a:cs typeface="Plus Jakarta Sans" pitchFamily="34" charset="-120"/>
+                        </a:rPr>
+                        <a:t>Week of 28 Sep</a:t>
+                      </a:r>
+                      <a:endParaRPr lang="en-US" sz="900" dirty="0">
+                        <a:latin typeface="Plus Jakarta Sans" charset="0"/>
+                        <a:ea typeface="Plus Jakarta Sans" charset="0"/>
+                        <a:cs typeface="Plus Jakarta Sans" charset="0"/>
+                      </a:endParaRPr>
+                    </a:p>
+                  </a:txBody>
+                  <a:tcPr marL="36576" marR="36576" marT="36576" marB="36576" anchor="ctr">
+                    <a:lnL w="6350" cap="flat" cmpd="sng" algn="ctr">
+                      <a:solidFill>
+                        <a:srgbClr val="DCE2D6"/>
+                      </a:solidFill>
+                      <a:prstDash val="solid"/>
+                      <a:round/>
+                      <a:headEnd type="none" w="med" len="med"/>
+                      <a:tailEnd type="none" w="med" len="med"/>
+                    </a:lnL>
+                    <a:lnR w="6350" cap="flat" cmpd="sng" algn="ctr">
+                      <a:solidFill>
+                        <a:srgbClr val="DCE2D6"/>
+                      </a:solidFill>
+                      <a:prstDash val="solid"/>
+                      <a:round/>
+                      <a:headEnd type="none" w="med" len="med"/>
+                      <a:tailEnd type="none" w="med" len="med"/>
+                    </a:lnR>
+                    <a:lnT w="6350" cap="flat" cmpd="sng" algn="ctr">
+                      <a:solidFill>
+                        <a:srgbClr val="DCE2D6"/>
+                      </a:solidFill>
+                      <a:prstDash val="solid"/>
+                      <a:round/>
+                      <a:headEnd type="none" w="med" len="med"/>
+                      <a:tailEnd type="none" w="med" len="med"/>
+                    </a:lnT>
+                    <a:lnB w="6350" cap="flat" cmpd="sng" algn="ctr">
+                      <a:solidFill>
+                        <a:srgbClr val="DCE2D6"/>
+                      </a:solidFill>
+                      <a:prstDash val="solid"/>
+                      <a:round/>
+                      <a:headEnd type="none" w="med" len="med"/>
+                      <a:tailEnd type="none" w="med" len="med"/>
+                    </a:lnB>
+                    <a:solidFill>
+                      <a:srgbClr val="4A653B"/>
+                    </a:solidFill>
+                  </a:tcPr>
+                </a:tc>
+                <a:tc>
+                  <a:txBody>
+                    <a:bodyPr/>
+                    <a:lstStyle/>
+                    <a:p>
+                      <a:pPr algn="r" indent="0" marL="0">
+                        <a:buNone/>
+                      </a:pPr>
+                      <a:r>
+                        <a:rPr lang="en-US" sz="900" b="1" dirty="0">
+                          <a:solidFill>
+                            <a:srgbClr val="FFFFFF"/>
+                          </a:solidFill>
+                          <a:latin typeface="Plus Jakarta Sans" pitchFamily="34" charset="0"/>
+                          <a:ea typeface="Plus Jakarta Sans" pitchFamily="34" charset="-122"/>
+                          <a:cs typeface="Plus Jakarta Sans" pitchFamily="34" charset="-120"/>
+                        </a:rPr>
+                        <a:t>Week of 5 Oct</a:t>
+                      </a:r>
+                      <a:endParaRPr lang="en-US" sz="900" dirty="0">
+                        <a:latin typeface="Plus Jakarta Sans" charset="0"/>
+                        <a:ea typeface="Plus Jakarta Sans" charset="0"/>
+                        <a:cs typeface="Plus Jakarta Sans" charset="0"/>
+                      </a:endParaRPr>
+                    </a:p>
+                  </a:txBody>
+                  <a:tcPr marL="36576" marR="36576" marT="36576" marB="36576" anchor="ctr">
+                    <a:lnL w="6350" cap="flat" cmpd="sng" algn="ctr">
+                      <a:solidFill>
+                        <a:srgbClr val="DCE2D6"/>
+                      </a:solidFill>
+                      <a:prstDash val="solid"/>
+                      <a:round/>
+                      <a:headEnd type="none" w="med" len="med"/>
+                      <a:tailEnd type="none" w="med" len="med"/>
+                    </a:lnL>
+                    <a:lnR w="6350" cap="flat" cmpd="sng" algn="ctr">
+                      <a:solidFill>
+                        <a:srgbClr val="DCE2D6"/>
+                      </a:solidFill>
+                      <a:prstDash val="solid"/>
+                      <a:round/>
+                      <a:headEnd type="none" w="med" len="med"/>
+                      <a:tailEnd type="none" w="med" len="med"/>
+                    </a:lnR>
+                    <a:lnT w="6350" cap="flat" cmpd="sng" algn="ctr">
+                      <a:solidFill>
+                        <a:srgbClr val="DCE2D6"/>
+                      </a:solidFill>
+                      <a:prstDash val="solid"/>
+                      <a:round/>
+                      <a:headEnd type="none" w="med" len="med"/>
+                      <a:tailEnd type="none" w="med" len="med"/>
+                    </a:lnT>
+                    <a:lnB w="6350" cap="flat" cmpd="sng" algn="ctr">
+                      <a:solidFill>
+                        <a:srgbClr val="DCE2D6"/>
+                      </a:solidFill>
+                      <a:prstDash val="solid"/>
+                      <a:round/>
+                      <a:headEnd type="none" w="med" len="med"/>
+                      <a:tailEnd type="none" w="med" len="med"/>
+                    </a:lnB>
+                    <a:solidFill>
+                      <a:srgbClr val="4A653B"/>
+                    </a:solidFill>
+                  </a:tcPr>
+                </a:tc>
+                <a:tc>
+                  <a:txBody>
+                    <a:bodyPr/>
+                    <a:lstStyle/>
+                    <a:p>
+                      <a:pPr algn="r" indent="0" marL="0">
+                        <a:buNone/>
+                      </a:pPr>
+                      <a:r>
+                        <a:rPr lang="en-US" sz="900" b="1" dirty="0">
+                          <a:solidFill>
+                            <a:srgbClr val="FFFFFF"/>
+                          </a:solidFill>
+                          <a:latin typeface="Plus Jakarta Sans" pitchFamily="34" charset="0"/>
+                          <a:ea typeface="Plus Jakarta Sans" pitchFamily="34" charset="-122"/>
+                          <a:cs typeface="Plus Jakarta Sans" pitchFamily="34" charset="-120"/>
+                        </a:rPr>
+                        <a:t>7 weeks</a:t>
+                      </a:r>
+                      <a:endParaRPr lang="en-US" sz="900" dirty="0">
+                        <a:latin typeface="Plus Jakarta Sans" charset="0"/>
+                        <a:ea typeface="Plus Jakarta Sans" charset="0"/>
+                        <a:cs typeface="Plus Jakarta Sans" charset="0"/>
+                      </a:endParaRPr>
+                    </a:p>
+                  </a:txBody>
+                  <a:tcPr marL="36576" marR="36576" marT="36576" marB="36576" anchor="ctr">
+                    <a:lnL w="6350" cap="flat" cmpd="sng" algn="ctr">
+                      <a:solidFill>
+                        <a:srgbClr val="DCE2D6"/>
+                      </a:solidFill>
+                      <a:prstDash val="solid"/>
+                      <a:round/>
+                      <a:headEnd type="none" w="med" len="med"/>
+                      <a:tailEnd type="none" w="med" len="med"/>
+                    </a:lnL>
+                    <a:lnR w="6350" cap="flat" cmpd="sng" algn="ctr">
+                      <a:solidFill>
+                        <a:srgbClr val="DCE2D6"/>
+                      </a:solidFill>
+                      <a:prstDash val="solid"/>
+                      <a:round/>
+                      <a:headEnd type="none" w="med" len="med"/>
+                      <a:tailEnd type="none" w="med" len="med"/>
+                    </a:lnR>
+                    <a:lnT w="6350" cap="flat" cmpd="sng" algn="ctr">
+                      <a:solidFill>
+                        <a:srgbClr val="DCE2D6"/>
+                      </a:solidFill>
+                      <a:prstDash val="solid"/>
+                      <a:round/>
+                      <a:headEnd type="none" w="med" len="med"/>
+                      <a:tailEnd type="none" w="med" len="med"/>
+                    </a:lnT>
+                    <a:lnB w="6350" cap="flat" cmpd="sng" algn="ctr">
+                      <a:solidFill>
+                        <a:srgbClr val="DCE2D6"/>
+                      </a:solidFill>
+                      <a:prstDash val="solid"/>
+                      <a:round/>
+                      <a:headEnd type="none" w="med" len="med"/>
+                      <a:tailEnd type="none" w="med" len="med"/>
+                    </a:lnB>
+                    <a:solidFill>
+                      <a:srgbClr val="4A653B"/>
+                    </a:solidFill>
+                  </a:tcPr>
+                </a:tc>
+                <a:tc>
+                  <a:txBody>
+                    <a:bodyPr/>
+                    <a:lstStyle/>
+                    <a:p>
+                      <a:pPr algn="r" indent="0" marL="0">
+                        <a:buNone/>
+                      </a:pPr>
+                      <a:r>
+                        <a:rPr lang="en-US" sz="900" b="1" dirty="0">
+                          <a:solidFill>
+                            <a:srgbClr val="FFFFFF"/>
+                          </a:solidFill>
+                          <a:latin typeface="Plus Jakarta Sans" pitchFamily="34" charset="0"/>
+                          <a:ea typeface="Plus Jakarta Sans" pitchFamily="34" charset="-122"/>
+                          <a:cs typeface="Plus Jakarta Sans" pitchFamily="34" charset="-120"/>
+                        </a:rPr>
+                        <a:t>Sale / Leads</a:t>
+                      </a:r>
+                      <a:endParaRPr lang="en-US" sz="900" dirty="0">
+                        <a:latin typeface="Plus Jakarta Sans" charset="0"/>
+                        <a:ea typeface="Plus Jakarta Sans" charset="0"/>
+                        <a:cs typeface="Plus Jakarta Sans" charset="0"/>
+                      </a:endParaRPr>
+                    </a:p>
+                  </a:txBody>
+                  <a:tcPr marL="36576" marR="36576" marT="36576" marB="36576" anchor="ctr">
+                    <a:lnL w="6350" cap="flat" cmpd="sng" algn="ctr">
+                      <a:solidFill>
+                        <a:srgbClr val="DCE2D6"/>
+                      </a:solidFill>
+                      <a:prstDash val="solid"/>
+                      <a:round/>
+                      <a:headEnd type="none" w="med" len="med"/>
+                      <a:tailEnd type="none" w="med" len="med"/>
+                    </a:lnL>
+                    <a:lnR w="6350" cap="flat" cmpd="sng" algn="ctr">
+                      <a:solidFill>
+                        <a:srgbClr val="DCE2D6"/>
+                      </a:solidFill>
+                      <a:prstDash val="solid"/>
+                      <a:round/>
+                      <a:headEnd type="none" w="med" len="med"/>
+                      <a:tailEnd type="none" w="med" len="med"/>
+                    </a:lnR>
+                    <a:lnT w="6350" cap="flat" cmpd="sng" algn="ctr">
+                      <a:solidFill>
+                        <a:srgbClr val="DCE2D6"/>
+                      </a:solidFill>
+                      <a:prstDash val="solid"/>
+                      <a:round/>
+                      <a:headEnd type="none" w="med" len="med"/>
+                      <a:tailEnd type="none" w="med" len="med"/>
+                    </a:lnT>
+                    <a:lnB w="6350" cap="flat" cmpd="sng" algn="ctr">
+                      <a:solidFill>
+                        <a:srgbClr val="DCE2D6"/>
+                      </a:solidFill>
+                      <a:prstDash val="solid"/>
+                      <a:round/>
+                      <a:headEnd type="none" w="med" len="med"/>
+                      <a:tailEnd type="none" w="med" len="med"/>
+                    </a:lnB>
+                    <a:solidFill>
+                      <a:srgbClr val="4A653B"/>
+                    </a:solidFill>
+                  </a:tcPr>
+                </a:tc>
+              </a:tr>
+              <a:tr h="0">
+                <a:tc>
+                  <a:txBody>
+                    <a:bodyPr/>
+                    <a:lstStyle/>
+                    <a:p>
+                      <a:pPr algn="l" indent="0" marL="0">
+                        <a:buNone/>
+                      </a:pPr>
+                      <a:r>
+                        <a:rPr lang="en-US" sz="900" b="1" dirty="0">
+                          <a:solidFill>
+                            <a:srgbClr val="274E13"/>
+                          </a:solidFill>
+                          <a:latin typeface="Plus Jakarta Sans" pitchFamily="34" charset="0"/>
+                          <a:ea typeface="Plus Jakarta Sans" pitchFamily="34" charset="-122"/>
+                          <a:cs typeface="Plus Jakarta Sans" pitchFamily="34" charset="-120"/>
+                        </a:rPr>
+                        <a:t>Rudi</a:t>
+                      </a:r>
+                      <a:endParaRPr lang="en-US" sz="900" dirty="0">
+                        <a:latin typeface="Plus Jakarta Sans" charset="0"/>
+                        <a:ea typeface="Plus Jakarta Sans" charset="0"/>
+                        <a:cs typeface="Plus Jakarta Sans" charset="0"/>
+                      </a:endParaRPr>
+                    </a:p>
+                  </a:txBody>
+                  <a:tcPr marL="36576" marR="36576" marT="36576" marB="36576" anchor="ctr">
+                    <a:lnL w="6350" cap="flat" cmpd="sng" algn="ctr">
+                      <a:solidFill>
+                        <a:srgbClr val="DCE2D6"/>
+                      </a:solidFill>
+                      <a:prstDash val="solid"/>
+                      <a:round/>
+                      <a:headEnd type="none" w="med" len="med"/>
+                      <a:tailEnd type="none" w="med" len="med"/>
+                    </a:lnL>
+                    <a:lnR w="6350" cap="flat" cmpd="sng" algn="ctr">
+                      <a:solidFill>
+                        <a:srgbClr val="DCE2D6"/>
+                      </a:solidFill>
+                      <a:prstDash val="solid"/>
+                      <a:round/>
+                      <a:headEnd type="none" w="med" len="med"/>
+                      <a:tailEnd type="none" w="med" len="med"/>
+                    </a:lnR>
+                    <a:lnT w="6350" cap="flat" cmpd="sng" algn="ctr">
+                      <a:solidFill>
+                        <a:srgbClr val="DCE2D6"/>
+                      </a:solidFill>
+                      <a:prstDash val="solid"/>
+                      <a:round/>
+                      <a:headEnd type="none" w="med" len="med"/>
+                      <a:tailEnd type="none" w="med" len="med"/>
+                    </a:lnT>
+                    <a:lnB w="6350" cap="flat" cmpd="sng" algn="ctr">
+                      <a:solidFill>
+                        <a:srgbClr val="DCE2D6"/>
+                      </a:solidFill>
+                      <a:prstDash val="solid"/>
+                      <a:round/>
+                      <a:headEnd type="none" w="med" len="med"/>
+                      <a:tailEnd type="none" w="med" len="med"/>
+                    </a:lnB>
+                  </a:tcPr>
+                </a:tc>
+                <a:tc>
+                  <a:txBody>
+                    <a:bodyPr/>
+                    <a:lstStyle/>
+                    <a:p>
+                      <a:pPr algn="l" indent="0" marL="0">
+                        <a:buNone/>
+                      </a:pPr>
+                      <a:r>
+                        <a:rPr lang="en-US" sz="900" dirty="0">
+                          <a:solidFill>
+                            <a:srgbClr val="2B2F28"/>
+                          </a:solidFill>
+                          <a:latin typeface="Plus Jakarta Sans" pitchFamily="34" charset="0"/>
+                          <a:ea typeface="Plus Jakarta Sans" pitchFamily="34" charset="-122"/>
+                          <a:cs typeface="Plus Jakarta Sans" pitchFamily="34" charset="-120"/>
+                        </a:rPr>
+                        <a:t>Internal team</a:t>
+                      </a:r>
+                      <a:endParaRPr lang="en-US" sz="900" dirty="0">
+                        <a:latin typeface="Plus Jakarta Sans" charset="0"/>
+                        <a:ea typeface="Plus Jakarta Sans" charset="0"/>
+                        <a:cs typeface="Plus Jakarta Sans" charset="0"/>
+                      </a:endParaRPr>
+                    </a:p>
+                  </a:txBody>
+                  <a:tcPr marL="36576" marR="36576" marT="36576" marB="36576" anchor="ctr">
+                    <a:lnL w="6350" cap="flat" cmpd="sng" algn="ctr">
+                      <a:solidFill>
+                        <a:srgbClr val="DCE2D6"/>
+                      </a:solidFill>
+                      <a:prstDash val="solid"/>
+                      <a:round/>
+                      <a:headEnd type="none" w="med" len="med"/>
+                      <a:tailEnd type="none" w="med" len="med"/>
+                    </a:lnL>
+                    <a:lnR w="6350" cap="flat" cmpd="sng" algn="ctr">
+                      <a:solidFill>
+                        <a:srgbClr val="DCE2D6"/>
+                      </a:solidFill>
+                      <a:prstDash val="solid"/>
+                      <a:round/>
+                      <a:headEnd type="none" w="med" len="med"/>
+                      <a:tailEnd type="none" w="med" len="med"/>
+                    </a:lnR>
+                    <a:lnT w="6350" cap="flat" cmpd="sng" algn="ctr">
+                      <a:solidFill>
+                        <a:srgbClr val="DCE2D6"/>
+                      </a:solidFill>
+                      <a:prstDash val="solid"/>
+                      <a:round/>
+                      <a:headEnd type="none" w="med" len="med"/>
+                      <a:tailEnd type="none" w="med" len="med"/>
+                    </a:lnT>
+                    <a:lnB w="6350" cap="flat" cmpd="sng" algn="ctr">
+                      <a:solidFill>
+                        <a:srgbClr val="DCE2D6"/>
+                      </a:solidFill>
+                      <a:prstDash val="solid"/>
+                      <a:round/>
+                      <a:headEnd type="none" w="med" len="med"/>
+                      <a:tailEnd type="none" w="med" len="med"/>
+                    </a:lnB>
+                  </a:tcPr>
+                </a:tc>
+                <a:tc>
+                  <a:txBody>
+                    <a:bodyPr/>
+                    <a:lstStyle/>
+                    <a:p>
+                      <a:pPr algn="r" indent="0" marL="0">
+                        <a:buNone/>
+                      </a:pPr>
+                      <a:r>
+                        <a:rPr lang="en-US" sz="900" dirty="0">
+                          <a:solidFill>
+                            <a:srgbClr val="2B2F28"/>
+                          </a:solidFill>
+                          <a:latin typeface="Plus Jakarta Sans" pitchFamily="34" charset="0"/>
+                          <a:ea typeface="Plus Jakarta Sans" pitchFamily="34" charset="-122"/>
+                          <a:cs typeface="Plus Jakarta Sans" pitchFamily="34" charset="-120"/>
+                        </a:rPr>
+                        <a:t>4</a:t>
+                      </a:r>
+                      <a:endParaRPr lang="en-US" sz="900" dirty="0">
+                        <a:latin typeface="Plus Jakarta Sans" charset="0"/>
+                        <a:ea typeface="Plus Jakarta Sans" charset="0"/>
+                        <a:cs typeface="Plus Jakarta Sans" charset="0"/>
+                      </a:endParaRPr>
+                    </a:p>
+                  </a:txBody>
+                  <a:tcPr marL="36576" marR="36576" marT="36576" marB="36576" anchor="ctr">
+                    <a:lnL w="6350" cap="flat" cmpd="sng" algn="ctr">
+                      <a:solidFill>
+                        <a:srgbClr val="DCE2D6"/>
+                      </a:solidFill>
+                      <a:prstDash val="solid"/>
+                      <a:round/>
+                      <a:headEnd type="none" w="med" len="med"/>
+                      <a:tailEnd type="none" w="med" len="med"/>
+                    </a:lnL>
+                    <a:lnR w="6350" cap="flat" cmpd="sng" algn="ctr">
+                      <a:solidFill>
+                        <a:srgbClr val="DCE2D6"/>
+                      </a:solidFill>
+                      <a:prstDash val="solid"/>
+                      <a:round/>
+                      <a:headEnd type="none" w="med" len="med"/>
+                      <a:tailEnd type="none" w="med" len="med"/>
+                    </a:lnR>
+                    <a:lnT w="6350" cap="flat" cmpd="sng" algn="ctr">
+                      <a:solidFill>
+                        <a:srgbClr val="DCE2D6"/>
+                      </a:solidFill>
+                      <a:prstDash val="solid"/>
+                      <a:round/>
+                      <a:headEnd type="none" w="med" len="med"/>
+                      <a:tailEnd type="none" w="med" len="med"/>
+                    </a:lnT>
+                    <a:lnB w="6350" cap="flat" cmpd="sng" algn="ctr">
+                      <a:solidFill>
+                        <a:srgbClr val="DCE2D6"/>
+                      </a:solidFill>
+                      <a:prstDash val="solid"/>
+                      <a:round/>
+                      <a:headEnd type="none" w="med" len="med"/>
+                      <a:tailEnd type="none" w="med" len="med"/>
+                    </a:lnB>
+                  </a:tcPr>
+                </a:tc>
+                <a:tc>
+                  <a:txBody>
+                    <a:bodyPr/>
+                    <a:lstStyle/>
+                    <a:p>
+                      <a:pPr algn="r" indent="0" marL="0">
+                        <a:buNone/>
+                      </a:pPr>
+                      <a:r>
+                        <a:rPr lang="en-US" sz="900" b="1" dirty="0">
+                          <a:solidFill>
+                            <a:srgbClr val="274E13"/>
+                          </a:solidFill>
+                          <a:latin typeface="Plus Jakarta Sans" pitchFamily="34" charset="0"/>
+                          <a:ea typeface="Plus Jakarta Sans" pitchFamily="34" charset="-122"/>
+                          <a:cs typeface="Plus Jakarta Sans" pitchFamily="34" charset="-120"/>
+                        </a:rPr>
+                        <a:t>2</a:t>
+                      </a:r>
+                      <a:endParaRPr lang="en-US" sz="900" dirty="0">
+                        <a:latin typeface="Plus Jakarta Sans" charset="0"/>
+                        <a:ea typeface="Plus Jakarta Sans" charset="0"/>
+                        <a:cs typeface="Plus Jakarta Sans" charset="0"/>
+                      </a:endParaRPr>
+                    </a:p>
+                  </a:txBody>
+                  <a:tcPr marL="36576" marR="36576" marT="36576" marB="36576" anchor="ctr">
+                    <a:lnL w="6350" cap="flat" cmpd="sng" algn="ctr">
+                      <a:solidFill>
+                        <a:srgbClr val="DCE2D6"/>
+                      </a:solidFill>
+                      <a:prstDash val="solid"/>
+                      <a:round/>
+                      <a:headEnd type="none" w="med" len="med"/>
+                      <a:tailEnd type="none" w="med" len="med"/>
+                    </a:lnL>
+                    <a:lnR w="6350" cap="flat" cmpd="sng" algn="ctr">
+                      <a:solidFill>
+                        <a:srgbClr val="DCE2D6"/>
+                      </a:solidFill>
+                      <a:prstDash val="solid"/>
+                      <a:round/>
+                      <a:headEnd type="none" w="med" len="med"/>
+                      <a:tailEnd type="none" w="med" len="med"/>
+                    </a:lnR>
+                    <a:lnT w="6350" cap="flat" cmpd="sng" algn="ctr">
+                      <a:solidFill>
+                        <a:srgbClr val="DCE2D6"/>
+                      </a:solidFill>
+                      <a:prstDash val="solid"/>
+                      <a:round/>
+                      <a:headEnd type="none" w="med" len="med"/>
+                      <a:tailEnd type="none" w="med" len="med"/>
+                    </a:lnT>
+                    <a:lnB w="6350" cap="flat" cmpd="sng" algn="ctr">
+                      <a:solidFill>
+                        <a:srgbClr val="DCE2D6"/>
+                      </a:solidFill>
+                      <a:prstDash val="solid"/>
+                      <a:round/>
+                      <a:headEnd type="none" w="med" len="med"/>
+                      <a:tailEnd type="none" w="med" len="med"/>
+                    </a:lnB>
+                  </a:tcPr>
+                </a:tc>
+                <a:tc>
+                  <a:txBody>
+                    <a:bodyPr/>
+                    <a:lstStyle/>
+                    <a:p>
+                      <a:pPr algn="r" indent="0" marL="0">
+                        <a:buNone/>
+                      </a:pPr>
+                      <a:r>
+                        <a:rPr lang="en-US" sz="900" dirty="0">
+                          <a:solidFill>
+                            <a:srgbClr val="2B2F28"/>
+                          </a:solidFill>
+                          <a:latin typeface="Plus Jakarta Sans" pitchFamily="34" charset="0"/>
+                          <a:ea typeface="Plus Jakarta Sans" pitchFamily="34" charset="-122"/>
+                          <a:cs typeface="Plus Jakarta Sans" pitchFamily="34" charset="-120"/>
+                        </a:rPr>
+                        <a:t>9</a:t>
+                      </a:r>
+                      <a:endParaRPr lang="en-US" sz="900" dirty="0">
+                        <a:latin typeface="Plus Jakarta Sans" charset="0"/>
+                        <a:ea typeface="Plus Jakarta Sans" charset="0"/>
+                        <a:cs typeface="Plus Jakarta Sans" charset="0"/>
+                      </a:endParaRPr>
+                    </a:p>
+                  </a:txBody>
+                  <a:tcPr marL="36576" marR="36576" marT="36576" marB="36576" anchor="ctr">
+                    <a:lnL w="6350" cap="flat" cmpd="sng" algn="ctr">
+                      <a:solidFill>
+                        <a:srgbClr val="DCE2D6"/>
+                      </a:solidFill>
+                      <a:prstDash val="solid"/>
+                      <a:round/>
+                      <a:headEnd type="none" w="med" len="med"/>
+                      <a:tailEnd type="none" w="med" len="med"/>
+                    </a:lnL>
+                    <a:lnR w="6350" cap="flat" cmpd="sng" algn="ctr">
+                      <a:solidFill>
+                        <a:srgbClr val="DCE2D6"/>
+                      </a:solidFill>
+                      <a:prstDash val="solid"/>
+                      <a:round/>
+                      <a:headEnd type="none" w="med" len="med"/>
+                      <a:tailEnd type="none" w="med" len="med"/>
+                    </a:lnR>
+                    <a:lnT w="6350" cap="flat" cmpd="sng" algn="ctr">
+                      <a:solidFill>
+                        <a:srgbClr val="DCE2D6"/>
+                      </a:solidFill>
+                      <a:prstDash val="solid"/>
+                      <a:round/>
+                      <a:headEnd type="none" w="med" len="med"/>
+                      <a:tailEnd type="none" w="med" len="med"/>
+                    </a:lnT>
+                    <a:lnB w="6350" cap="flat" cmpd="sng" algn="ctr">
+                      <a:solidFill>
+                        <a:srgbClr val="DCE2D6"/>
+                      </a:solidFill>
+                      <a:prstDash val="solid"/>
+                      <a:round/>
+                      <a:headEnd type="none" w="med" len="med"/>
+                      <a:tailEnd type="none" w="med" len="med"/>
+                    </a:lnB>
+                  </a:tcPr>
+                </a:tc>
+                <a:tc>
+                  <a:txBody>
+                    <a:bodyPr/>
+                    <a:lstStyle/>
+                    <a:p>
+                      <a:pPr algn="r" indent="0" marL="0">
+                        <a:buNone/>
+                      </a:pPr>
+                      <a:r>
+                        <a:rPr lang="en-US" sz="900" dirty="0">
+                          <a:solidFill>
+                            <a:srgbClr val="2B2F28"/>
+                          </a:solidFill>
+                          <a:latin typeface="Plus Jakarta Sans" pitchFamily="34" charset="0"/>
+                          <a:ea typeface="Plus Jakarta Sans" pitchFamily="34" charset="-122"/>
+                          <a:cs typeface="Plus Jakarta Sans" pitchFamily="34" charset="-120"/>
+                        </a:rPr>
+                        <a:t>5 / 4</a:t>
+                      </a:r>
+                      <a:endParaRPr lang="en-US" sz="900" dirty="0">
+                        <a:latin typeface="Plus Jakarta Sans" charset="0"/>
+                        <a:ea typeface="Plus Jakarta Sans" charset="0"/>
+                        <a:cs typeface="Plus Jakarta Sans" charset="0"/>
+                      </a:endParaRPr>
+                    </a:p>
+                  </a:txBody>
+                  <a:tcPr marL="36576" marR="36576" marT="36576" marB="36576" anchor="ctr">
+                    <a:lnL w="6350" cap="flat" cmpd="sng" algn="ctr">
+                      <a:solidFill>
+                        <a:srgbClr val="DCE2D6"/>
+                      </a:solidFill>
+                      <a:prstDash val="solid"/>
+                      <a:round/>
+                      <a:headEnd type="none" w="med" len="med"/>
+                      <a:tailEnd type="none" w="med" len="med"/>
+                    </a:lnL>
+                    <a:lnR w="6350" cap="flat" cmpd="sng" algn="ctr">
+                      <a:solidFill>
+                        <a:srgbClr val="DCE2D6"/>
+                      </a:solidFill>
+                      <a:prstDash val="solid"/>
+                      <a:round/>
+                      <a:headEnd type="none" w="med" len="med"/>
+                      <a:tailEnd type="none" w="med" len="med"/>
+                    </a:lnR>
+                    <a:lnT w="6350" cap="flat" cmpd="sng" algn="ctr">
+                      <a:solidFill>
+                        <a:srgbClr val="DCE2D6"/>
+                      </a:solidFill>
+                      <a:prstDash val="solid"/>
+                      <a:round/>
+                      <a:headEnd type="none" w="med" len="med"/>
+                      <a:tailEnd type="none" w="med" len="med"/>
+                    </a:lnT>
+                    <a:lnB w="6350" cap="flat" cmpd="sng" algn="ctr">
+                      <a:solidFill>
+                        <a:srgbClr val="DCE2D6"/>
+                      </a:solidFill>
+                      <a:prstDash val="solid"/>
+                      <a:round/>
+                      <a:headEnd type="none" w="med" len="med"/>
+                      <a:tailEnd type="none" w="med" len="med"/>
+                    </a:lnB>
+                  </a:tcPr>
+                </a:tc>
+              </a:tr>
+              <a:tr h="0">
+                <a:tc>
+                  <a:txBody>
+                    <a:bodyPr/>
+                    <a:lstStyle/>
+                    <a:p>
+                      <a:pPr algn="l" indent="0" marL="0">
+                        <a:buNone/>
+                      </a:pPr>
+                      <a:r>
+                        <a:rPr lang="en-US" sz="900" b="1" dirty="0">
+                          <a:solidFill>
+                            <a:srgbClr val="274E13"/>
+                          </a:solidFill>
+                          <a:latin typeface="Plus Jakarta Sans" pitchFamily="34" charset="0"/>
+                          <a:ea typeface="Plus Jakarta Sans" pitchFamily="34" charset="-122"/>
+                          <a:cs typeface="Plus Jakarta Sans" pitchFamily="34" charset="-120"/>
+                        </a:rPr>
+                        <a:t>Satria K</a:t>
+                      </a:r>
+                      <a:endParaRPr lang="en-US" sz="900" dirty="0">
+                        <a:latin typeface="Plus Jakarta Sans" charset="0"/>
+                        <a:ea typeface="Plus Jakarta Sans" charset="0"/>
+                        <a:cs typeface="Plus Jakarta Sans" charset="0"/>
+                      </a:endParaRPr>
+                    </a:p>
+                  </a:txBody>
+                  <a:tcPr marL="36576" marR="36576" marT="36576" marB="36576" anchor="ctr">
+                    <a:lnL w="6350" cap="flat" cmpd="sng" algn="ctr">
+                      <a:solidFill>
+                        <a:srgbClr val="DCE2D6"/>
+                      </a:solidFill>
+                      <a:prstDash val="solid"/>
+                      <a:round/>
+                      <a:headEnd type="none" w="med" len="med"/>
+                      <a:tailEnd type="none" w="med" len="med"/>
+                    </a:lnL>
+                    <a:lnR w="6350" cap="flat" cmpd="sng" algn="ctr">
+                      <a:solidFill>
+                        <a:srgbClr val="DCE2D6"/>
+                      </a:solidFill>
+                      <a:prstDash val="solid"/>
+                      <a:round/>
+                      <a:headEnd type="none" w="med" len="med"/>
+                      <a:tailEnd type="none" w="med" len="med"/>
+                    </a:lnR>
+                    <a:lnT w="6350" cap="flat" cmpd="sng" algn="ctr">
+                      <a:solidFill>
+                        <a:srgbClr val="DCE2D6"/>
+                      </a:solidFill>
+                      <a:prstDash val="solid"/>
+                      <a:round/>
+                      <a:headEnd type="none" w="med" len="med"/>
+                      <a:tailEnd type="none" w="med" len="med"/>
+                    </a:lnT>
+                    <a:lnB w="6350" cap="flat" cmpd="sng" algn="ctr">
+                      <a:solidFill>
+                        <a:srgbClr val="DCE2D6"/>
+                      </a:solidFill>
+                      <a:prstDash val="solid"/>
+                      <a:round/>
+                      <a:headEnd type="none" w="med" len="med"/>
+                      <a:tailEnd type="none" w="med" len="med"/>
+                    </a:lnB>
+                  </a:tcPr>
+                </a:tc>
+                <a:tc>
+                  <a:txBody>
+                    <a:bodyPr/>
+                    <a:lstStyle/>
+                    <a:p>
+                      <a:pPr algn="l" indent="0" marL="0">
+                        <a:buNone/>
+                      </a:pPr>
+                      <a:r>
+                        <a:rPr lang="en-US" sz="900" dirty="0">
+                          <a:solidFill>
+                            <a:srgbClr val="2B2F28"/>
+                          </a:solidFill>
+                          <a:latin typeface="Plus Jakarta Sans" pitchFamily="34" charset="0"/>
+                          <a:ea typeface="Plus Jakarta Sans" pitchFamily="34" charset="-122"/>
+                          <a:cs typeface="Plus Jakarta Sans" pitchFamily="34" charset="-120"/>
+                        </a:rPr>
+                        <a:t>Internal team</a:t>
+                      </a:r>
+                      <a:endParaRPr lang="en-US" sz="900" dirty="0">
+                        <a:latin typeface="Plus Jakarta Sans" charset="0"/>
+                        <a:ea typeface="Plus Jakarta Sans" charset="0"/>
+                        <a:cs typeface="Plus Jakarta Sans" charset="0"/>
+                      </a:endParaRPr>
+                    </a:p>
+                  </a:txBody>
+                  <a:tcPr marL="36576" marR="36576" marT="36576" marB="36576" anchor="ctr">
+                    <a:lnL w="6350" cap="flat" cmpd="sng" algn="ctr">
+                      <a:solidFill>
+                        <a:srgbClr val="DCE2D6"/>
+                      </a:solidFill>
+                      <a:prstDash val="solid"/>
+                      <a:round/>
+                      <a:headEnd type="none" w="med" len="med"/>
+                      <a:tailEnd type="none" w="med" len="med"/>
+                    </a:lnL>
+                    <a:lnR w="6350" cap="flat" cmpd="sng" algn="ctr">
+                      <a:solidFill>
+                        <a:srgbClr val="DCE2D6"/>
+                      </a:solidFill>
+                      <a:prstDash val="solid"/>
+                      <a:round/>
+                      <a:headEnd type="none" w="med" len="med"/>
+                      <a:tailEnd type="none" w="med" len="med"/>
+                    </a:lnR>
+                    <a:lnT w="6350" cap="flat" cmpd="sng" algn="ctr">
+                      <a:solidFill>
+                        <a:srgbClr val="DCE2D6"/>
+                      </a:solidFill>
+                      <a:prstDash val="solid"/>
+                      <a:round/>
+                      <a:headEnd type="none" w="med" len="med"/>
+                      <a:tailEnd type="none" w="med" len="med"/>
+                    </a:lnT>
+                    <a:lnB w="6350" cap="flat" cmpd="sng" algn="ctr">
+                      <a:solidFill>
+                        <a:srgbClr val="DCE2D6"/>
+                      </a:solidFill>
+                      <a:prstDash val="solid"/>
+                      <a:round/>
+                      <a:headEnd type="none" w="med" len="med"/>
+                      <a:tailEnd type="none" w="med" len="med"/>
+                    </a:lnB>
+                  </a:tcPr>
+                </a:tc>
+                <a:tc>
+                  <a:txBody>
+                    <a:bodyPr/>
+                    <a:lstStyle/>
+                    <a:p>
+                      <a:pPr algn="r" indent="0" marL="0">
+                        <a:buNone/>
+                      </a:pPr>
+                      <a:r>
+                        <a:rPr lang="en-US" sz="900" dirty="0">
+                          <a:solidFill>
+                            <a:srgbClr val="2B2F28"/>
+                          </a:solidFill>
+                          <a:latin typeface="Plus Jakarta Sans" pitchFamily="34" charset="0"/>
+                          <a:ea typeface="Plus Jakarta Sans" pitchFamily="34" charset="-122"/>
+                          <a:cs typeface="Plus Jakarta Sans" pitchFamily="34" charset="-120"/>
+                        </a:rPr>
+                        <a:t>–</a:t>
+                      </a:r>
+                      <a:endParaRPr lang="en-US" sz="900" dirty="0">
+                        <a:latin typeface="Plus Jakarta Sans" charset="0"/>
+                        <a:ea typeface="Plus Jakarta Sans" charset="0"/>
+                        <a:cs typeface="Plus Jakarta Sans" charset="0"/>
+                      </a:endParaRPr>
+                    </a:p>
+                  </a:txBody>
+                  <a:tcPr marL="36576" marR="36576" marT="36576" marB="36576" anchor="ctr">
+                    <a:lnL w="6350" cap="flat" cmpd="sng" algn="ctr">
+                      <a:solidFill>
+                        <a:srgbClr val="DCE2D6"/>
+                      </a:solidFill>
+                      <a:prstDash val="solid"/>
+                      <a:round/>
+                      <a:headEnd type="none" w="med" len="med"/>
+                      <a:tailEnd type="none" w="med" len="med"/>
+                    </a:lnL>
+                    <a:lnR w="6350" cap="flat" cmpd="sng" algn="ctr">
+                      <a:solidFill>
+                        <a:srgbClr val="DCE2D6"/>
+                      </a:solidFill>
+                      <a:prstDash val="solid"/>
+                      <a:round/>
+                      <a:headEnd type="none" w="med" len="med"/>
+                      <a:tailEnd type="none" w="med" len="med"/>
+                    </a:lnR>
+                    <a:lnT w="6350" cap="flat" cmpd="sng" algn="ctr">
+                      <a:solidFill>
+                        <a:srgbClr val="DCE2D6"/>
+                      </a:solidFill>
+                      <a:prstDash val="solid"/>
+                      <a:round/>
+                      <a:headEnd type="none" w="med" len="med"/>
+                      <a:tailEnd type="none" w="med" len="med"/>
+                    </a:lnT>
+                    <a:lnB w="6350" cap="flat" cmpd="sng" algn="ctr">
+                      <a:solidFill>
+                        <a:srgbClr val="DCE2D6"/>
+                      </a:solidFill>
+                      <a:prstDash val="solid"/>
+                      <a:round/>
+                      <a:headEnd type="none" w="med" len="med"/>
+                      <a:tailEnd type="none" w="med" len="med"/>
+                    </a:lnB>
+                  </a:tcPr>
+                </a:tc>
+                <a:tc>
+                  <a:txBody>
+                    <a:bodyPr/>
+                    <a:lstStyle/>
+                    <a:p>
+                      <a:pPr algn="r" indent="0" marL="0">
+                        <a:buNone/>
+                      </a:pPr>
+                      <a:r>
+                        <a:rPr lang="en-US" sz="900" b="1" dirty="0">
+                          <a:solidFill>
+                            <a:srgbClr val="274E13"/>
+                          </a:solidFill>
+                          <a:latin typeface="Plus Jakarta Sans" pitchFamily="34" charset="0"/>
+                          <a:ea typeface="Plus Jakarta Sans" pitchFamily="34" charset="-122"/>
+                          <a:cs typeface="Plus Jakarta Sans" pitchFamily="34" charset="-120"/>
+                        </a:rPr>
+                        <a:t>1</a:t>
+                      </a:r>
+                      <a:endParaRPr lang="en-US" sz="900" dirty="0">
+                        <a:latin typeface="Plus Jakarta Sans" charset="0"/>
+                        <a:ea typeface="Plus Jakarta Sans" charset="0"/>
+                        <a:cs typeface="Plus Jakarta Sans" charset="0"/>
+                      </a:endParaRPr>
+                    </a:p>
+                  </a:txBody>
+                  <a:tcPr marL="36576" marR="36576" marT="36576" marB="36576" anchor="ctr">
+                    <a:lnL w="6350" cap="flat" cmpd="sng" algn="ctr">
+                      <a:solidFill>
+                        <a:srgbClr val="DCE2D6"/>
+                      </a:solidFill>
+                      <a:prstDash val="solid"/>
+                      <a:round/>
+                      <a:headEnd type="none" w="med" len="med"/>
+                      <a:tailEnd type="none" w="med" len="med"/>
+                    </a:lnL>
+                    <a:lnR w="6350" cap="flat" cmpd="sng" algn="ctr">
+                      <a:solidFill>
+                        <a:srgbClr val="DCE2D6"/>
+                      </a:solidFill>
+                      <a:prstDash val="solid"/>
+                      <a:round/>
+                      <a:headEnd type="none" w="med" len="med"/>
+                      <a:tailEnd type="none" w="med" len="med"/>
+                    </a:lnR>
+                    <a:lnT w="6350" cap="flat" cmpd="sng" algn="ctr">
+                      <a:solidFill>
+                        <a:srgbClr val="DCE2D6"/>
+                      </a:solidFill>
+                      <a:prstDash val="solid"/>
+                      <a:round/>
+                      <a:headEnd type="none" w="med" len="med"/>
+                      <a:tailEnd type="none" w="med" len="med"/>
+                    </a:lnT>
+                    <a:lnB w="6350" cap="flat" cmpd="sng" algn="ctr">
+                      <a:solidFill>
+                        <a:srgbClr val="DCE2D6"/>
+                      </a:solidFill>
+                      <a:prstDash val="solid"/>
+                      <a:round/>
+                      <a:headEnd type="none" w="med" len="med"/>
+                      <a:tailEnd type="none" w="med" len="med"/>
+                    </a:lnB>
+                  </a:tcPr>
+                </a:tc>
+                <a:tc>
+                  <a:txBody>
+                    <a:bodyPr/>
+                    <a:lstStyle/>
+                    <a:p>
+                      <a:pPr algn="r" indent="0" marL="0">
+                        <a:buNone/>
+                      </a:pPr>
+                      <a:r>
+                        <a:rPr lang="en-US" sz="900" dirty="0">
+                          <a:solidFill>
+                            <a:srgbClr val="2B2F28"/>
+                          </a:solidFill>
+                          <a:latin typeface="Plus Jakarta Sans" pitchFamily="34" charset="0"/>
+                          <a:ea typeface="Plus Jakarta Sans" pitchFamily="34" charset="-122"/>
+                          <a:cs typeface="Plus Jakarta Sans" pitchFamily="34" charset="-120"/>
+                        </a:rPr>
+                        <a:t>1</a:t>
+                      </a:r>
+                      <a:endParaRPr lang="en-US" sz="900" dirty="0">
+                        <a:latin typeface="Plus Jakarta Sans" charset="0"/>
+                        <a:ea typeface="Plus Jakarta Sans" charset="0"/>
+                        <a:cs typeface="Plus Jakarta Sans" charset="0"/>
+                      </a:endParaRPr>
+                    </a:p>
+                  </a:txBody>
+                  <a:tcPr marL="36576" marR="36576" marT="36576" marB="36576" anchor="ctr">
+                    <a:lnL w="6350" cap="flat" cmpd="sng" algn="ctr">
+                      <a:solidFill>
+                        <a:srgbClr val="DCE2D6"/>
+                      </a:solidFill>
+                      <a:prstDash val="solid"/>
+                      <a:round/>
+                      <a:headEnd type="none" w="med" len="med"/>
+                      <a:tailEnd type="none" w="med" len="med"/>
+                    </a:lnL>
+                    <a:lnR w="6350" cap="flat" cmpd="sng" algn="ctr">
+                      <a:solidFill>
+                        <a:srgbClr val="DCE2D6"/>
+                      </a:solidFill>
+                      <a:prstDash val="solid"/>
+                      <a:round/>
+                      <a:headEnd type="none" w="med" len="med"/>
+                      <a:tailEnd type="none" w="med" len="med"/>
+                    </a:lnR>
+                    <a:lnT w="6350" cap="flat" cmpd="sng" algn="ctr">
+                      <a:solidFill>
+                        <a:srgbClr val="DCE2D6"/>
+                      </a:solidFill>
+                      <a:prstDash val="solid"/>
+                      <a:round/>
+                      <a:headEnd type="none" w="med" len="med"/>
+                      <a:tailEnd type="none" w="med" len="med"/>
+                    </a:lnT>
+                    <a:lnB w="6350" cap="flat" cmpd="sng" algn="ctr">
+                      <a:solidFill>
+                        <a:srgbClr val="DCE2D6"/>
+                      </a:solidFill>
+                      <a:prstDash val="solid"/>
+                      <a:round/>
+                      <a:headEnd type="none" w="med" len="med"/>
+                      <a:tailEnd type="none" w="med" len="med"/>
+                    </a:lnB>
+                  </a:tcPr>
+                </a:tc>
+                <a:tc>
+                  <a:txBody>
+                    <a:bodyPr/>
+                    <a:lstStyle/>
+                    <a:p>
+                      <a:pPr algn="r" indent="0" marL="0">
+                        <a:buNone/>
+                      </a:pPr>
+                      <a:r>
+                        <a:rPr lang="en-US" sz="900" dirty="0">
+                          <a:solidFill>
+                            <a:srgbClr val="2B2F28"/>
+                          </a:solidFill>
+                          <a:latin typeface="Plus Jakarta Sans" pitchFamily="34" charset="0"/>
+                          <a:ea typeface="Plus Jakarta Sans" pitchFamily="34" charset="-122"/>
+                          <a:cs typeface="Plus Jakarta Sans" pitchFamily="34" charset="-120"/>
+                        </a:rPr>
+                        <a:t>1 / 0</a:t>
+                      </a:r>
+                      <a:endParaRPr lang="en-US" sz="900" dirty="0">
+                        <a:latin typeface="Plus Jakarta Sans" charset="0"/>
+                        <a:ea typeface="Plus Jakarta Sans" charset="0"/>
+                        <a:cs typeface="Plus Jakarta Sans" charset="0"/>
+                      </a:endParaRPr>
+                    </a:p>
+                  </a:txBody>
+                  <a:tcPr marL="36576" marR="36576" marT="36576" marB="36576" anchor="ctr">
+                    <a:lnL w="6350" cap="flat" cmpd="sng" algn="ctr">
+                      <a:solidFill>
+                        <a:srgbClr val="DCE2D6"/>
+                      </a:solidFill>
+                      <a:prstDash val="solid"/>
+                      <a:round/>
+                      <a:headEnd type="none" w="med" len="med"/>
+                      <a:tailEnd type="none" w="med" len="med"/>
+                    </a:lnL>
+                    <a:lnR w="6350" cap="flat" cmpd="sng" algn="ctr">
+                      <a:solidFill>
+                        <a:srgbClr val="DCE2D6"/>
+                      </a:solidFill>
+                      <a:prstDash val="solid"/>
+                      <a:round/>
+                      <a:headEnd type="none" w="med" len="med"/>
+                      <a:tailEnd type="none" w="med" len="med"/>
+                    </a:lnR>
+                    <a:lnT w="6350" cap="flat" cmpd="sng" algn="ctr">
+                      <a:solidFill>
+                        <a:srgbClr val="DCE2D6"/>
+                      </a:solidFill>
+                      <a:prstDash val="solid"/>
+                      <a:round/>
+                      <a:headEnd type="none" w="med" len="med"/>
+                      <a:tailEnd type="none" w="med" len="med"/>
+                    </a:lnT>
+                    <a:lnB w="6350" cap="flat" cmpd="sng" algn="ctr">
+                      <a:solidFill>
+                        <a:srgbClr val="DCE2D6"/>
+                      </a:solidFill>
+                      <a:prstDash val="solid"/>
+                      <a:round/>
+                      <a:headEnd type="none" w="med" len="med"/>
+                      <a:tailEnd type="none" w="med" len="med"/>
+                    </a:lnB>
+                  </a:tcPr>
+                </a:tc>
+              </a:tr>
+              <a:tr h="0">
+                <a:tc>
+                  <a:txBody>
+                    <a:bodyPr/>
+                    <a:lstStyle/>
+                    <a:p>
+                      <a:pPr algn="l" indent="0" marL="0">
+                        <a:buNone/>
+                      </a:pPr>
+                      <a:r>
+                        <a:rPr lang="en-US" sz="900" b="1" dirty="0">
+                          <a:solidFill>
+                            <a:srgbClr val="274E13"/>
+                          </a:solidFill>
+                          <a:latin typeface="Plus Jakarta Sans" pitchFamily="34" charset="0"/>
+                          <a:ea typeface="Plus Jakarta Sans" pitchFamily="34" charset="-122"/>
+                          <a:cs typeface="Plus Jakarta Sans" pitchFamily="34" charset="-120"/>
+                        </a:rPr>
+                        <a:t>Sazali Wandana</a:t>
+                      </a:r>
+                      <a:endParaRPr lang="en-US" sz="900" dirty="0">
+                        <a:latin typeface="Plus Jakarta Sans" charset="0"/>
+                        <a:ea typeface="Plus Jakarta Sans" charset="0"/>
+                        <a:cs typeface="Plus Jakarta Sans" charset="0"/>
+                      </a:endParaRPr>
+                    </a:p>
+                  </a:txBody>
+                  <a:tcPr marL="36576" marR="36576" marT="36576" marB="36576" anchor="ctr">
+                    <a:lnL w="6350" cap="flat" cmpd="sng" algn="ctr">
+                      <a:solidFill>
+                        <a:srgbClr val="DCE2D6"/>
+                      </a:solidFill>
+                      <a:prstDash val="solid"/>
+                      <a:round/>
+                      <a:headEnd type="none" w="med" len="med"/>
+                      <a:tailEnd type="none" w="med" len="med"/>
+                    </a:lnL>
+                    <a:lnR w="6350" cap="flat" cmpd="sng" algn="ctr">
+                      <a:solidFill>
+                        <a:srgbClr val="DCE2D6"/>
+                      </a:solidFill>
+                      <a:prstDash val="solid"/>
+                      <a:round/>
+                      <a:headEnd type="none" w="med" len="med"/>
+                      <a:tailEnd type="none" w="med" len="med"/>
+                    </a:lnR>
+                    <a:lnT w="6350" cap="flat" cmpd="sng" algn="ctr">
+                      <a:solidFill>
+                        <a:srgbClr val="DCE2D6"/>
+                      </a:solidFill>
+                      <a:prstDash val="solid"/>
+                      <a:round/>
+                      <a:headEnd type="none" w="med" len="med"/>
+                      <a:tailEnd type="none" w="med" len="med"/>
+                    </a:lnT>
+                    <a:lnB w="6350" cap="flat" cmpd="sng" algn="ctr">
+                      <a:solidFill>
+                        <a:srgbClr val="DCE2D6"/>
+                      </a:solidFill>
+                      <a:prstDash val="solid"/>
+                      <a:round/>
+                      <a:headEnd type="none" w="med" len="med"/>
+                      <a:tailEnd type="none" w="med" len="med"/>
+                    </a:lnB>
+                  </a:tcPr>
+                </a:tc>
+                <a:tc>
+                  <a:txBody>
+                    <a:bodyPr/>
+                    <a:lstStyle/>
+                    <a:p>
+                      <a:pPr algn="l" indent="0" marL="0">
+                        <a:buNone/>
+                      </a:pPr>
+                      <a:r>
+                        <a:rPr lang="en-US" sz="900" dirty="0">
+                          <a:solidFill>
+                            <a:srgbClr val="2B2F28"/>
+                          </a:solidFill>
+                          <a:latin typeface="Plus Jakarta Sans" pitchFamily="34" charset="0"/>
+                          <a:ea typeface="Plus Jakarta Sans" pitchFamily="34" charset="-122"/>
+                          <a:cs typeface="Plus Jakarta Sans" pitchFamily="34" charset="-120"/>
+                        </a:rPr>
+                        <a:t>Internal team</a:t>
+                      </a:r>
+                      <a:endParaRPr lang="en-US" sz="900" dirty="0">
+                        <a:latin typeface="Plus Jakarta Sans" charset="0"/>
+                        <a:ea typeface="Plus Jakarta Sans" charset="0"/>
+                        <a:cs typeface="Plus Jakarta Sans" charset="0"/>
+                      </a:endParaRPr>
+                    </a:p>
+                  </a:txBody>
+                  <a:tcPr marL="36576" marR="36576" marT="36576" marB="36576" anchor="ctr">
+                    <a:lnL w="6350" cap="flat" cmpd="sng" algn="ctr">
+                      <a:solidFill>
+                        <a:srgbClr val="DCE2D6"/>
+                      </a:solidFill>
+                      <a:prstDash val="solid"/>
+                      <a:round/>
+                      <a:headEnd type="none" w="med" len="med"/>
+                      <a:tailEnd type="none" w="med" len="med"/>
+                    </a:lnL>
+                    <a:lnR w="6350" cap="flat" cmpd="sng" algn="ctr">
+                      <a:solidFill>
+                        <a:srgbClr val="DCE2D6"/>
+                      </a:solidFill>
+                      <a:prstDash val="solid"/>
+                      <a:round/>
+                      <a:headEnd type="none" w="med" len="med"/>
+                      <a:tailEnd type="none" w="med" len="med"/>
+                    </a:lnR>
+                    <a:lnT w="6350" cap="flat" cmpd="sng" algn="ctr">
+                      <a:solidFill>
+                        <a:srgbClr val="DCE2D6"/>
+                      </a:solidFill>
+                      <a:prstDash val="solid"/>
+                      <a:round/>
+                      <a:headEnd type="none" w="med" len="med"/>
+                      <a:tailEnd type="none" w="med" len="med"/>
+                    </a:lnT>
+                    <a:lnB w="6350" cap="flat" cmpd="sng" algn="ctr">
+                      <a:solidFill>
+                        <a:srgbClr val="DCE2D6"/>
+                      </a:solidFill>
+                      <a:prstDash val="solid"/>
+                      <a:round/>
+                      <a:headEnd type="none" w="med" len="med"/>
+                      <a:tailEnd type="none" w="med" len="med"/>
+                    </a:lnB>
+                  </a:tcPr>
+                </a:tc>
+                <a:tc>
+                  <a:txBody>
+                    <a:bodyPr/>
+                    <a:lstStyle/>
+                    <a:p>
+                      <a:pPr algn="r" indent="0" marL="0">
+                        <a:buNone/>
+                      </a:pPr>
+                      <a:r>
+                        <a:rPr lang="en-US" sz="900" dirty="0">
+                          <a:solidFill>
+                            <a:srgbClr val="2B2F28"/>
+                          </a:solidFill>
+                          <a:latin typeface="Plus Jakarta Sans" pitchFamily="34" charset="0"/>
+                          <a:ea typeface="Plus Jakarta Sans" pitchFamily="34" charset="-122"/>
+                          <a:cs typeface="Plus Jakarta Sans" pitchFamily="34" charset="-120"/>
+                        </a:rPr>
+                        <a:t>–</a:t>
+                      </a:r>
+                      <a:endParaRPr lang="en-US" sz="900" dirty="0">
+                        <a:latin typeface="Plus Jakarta Sans" charset="0"/>
+                        <a:ea typeface="Plus Jakarta Sans" charset="0"/>
+                        <a:cs typeface="Plus Jakarta Sans" charset="0"/>
+                      </a:endParaRPr>
+                    </a:p>
+                  </a:txBody>
+                  <a:tcPr marL="36576" marR="36576" marT="36576" marB="36576" anchor="ctr">
+                    <a:lnL w="6350" cap="flat" cmpd="sng" algn="ctr">
+                      <a:solidFill>
+                        <a:srgbClr val="DCE2D6"/>
+                      </a:solidFill>
+                      <a:prstDash val="solid"/>
+                      <a:round/>
+                      <a:headEnd type="none" w="med" len="med"/>
+                      <a:tailEnd type="none" w="med" len="med"/>
+                    </a:lnL>
+                    <a:lnR w="6350" cap="flat" cmpd="sng" algn="ctr">
+                      <a:solidFill>
+                        <a:srgbClr val="DCE2D6"/>
+                      </a:solidFill>
+                      <a:prstDash val="solid"/>
+                      <a:round/>
+                      <a:headEnd type="none" w="med" len="med"/>
+                      <a:tailEnd type="none" w="med" len="med"/>
+                    </a:lnR>
+                    <a:lnT w="6350" cap="flat" cmpd="sng" algn="ctr">
+                      <a:solidFill>
+                        <a:srgbClr val="DCE2D6"/>
+                      </a:solidFill>
+                      <a:prstDash val="solid"/>
+                      <a:round/>
+                      <a:headEnd type="none" w="med" len="med"/>
+                      <a:tailEnd type="none" w="med" len="med"/>
+                    </a:lnT>
+                    <a:lnB w="6350" cap="flat" cmpd="sng" algn="ctr">
+                      <a:solidFill>
+                        <a:srgbClr val="DCE2D6"/>
+                      </a:solidFill>
+                      <a:prstDash val="solid"/>
+                      <a:round/>
+                      <a:headEnd type="none" w="med" len="med"/>
+                      <a:tailEnd type="none" w="med" len="med"/>
+                    </a:lnB>
+                  </a:tcPr>
+                </a:tc>
+                <a:tc>
+                  <a:txBody>
+                    <a:bodyPr/>
+                    <a:lstStyle/>
+                    <a:p>
+                      <a:pPr algn="r" indent="0" marL="0">
+                        <a:buNone/>
+                      </a:pPr>
+                      <a:r>
+                        <a:rPr lang="en-US" sz="900" b="1" dirty="0">
+                          <a:solidFill>
+                            <a:srgbClr val="274E13"/>
+                          </a:solidFill>
+                          <a:latin typeface="Plus Jakarta Sans" pitchFamily="34" charset="0"/>
+                          <a:ea typeface="Plus Jakarta Sans" pitchFamily="34" charset="-122"/>
+                          <a:cs typeface="Plus Jakarta Sans" pitchFamily="34" charset="-120"/>
+                        </a:rPr>
+                        <a:t>1</a:t>
+                      </a:r>
+                      <a:endParaRPr lang="en-US" sz="900" dirty="0">
+                        <a:latin typeface="Plus Jakarta Sans" charset="0"/>
+                        <a:ea typeface="Plus Jakarta Sans" charset="0"/>
+                        <a:cs typeface="Plus Jakarta Sans" charset="0"/>
+                      </a:endParaRPr>
+                    </a:p>
+                  </a:txBody>
+                  <a:tcPr marL="36576" marR="36576" marT="36576" marB="36576" anchor="ctr">
+                    <a:lnL w="6350" cap="flat" cmpd="sng" algn="ctr">
+                      <a:solidFill>
+                        <a:srgbClr val="DCE2D6"/>
+                      </a:solidFill>
+                      <a:prstDash val="solid"/>
+                      <a:round/>
+                      <a:headEnd type="none" w="med" len="med"/>
+                      <a:tailEnd type="none" w="med" len="med"/>
+                    </a:lnL>
+                    <a:lnR w="6350" cap="flat" cmpd="sng" algn="ctr">
+                      <a:solidFill>
+                        <a:srgbClr val="DCE2D6"/>
+                      </a:solidFill>
+                      <a:prstDash val="solid"/>
+                      <a:round/>
+                      <a:headEnd type="none" w="med" len="med"/>
+                      <a:tailEnd type="none" w="med" len="med"/>
+                    </a:lnR>
+                    <a:lnT w="6350" cap="flat" cmpd="sng" algn="ctr">
+                      <a:solidFill>
+                        <a:srgbClr val="DCE2D6"/>
+                      </a:solidFill>
+                      <a:prstDash val="solid"/>
+                      <a:round/>
+                      <a:headEnd type="none" w="med" len="med"/>
+                      <a:tailEnd type="none" w="med" len="med"/>
+                    </a:lnT>
+                    <a:lnB w="6350" cap="flat" cmpd="sng" algn="ctr">
+                      <a:solidFill>
+                        <a:srgbClr val="DCE2D6"/>
+                      </a:solidFill>
+                      <a:prstDash val="solid"/>
+                      <a:round/>
+                      <a:headEnd type="none" w="med" len="med"/>
+                      <a:tailEnd type="none" w="med" len="med"/>
+                    </a:lnB>
+                  </a:tcPr>
+                </a:tc>
+                <a:tc>
+                  <a:txBody>
+                    <a:bodyPr/>
+                    <a:lstStyle/>
+                    <a:p>
+                      <a:pPr algn="r" indent="0" marL="0">
+                        <a:buNone/>
+                      </a:pPr>
+                      <a:r>
+                        <a:rPr lang="en-US" sz="900" dirty="0">
+                          <a:solidFill>
+                            <a:srgbClr val="2B2F28"/>
+                          </a:solidFill>
+                          <a:latin typeface="Plus Jakarta Sans" pitchFamily="34" charset="0"/>
+                          <a:ea typeface="Plus Jakarta Sans" pitchFamily="34" charset="-122"/>
+                          <a:cs typeface="Plus Jakarta Sans" pitchFamily="34" charset="-120"/>
+                        </a:rPr>
+                        <a:t>1</a:t>
+                      </a:r>
+                      <a:endParaRPr lang="en-US" sz="900" dirty="0">
+                        <a:latin typeface="Plus Jakarta Sans" charset="0"/>
+                        <a:ea typeface="Plus Jakarta Sans" charset="0"/>
+                        <a:cs typeface="Plus Jakarta Sans" charset="0"/>
+                      </a:endParaRPr>
+                    </a:p>
+                  </a:txBody>
+                  <a:tcPr marL="36576" marR="36576" marT="36576" marB="36576" anchor="ctr">
+                    <a:lnL w="6350" cap="flat" cmpd="sng" algn="ctr">
+                      <a:solidFill>
+                        <a:srgbClr val="DCE2D6"/>
+                      </a:solidFill>
+                      <a:prstDash val="solid"/>
+                      <a:round/>
+                      <a:headEnd type="none" w="med" len="med"/>
+                      <a:tailEnd type="none" w="med" len="med"/>
+                    </a:lnL>
+                    <a:lnR w="6350" cap="flat" cmpd="sng" algn="ctr">
+                      <a:solidFill>
+                        <a:srgbClr val="DCE2D6"/>
+                      </a:solidFill>
+                      <a:prstDash val="solid"/>
+                      <a:round/>
+                      <a:headEnd type="none" w="med" len="med"/>
+                      <a:tailEnd type="none" w="med" len="med"/>
+                    </a:lnR>
+                    <a:lnT w="6350" cap="flat" cmpd="sng" algn="ctr">
+                      <a:solidFill>
+                        <a:srgbClr val="DCE2D6"/>
+                      </a:solidFill>
+                      <a:prstDash val="solid"/>
+                      <a:round/>
+                      <a:headEnd type="none" w="med" len="med"/>
+                      <a:tailEnd type="none" w="med" len="med"/>
+                    </a:lnT>
+                    <a:lnB w="6350" cap="flat" cmpd="sng" algn="ctr">
+                      <a:solidFill>
+                        <a:srgbClr val="DCE2D6"/>
+                      </a:solidFill>
+                      <a:prstDash val="solid"/>
+                      <a:round/>
+                      <a:headEnd type="none" w="med" len="med"/>
+                      <a:tailEnd type="none" w="med" len="med"/>
+                    </a:lnB>
+                  </a:tcPr>
+                </a:tc>
+                <a:tc>
+                  <a:txBody>
+                    <a:bodyPr/>
+                    <a:lstStyle/>
+                    <a:p>
+                      <a:pPr algn="r" indent="0" marL="0">
+                        <a:buNone/>
+                      </a:pPr>
+                      <a:r>
+                        <a:rPr lang="en-US" sz="900" dirty="0">
+                          <a:solidFill>
+                            <a:srgbClr val="2B2F28"/>
+                          </a:solidFill>
+                          <a:latin typeface="Plus Jakarta Sans" pitchFamily="34" charset="0"/>
+                          <a:ea typeface="Plus Jakarta Sans" pitchFamily="34" charset="-122"/>
+                          <a:cs typeface="Plus Jakarta Sans" pitchFamily="34" charset="-120"/>
+                        </a:rPr>
+                        <a:t>0 / 1</a:t>
+                      </a:r>
+                      <a:endParaRPr lang="en-US" sz="900" dirty="0">
+                        <a:latin typeface="Plus Jakarta Sans" charset="0"/>
+                        <a:ea typeface="Plus Jakarta Sans" charset="0"/>
+                        <a:cs typeface="Plus Jakarta Sans" charset="0"/>
+                      </a:endParaRPr>
+                    </a:p>
+                  </a:txBody>
+                  <a:tcPr marL="36576" marR="36576" marT="36576" marB="36576" anchor="ctr">
+                    <a:lnL w="6350" cap="flat" cmpd="sng" algn="ctr">
+                      <a:solidFill>
+                        <a:srgbClr val="DCE2D6"/>
+                      </a:solidFill>
+                      <a:prstDash val="solid"/>
+                      <a:round/>
+                      <a:headEnd type="none" w="med" len="med"/>
+                      <a:tailEnd type="none" w="med" len="med"/>
+                    </a:lnL>
+                    <a:lnR w="6350" cap="flat" cmpd="sng" algn="ctr">
+                      <a:solidFill>
+                        <a:srgbClr val="DCE2D6"/>
+                      </a:solidFill>
+                      <a:prstDash val="solid"/>
+                      <a:round/>
+                      <a:headEnd type="none" w="med" len="med"/>
+                      <a:tailEnd type="none" w="med" len="med"/>
+                    </a:lnR>
+                    <a:lnT w="6350" cap="flat" cmpd="sng" algn="ctr">
+                      <a:solidFill>
+                        <a:srgbClr val="DCE2D6"/>
+                      </a:solidFill>
+                      <a:prstDash val="solid"/>
+                      <a:round/>
+                      <a:headEnd type="none" w="med" len="med"/>
+                      <a:tailEnd type="none" w="med" len="med"/>
+                    </a:lnT>
+                    <a:lnB w="6350" cap="flat" cmpd="sng" algn="ctr">
+                      <a:solidFill>
+                        <a:srgbClr val="DCE2D6"/>
+                      </a:solidFill>
+                      <a:prstDash val="solid"/>
+                      <a:round/>
+                      <a:headEnd type="none" w="med" len="med"/>
+                      <a:tailEnd type="none" w="med" len="med"/>
+                    </a:lnB>
+                  </a:tcPr>
+                </a:tc>
+              </a:tr>
+              <a:tr h="0">
+                <a:tc>
+                  <a:txBody>
+                    <a:bodyPr/>
+                    <a:lstStyle/>
+                    <a:p>
+                      <a:pPr algn="l" indent="0" marL="0">
+                        <a:buNone/>
+                      </a:pPr>
+                      <a:r>
+                        <a:rPr lang="en-US" sz="900" dirty="0">
+                          <a:solidFill>
+                            <a:srgbClr val="2B2F28"/>
+                          </a:solidFill>
+                          <a:latin typeface="Plus Jakarta Sans" pitchFamily="34" charset="0"/>
+                          <a:ea typeface="Plus Jakarta Sans" pitchFamily="34" charset="-122"/>
+                          <a:cs typeface="Plus Jakarta Sans" pitchFamily="34" charset="-120"/>
+                        </a:rPr>
+                        <a:t>Edi Sutarsan</a:t>
+                      </a:r>
+                      <a:endParaRPr lang="en-US" sz="900" dirty="0">
+                        <a:latin typeface="Plus Jakarta Sans" charset="0"/>
+                        <a:ea typeface="Plus Jakarta Sans" charset="0"/>
+                        <a:cs typeface="Plus Jakarta Sans" charset="0"/>
+                      </a:endParaRPr>
+                    </a:p>
+                  </a:txBody>
+                  <a:tcPr marL="36576" marR="36576" marT="36576" marB="36576" anchor="ctr">
+                    <a:lnL w="6350" cap="flat" cmpd="sng" algn="ctr">
+                      <a:solidFill>
+                        <a:srgbClr val="DCE2D6"/>
+                      </a:solidFill>
+                      <a:prstDash val="solid"/>
+                      <a:round/>
+                      <a:headEnd type="none" w="med" len="med"/>
+                      <a:tailEnd type="none" w="med" len="med"/>
+                    </a:lnL>
+                    <a:lnR w="6350" cap="flat" cmpd="sng" algn="ctr">
+                      <a:solidFill>
+                        <a:srgbClr val="DCE2D6"/>
+                      </a:solidFill>
+                      <a:prstDash val="solid"/>
+                      <a:round/>
+                      <a:headEnd type="none" w="med" len="med"/>
+                      <a:tailEnd type="none" w="med" len="med"/>
+                    </a:lnR>
+                    <a:lnT w="6350" cap="flat" cmpd="sng" algn="ctr">
+                      <a:solidFill>
+                        <a:srgbClr val="DCE2D6"/>
+                      </a:solidFill>
+                      <a:prstDash val="solid"/>
+                      <a:round/>
+                      <a:headEnd type="none" w="med" len="med"/>
+                      <a:tailEnd type="none" w="med" len="med"/>
+                    </a:lnT>
+                    <a:lnB w="6350" cap="flat" cmpd="sng" algn="ctr">
+                      <a:solidFill>
+                        <a:srgbClr val="DCE2D6"/>
+                      </a:solidFill>
+                      <a:prstDash val="solid"/>
+                      <a:round/>
+                      <a:headEnd type="none" w="med" len="med"/>
+                      <a:tailEnd type="none" w="med" len="med"/>
+                    </a:lnB>
+                  </a:tcPr>
+                </a:tc>
+                <a:tc>
+                  <a:txBody>
+                    <a:bodyPr/>
+                    <a:lstStyle/>
+                    <a:p>
+                      <a:pPr algn="l" indent="0" marL="0">
+                        <a:buNone/>
+                      </a:pPr>
+                      <a:r>
+                        <a:rPr lang="en-US" sz="900" dirty="0">
+                          <a:solidFill>
+                            <a:srgbClr val="2B2F28"/>
+                          </a:solidFill>
+                          <a:latin typeface="Plus Jakarta Sans" pitchFamily="34" charset="0"/>
+                          <a:ea typeface="Plus Jakarta Sans" pitchFamily="34" charset="-122"/>
+                          <a:cs typeface="Plus Jakarta Sans" pitchFamily="34" charset="-120"/>
+                        </a:rPr>
+                        <a:t>Internal team</a:t>
+                      </a:r>
+                      <a:endParaRPr lang="en-US" sz="900" dirty="0">
+                        <a:latin typeface="Plus Jakarta Sans" charset="0"/>
+                        <a:ea typeface="Plus Jakarta Sans" charset="0"/>
+                        <a:cs typeface="Plus Jakarta Sans" charset="0"/>
+                      </a:endParaRPr>
+                    </a:p>
+                  </a:txBody>
+                  <a:tcPr marL="36576" marR="36576" marT="36576" marB="36576" anchor="ctr">
+                    <a:lnL w="6350" cap="flat" cmpd="sng" algn="ctr">
+                      <a:solidFill>
+                        <a:srgbClr val="DCE2D6"/>
+                      </a:solidFill>
+                      <a:prstDash val="solid"/>
+                      <a:round/>
+                      <a:headEnd type="none" w="med" len="med"/>
+                      <a:tailEnd type="none" w="med" len="med"/>
+                    </a:lnL>
+                    <a:lnR w="6350" cap="flat" cmpd="sng" algn="ctr">
+                      <a:solidFill>
+                        <a:srgbClr val="DCE2D6"/>
+                      </a:solidFill>
+                      <a:prstDash val="solid"/>
+                      <a:round/>
+                      <a:headEnd type="none" w="med" len="med"/>
+                      <a:tailEnd type="none" w="med" len="med"/>
+                    </a:lnR>
+                    <a:lnT w="6350" cap="flat" cmpd="sng" algn="ctr">
+                      <a:solidFill>
+                        <a:srgbClr val="DCE2D6"/>
+                      </a:solidFill>
+                      <a:prstDash val="solid"/>
+                      <a:round/>
+                      <a:headEnd type="none" w="med" len="med"/>
+                      <a:tailEnd type="none" w="med" len="med"/>
+                    </a:lnT>
+                    <a:lnB w="6350" cap="flat" cmpd="sng" algn="ctr">
+                      <a:solidFill>
+                        <a:srgbClr val="DCE2D6"/>
+                      </a:solidFill>
+                      <a:prstDash val="solid"/>
+                      <a:round/>
+                      <a:headEnd type="none" w="med" len="med"/>
+                      <a:tailEnd type="none" w="med" len="med"/>
+                    </a:lnB>
+                  </a:tcPr>
+                </a:tc>
+                <a:tc>
+                  <a:txBody>
+                    <a:bodyPr/>
+                    <a:lstStyle/>
+                    <a:p>
+                      <a:pPr algn="r" indent="0" marL="0">
+                        <a:buNone/>
+                      </a:pPr>
+                      <a:r>
+                        <a:rPr lang="en-US" sz="900" dirty="0">
+                          <a:solidFill>
+                            <a:srgbClr val="2B2F28"/>
+                          </a:solidFill>
+                          <a:latin typeface="Plus Jakarta Sans" pitchFamily="34" charset="0"/>
+                          <a:ea typeface="Plus Jakarta Sans" pitchFamily="34" charset="-122"/>
+                          <a:cs typeface="Plus Jakarta Sans" pitchFamily="34" charset="-120"/>
+                        </a:rPr>
+                        <a:t>3</a:t>
+                      </a:r>
+                      <a:endParaRPr lang="en-US" sz="900" dirty="0">
+                        <a:latin typeface="Plus Jakarta Sans" charset="0"/>
+                        <a:ea typeface="Plus Jakarta Sans" charset="0"/>
+                        <a:cs typeface="Plus Jakarta Sans" charset="0"/>
+                      </a:endParaRPr>
+                    </a:p>
+                  </a:txBody>
+                  <a:tcPr marL="36576" marR="36576" marT="36576" marB="36576" anchor="ctr">
+                    <a:lnL w="6350" cap="flat" cmpd="sng" algn="ctr">
+                      <a:solidFill>
+                        <a:srgbClr val="DCE2D6"/>
+                      </a:solidFill>
+                      <a:prstDash val="solid"/>
+                      <a:round/>
+                      <a:headEnd type="none" w="med" len="med"/>
+                      <a:tailEnd type="none" w="med" len="med"/>
+                    </a:lnL>
+                    <a:lnR w="6350" cap="flat" cmpd="sng" algn="ctr">
+                      <a:solidFill>
+                        <a:srgbClr val="DCE2D6"/>
+                      </a:solidFill>
+                      <a:prstDash val="solid"/>
+                      <a:round/>
+                      <a:headEnd type="none" w="med" len="med"/>
+                      <a:tailEnd type="none" w="med" len="med"/>
+                    </a:lnR>
+                    <a:lnT w="6350" cap="flat" cmpd="sng" algn="ctr">
+                      <a:solidFill>
+                        <a:srgbClr val="DCE2D6"/>
+                      </a:solidFill>
+                      <a:prstDash val="solid"/>
+                      <a:round/>
+                      <a:headEnd type="none" w="med" len="med"/>
+                      <a:tailEnd type="none" w="med" len="med"/>
+                    </a:lnT>
+                    <a:lnB w="6350" cap="flat" cmpd="sng" algn="ctr">
+                      <a:solidFill>
+                        <a:srgbClr val="DCE2D6"/>
+                      </a:solidFill>
+                      <a:prstDash val="solid"/>
+                      <a:round/>
+                      <a:headEnd type="none" w="med" len="med"/>
+                      <a:tailEnd type="none" w="med" len="med"/>
+                    </a:lnB>
+                  </a:tcPr>
+                </a:tc>
+                <a:tc>
+                  <a:txBody>
+                    <a:bodyPr/>
+                    <a:lstStyle/>
+                    <a:p>
+                      <a:pPr algn="r" indent="0" marL="0">
+                        <a:buNone/>
+                      </a:pPr>
+                      <a:r>
+                        <a:rPr lang="en-US" sz="900" dirty="0">
+                          <a:solidFill>
+                            <a:srgbClr val="2B2F28"/>
+                          </a:solidFill>
+                          <a:latin typeface="Plus Jakarta Sans" pitchFamily="34" charset="0"/>
+                          <a:ea typeface="Plus Jakarta Sans" pitchFamily="34" charset="-122"/>
+                          <a:cs typeface="Plus Jakarta Sans" pitchFamily="34" charset="-120"/>
+                        </a:rPr>
+                        <a:t>–</a:t>
+                      </a:r>
+                      <a:endParaRPr lang="en-US" sz="900" dirty="0">
+                        <a:latin typeface="Plus Jakarta Sans" charset="0"/>
+                        <a:ea typeface="Plus Jakarta Sans" charset="0"/>
+                        <a:cs typeface="Plus Jakarta Sans" charset="0"/>
+                      </a:endParaRPr>
+                    </a:p>
+                  </a:txBody>
+                  <a:tcPr marL="36576" marR="36576" marT="36576" marB="36576" anchor="ctr">
+                    <a:lnL w="6350" cap="flat" cmpd="sng" algn="ctr">
+                      <a:solidFill>
+                        <a:srgbClr val="DCE2D6"/>
+                      </a:solidFill>
+                      <a:prstDash val="solid"/>
+                      <a:round/>
+                      <a:headEnd type="none" w="med" len="med"/>
+                      <a:tailEnd type="none" w="med" len="med"/>
+                    </a:lnL>
+                    <a:lnR w="6350" cap="flat" cmpd="sng" algn="ctr">
+                      <a:solidFill>
+                        <a:srgbClr val="DCE2D6"/>
+                      </a:solidFill>
+                      <a:prstDash val="solid"/>
+                      <a:round/>
+                      <a:headEnd type="none" w="med" len="med"/>
+                      <a:tailEnd type="none" w="med" len="med"/>
+                    </a:lnR>
+                    <a:lnT w="6350" cap="flat" cmpd="sng" algn="ctr">
+                      <a:solidFill>
+                        <a:srgbClr val="DCE2D6"/>
+                      </a:solidFill>
+                      <a:prstDash val="solid"/>
+                      <a:round/>
+                      <a:headEnd type="none" w="med" len="med"/>
+                      <a:tailEnd type="none" w="med" len="med"/>
+                    </a:lnT>
+                    <a:lnB w="6350" cap="flat" cmpd="sng" algn="ctr">
+                      <a:solidFill>
+                        <a:srgbClr val="DCE2D6"/>
+                      </a:solidFill>
+                      <a:prstDash val="solid"/>
+                      <a:round/>
+                      <a:headEnd type="none" w="med" len="med"/>
+                      <a:tailEnd type="none" w="med" len="med"/>
+                    </a:lnB>
+                  </a:tcPr>
+                </a:tc>
+                <a:tc>
+                  <a:txBody>
+                    <a:bodyPr/>
+                    <a:lstStyle/>
+                    <a:p>
+                      <a:pPr algn="r" indent="0" marL="0">
+                        <a:buNone/>
+                      </a:pPr>
+                      <a:r>
+                        <a:rPr lang="en-US" sz="900" dirty="0">
+                          <a:solidFill>
+                            <a:srgbClr val="2B2F28"/>
+                          </a:solidFill>
+                          <a:latin typeface="Plus Jakarta Sans" pitchFamily="34" charset="0"/>
+                          <a:ea typeface="Plus Jakarta Sans" pitchFamily="34" charset="-122"/>
+                          <a:cs typeface="Plus Jakarta Sans" pitchFamily="34" charset="-120"/>
+                        </a:rPr>
+                        <a:t>3</a:t>
+                      </a:r>
+                      <a:endParaRPr lang="en-US" sz="900" dirty="0">
+                        <a:latin typeface="Plus Jakarta Sans" charset="0"/>
+                        <a:ea typeface="Plus Jakarta Sans" charset="0"/>
+                        <a:cs typeface="Plus Jakarta Sans" charset="0"/>
+                      </a:endParaRPr>
+                    </a:p>
+                  </a:txBody>
+                  <a:tcPr marL="36576" marR="36576" marT="36576" marB="36576" anchor="ctr">
+                    <a:lnL w="6350" cap="flat" cmpd="sng" algn="ctr">
+                      <a:solidFill>
+                        <a:srgbClr val="DCE2D6"/>
+                      </a:solidFill>
+                      <a:prstDash val="solid"/>
+                      <a:round/>
+                      <a:headEnd type="none" w="med" len="med"/>
+                      <a:tailEnd type="none" w="med" len="med"/>
+                    </a:lnL>
+                    <a:lnR w="6350" cap="flat" cmpd="sng" algn="ctr">
+                      <a:solidFill>
+                        <a:srgbClr val="DCE2D6"/>
+                      </a:solidFill>
+                      <a:prstDash val="solid"/>
+                      <a:round/>
+                      <a:headEnd type="none" w="med" len="med"/>
+                      <a:tailEnd type="none" w="med" len="med"/>
+                    </a:lnR>
+                    <a:lnT w="6350" cap="flat" cmpd="sng" algn="ctr">
+                      <a:solidFill>
+                        <a:srgbClr val="DCE2D6"/>
+                      </a:solidFill>
+                      <a:prstDash val="solid"/>
+                      <a:round/>
+                      <a:headEnd type="none" w="med" len="med"/>
+                      <a:tailEnd type="none" w="med" len="med"/>
+                    </a:lnT>
+                    <a:lnB w="6350" cap="flat" cmpd="sng" algn="ctr">
+                      <a:solidFill>
+                        <a:srgbClr val="DCE2D6"/>
+                      </a:solidFill>
+                      <a:prstDash val="solid"/>
+                      <a:round/>
+                      <a:headEnd type="none" w="med" len="med"/>
+                      <a:tailEnd type="none" w="med" len="med"/>
+                    </a:lnB>
+                  </a:tcPr>
+                </a:tc>
+                <a:tc>
+                  <a:txBody>
+                    <a:bodyPr/>
+                    <a:lstStyle/>
+                    <a:p>
+                      <a:pPr algn="r" indent="0" marL="0">
+                        <a:buNone/>
+                      </a:pPr>
+                      <a:r>
+                        <a:rPr lang="en-US" sz="900" dirty="0">
+                          <a:solidFill>
+                            <a:srgbClr val="2B2F28"/>
+                          </a:solidFill>
+                          <a:latin typeface="Plus Jakarta Sans" pitchFamily="34" charset="0"/>
+                          <a:ea typeface="Plus Jakarta Sans" pitchFamily="34" charset="-122"/>
+                          <a:cs typeface="Plus Jakarta Sans" pitchFamily="34" charset="-120"/>
+                        </a:rPr>
+                        <a:t>3 / 0</a:t>
+                      </a:r>
+                      <a:endParaRPr lang="en-US" sz="900" dirty="0">
+                        <a:latin typeface="Plus Jakarta Sans" charset="0"/>
+                        <a:ea typeface="Plus Jakarta Sans" charset="0"/>
+                        <a:cs typeface="Plus Jakarta Sans" charset="0"/>
+                      </a:endParaRPr>
+                    </a:p>
+                  </a:txBody>
+                  <a:tcPr marL="36576" marR="36576" marT="36576" marB="36576" anchor="ctr">
+                    <a:lnL w="6350" cap="flat" cmpd="sng" algn="ctr">
+                      <a:solidFill>
+                        <a:srgbClr val="DCE2D6"/>
+                      </a:solidFill>
+                      <a:prstDash val="solid"/>
+                      <a:round/>
+                      <a:headEnd type="none" w="med" len="med"/>
+                      <a:tailEnd type="none" w="med" len="med"/>
+                    </a:lnL>
+                    <a:lnR w="6350" cap="flat" cmpd="sng" algn="ctr">
+                      <a:solidFill>
+                        <a:srgbClr val="DCE2D6"/>
+                      </a:solidFill>
+                      <a:prstDash val="solid"/>
+                      <a:round/>
+                      <a:headEnd type="none" w="med" len="med"/>
+                      <a:tailEnd type="none" w="med" len="med"/>
+                    </a:lnR>
+                    <a:lnT w="6350" cap="flat" cmpd="sng" algn="ctr">
+                      <a:solidFill>
+                        <a:srgbClr val="DCE2D6"/>
+                      </a:solidFill>
+                      <a:prstDash val="solid"/>
+                      <a:round/>
+                      <a:headEnd type="none" w="med" len="med"/>
+                      <a:tailEnd type="none" w="med" len="med"/>
+                    </a:lnT>
+                    <a:lnB w="6350" cap="flat" cmpd="sng" algn="ctr">
+                      <a:solidFill>
+                        <a:srgbClr val="DCE2D6"/>
+                      </a:solidFill>
+                      <a:prstDash val="solid"/>
+                      <a:round/>
+                      <a:headEnd type="none" w="med" len="med"/>
+                      <a:tailEnd type="none" w="med" len="med"/>
+                    </a:lnB>
+                  </a:tcPr>
+                </a:tc>
+              </a:tr>
+              <a:tr h="0">
+                <a:tc>
+                  <a:txBody>
+                    <a:bodyPr/>
+                    <a:lstStyle/>
+                    <a:p>
+                      <a:pPr algn="l" indent="0" marL="0">
+                        <a:buNone/>
+                      </a:pPr>
+                      <a:r>
+                        <a:rPr lang="en-US" sz="900" dirty="0">
+                          <a:solidFill>
+                            <a:srgbClr val="2B2F28"/>
+                          </a:solidFill>
+                          <a:latin typeface="Plus Jakarta Sans" pitchFamily="34" charset="0"/>
+                          <a:ea typeface="Plus Jakarta Sans" pitchFamily="34" charset="-122"/>
+                          <a:cs typeface="Plus Jakarta Sans" pitchFamily="34" charset="-120"/>
+                        </a:rPr>
+                        <a:t>Hendrik Budianto</a:t>
+                      </a:r>
+                      <a:endParaRPr lang="en-US" sz="900" dirty="0">
+                        <a:latin typeface="Plus Jakarta Sans" charset="0"/>
+                        <a:ea typeface="Plus Jakarta Sans" charset="0"/>
+                        <a:cs typeface="Plus Jakarta Sans" charset="0"/>
+                      </a:endParaRPr>
+                    </a:p>
+                  </a:txBody>
+                  <a:tcPr marL="36576" marR="36576" marT="36576" marB="36576" anchor="ctr">
+                    <a:lnL w="6350" cap="flat" cmpd="sng" algn="ctr">
+                      <a:solidFill>
+                        <a:srgbClr val="DCE2D6"/>
+                      </a:solidFill>
+                      <a:prstDash val="solid"/>
+                      <a:round/>
+                      <a:headEnd type="none" w="med" len="med"/>
+                      <a:tailEnd type="none" w="med" len="med"/>
+                    </a:lnL>
+                    <a:lnR w="6350" cap="flat" cmpd="sng" algn="ctr">
+                      <a:solidFill>
+                        <a:srgbClr val="DCE2D6"/>
+                      </a:solidFill>
+                      <a:prstDash val="solid"/>
+                      <a:round/>
+                      <a:headEnd type="none" w="med" len="med"/>
+                      <a:tailEnd type="none" w="med" len="med"/>
+                    </a:lnR>
+                    <a:lnT w="6350" cap="flat" cmpd="sng" algn="ctr">
+                      <a:solidFill>
+                        <a:srgbClr val="DCE2D6"/>
+                      </a:solidFill>
+                      <a:prstDash val="solid"/>
+                      <a:round/>
+                      <a:headEnd type="none" w="med" len="med"/>
+                      <a:tailEnd type="none" w="med" len="med"/>
+                    </a:lnT>
+                    <a:lnB w="6350" cap="flat" cmpd="sng" algn="ctr">
+                      <a:solidFill>
+                        <a:srgbClr val="DCE2D6"/>
+                      </a:solidFill>
+                      <a:prstDash val="solid"/>
+                      <a:round/>
+                      <a:headEnd type="none" w="med" len="med"/>
+                      <a:tailEnd type="none" w="med" len="med"/>
+                    </a:lnB>
+                  </a:tcPr>
+                </a:tc>
+                <a:tc>
+                  <a:txBody>
+                    <a:bodyPr/>
+                    <a:lstStyle/>
+                    <a:p>
+                      <a:pPr algn="l" indent="0" marL="0">
+                        <a:buNone/>
+                      </a:pPr>
+                      <a:r>
+                        <a:rPr lang="en-US" sz="900" dirty="0">
+                          <a:solidFill>
+                            <a:srgbClr val="2B2F28"/>
+                          </a:solidFill>
+                          <a:latin typeface="Plus Jakarta Sans" pitchFamily="34" charset="0"/>
+                          <a:ea typeface="Plus Jakarta Sans" pitchFamily="34" charset="-122"/>
+                          <a:cs typeface="Plus Jakarta Sans" pitchFamily="34" charset="-120"/>
+                        </a:rPr>
+                        <a:t>Internal team</a:t>
+                      </a:r>
+                      <a:endParaRPr lang="en-US" sz="900" dirty="0">
+                        <a:latin typeface="Plus Jakarta Sans" charset="0"/>
+                        <a:ea typeface="Plus Jakarta Sans" charset="0"/>
+                        <a:cs typeface="Plus Jakarta Sans" charset="0"/>
+                      </a:endParaRPr>
+                    </a:p>
+                  </a:txBody>
+                  <a:tcPr marL="36576" marR="36576" marT="36576" marB="36576" anchor="ctr">
+                    <a:lnL w="6350" cap="flat" cmpd="sng" algn="ctr">
+                      <a:solidFill>
+                        <a:srgbClr val="DCE2D6"/>
+                      </a:solidFill>
+                      <a:prstDash val="solid"/>
+                      <a:round/>
+                      <a:headEnd type="none" w="med" len="med"/>
+                      <a:tailEnd type="none" w="med" len="med"/>
+                    </a:lnL>
+                    <a:lnR w="6350" cap="flat" cmpd="sng" algn="ctr">
+                      <a:solidFill>
+                        <a:srgbClr val="DCE2D6"/>
+                      </a:solidFill>
+                      <a:prstDash val="solid"/>
+                      <a:round/>
+                      <a:headEnd type="none" w="med" len="med"/>
+                      <a:tailEnd type="none" w="med" len="med"/>
+                    </a:lnR>
+                    <a:lnT w="6350" cap="flat" cmpd="sng" algn="ctr">
+                      <a:solidFill>
+                        <a:srgbClr val="DCE2D6"/>
+                      </a:solidFill>
+                      <a:prstDash val="solid"/>
+                      <a:round/>
+                      <a:headEnd type="none" w="med" len="med"/>
+                      <a:tailEnd type="none" w="med" len="med"/>
+                    </a:lnT>
+                    <a:lnB w="6350" cap="flat" cmpd="sng" algn="ctr">
+                      <a:solidFill>
+                        <a:srgbClr val="DCE2D6"/>
+                      </a:solidFill>
+                      <a:prstDash val="solid"/>
+                      <a:round/>
+                      <a:headEnd type="none" w="med" len="med"/>
+                      <a:tailEnd type="none" w="med" len="med"/>
+                    </a:lnB>
+                  </a:tcPr>
+                </a:tc>
+                <a:tc>
+                  <a:txBody>
+                    <a:bodyPr/>
+                    <a:lstStyle/>
+                    <a:p>
+                      <a:pPr algn="r" indent="0" marL="0">
+                        <a:buNone/>
+                      </a:pPr>
+                      <a:r>
+                        <a:rPr lang="en-US" sz="900" dirty="0">
+                          <a:solidFill>
+                            <a:srgbClr val="2B2F28"/>
+                          </a:solidFill>
+                          <a:latin typeface="Plus Jakarta Sans" pitchFamily="34" charset="0"/>
+                          <a:ea typeface="Plus Jakarta Sans" pitchFamily="34" charset="-122"/>
+                          <a:cs typeface="Plus Jakarta Sans" pitchFamily="34" charset="-120"/>
+                        </a:rPr>
+                        <a:t>–</a:t>
+                      </a:r>
+                      <a:endParaRPr lang="en-US" sz="900" dirty="0">
+                        <a:latin typeface="Plus Jakarta Sans" charset="0"/>
+                        <a:ea typeface="Plus Jakarta Sans" charset="0"/>
+                        <a:cs typeface="Plus Jakarta Sans" charset="0"/>
+                      </a:endParaRPr>
+                    </a:p>
+                  </a:txBody>
+                  <a:tcPr marL="36576" marR="36576" marT="36576" marB="36576" anchor="ctr">
+                    <a:lnL w="6350" cap="flat" cmpd="sng" algn="ctr">
+                      <a:solidFill>
+                        <a:srgbClr val="DCE2D6"/>
+                      </a:solidFill>
+                      <a:prstDash val="solid"/>
+                      <a:round/>
+                      <a:headEnd type="none" w="med" len="med"/>
+                      <a:tailEnd type="none" w="med" len="med"/>
+                    </a:lnL>
+                    <a:lnR w="6350" cap="flat" cmpd="sng" algn="ctr">
+                      <a:solidFill>
+                        <a:srgbClr val="DCE2D6"/>
+                      </a:solidFill>
+                      <a:prstDash val="solid"/>
+                      <a:round/>
+                      <a:headEnd type="none" w="med" len="med"/>
+                      <a:tailEnd type="none" w="med" len="med"/>
+                    </a:lnR>
+                    <a:lnT w="6350" cap="flat" cmpd="sng" algn="ctr">
+                      <a:solidFill>
+                        <a:srgbClr val="DCE2D6"/>
+                      </a:solidFill>
+                      <a:prstDash val="solid"/>
+                      <a:round/>
+                      <a:headEnd type="none" w="med" len="med"/>
+                      <a:tailEnd type="none" w="med" len="med"/>
+                    </a:lnT>
+                    <a:lnB w="6350" cap="flat" cmpd="sng" algn="ctr">
+                      <a:solidFill>
+                        <a:srgbClr val="DCE2D6"/>
+                      </a:solidFill>
+                      <a:prstDash val="solid"/>
+                      <a:round/>
+                      <a:headEnd type="none" w="med" len="med"/>
+                      <a:tailEnd type="none" w="med" len="med"/>
+                    </a:lnB>
+                  </a:tcPr>
+                </a:tc>
+                <a:tc>
+                  <a:txBody>
+                    <a:bodyPr/>
+                    <a:lstStyle/>
+                    <a:p>
+                      <a:pPr algn="r" indent="0" marL="0">
+                        <a:buNone/>
+                      </a:pPr>
+                      <a:r>
+                        <a:rPr lang="en-US" sz="900" dirty="0">
+                          <a:solidFill>
+                            <a:srgbClr val="2B2F28"/>
+                          </a:solidFill>
+                          <a:latin typeface="Plus Jakarta Sans" pitchFamily="34" charset="0"/>
+                          <a:ea typeface="Plus Jakarta Sans" pitchFamily="34" charset="-122"/>
+                          <a:cs typeface="Plus Jakarta Sans" pitchFamily="34" charset="-120"/>
+                        </a:rPr>
+                        <a:t>–</a:t>
+                      </a:r>
+                      <a:endParaRPr lang="en-US" sz="900" dirty="0">
+                        <a:latin typeface="Plus Jakarta Sans" charset="0"/>
+                        <a:ea typeface="Plus Jakarta Sans" charset="0"/>
+                        <a:cs typeface="Plus Jakarta Sans" charset="0"/>
+                      </a:endParaRPr>
+                    </a:p>
+                  </a:txBody>
+                  <a:tcPr marL="36576" marR="36576" marT="36576" marB="36576" anchor="ctr">
+                    <a:lnL w="6350" cap="flat" cmpd="sng" algn="ctr">
+                      <a:solidFill>
+                        <a:srgbClr val="DCE2D6"/>
+                      </a:solidFill>
+                      <a:prstDash val="solid"/>
+                      <a:round/>
+                      <a:headEnd type="none" w="med" len="med"/>
+                      <a:tailEnd type="none" w="med" len="med"/>
+                    </a:lnL>
+                    <a:lnR w="6350" cap="flat" cmpd="sng" algn="ctr">
+                      <a:solidFill>
+                        <a:srgbClr val="DCE2D6"/>
+                      </a:solidFill>
+                      <a:prstDash val="solid"/>
+                      <a:round/>
+                      <a:headEnd type="none" w="med" len="med"/>
+                      <a:tailEnd type="none" w="med" len="med"/>
+                    </a:lnR>
+                    <a:lnT w="6350" cap="flat" cmpd="sng" algn="ctr">
+                      <a:solidFill>
+                        <a:srgbClr val="DCE2D6"/>
+                      </a:solidFill>
+                      <a:prstDash val="solid"/>
+                      <a:round/>
+                      <a:headEnd type="none" w="med" len="med"/>
+                      <a:tailEnd type="none" w="med" len="med"/>
+                    </a:lnT>
+                    <a:lnB w="6350" cap="flat" cmpd="sng" algn="ctr">
+                      <a:solidFill>
+                        <a:srgbClr val="DCE2D6"/>
+                      </a:solidFill>
+                      <a:prstDash val="solid"/>
+                      <a:round/>
+                      <a:headEnd type="none" w="med" len="med"/>
+                      <a:tailEnd type="none" w="med" len="med"/>
+                    </a:lnB>
+                  </a:tcPr>
+                </a:tc>
+                <a:tc>
+                  <a:txBody>
+                    <a:bodyPr/>
+                    <a:lstStyle/>
+                    <a:p>
+                      <a:pPr algn="r" indent="0" marL="0">
+                        <a:buNone/>
+                      </a:pPr>
+                      <a:r>
+                        <a:rPr lang="en-US" sz="900" dirty="0">
+                          <a:solidFill>
+                            <a:srgbClr val="2B2F28"/>
+                          </a:solidFill>
+                          <a:latin typeface="Plus Jakarta Sans" pitchFamily="34" charset="0"/>
+                          <a:ea typeface="Plus Jakarta Sans" pitchFamily="34" charset="-122"/>
+                          <a:cs typeface="Plus Jakarta Sans" pitchFamily="34" charset="-120"/>
+                        </a:rPr>
+                        <a:t>3</a:t>
+                      </a:r>
+                      <a:endParaRPr lang="en-US" sz="900" dirty="0">
+                        <a:latin typeface="Plus Jakarta Sans" charset="0"/>
+                        <a:ea typeface="Plus Jakarta Sans" charset="0"/>
+                        <a:cs typeface="Plus Jakarta Sans" charset="0"/>
+                      </a:endParaRPr>
+                    </a:p>
+                  </a:txBody>
+                  <a:tcPr marL="36576" marR="36576" marT="36576" marB="36576" anchor="ctr">
+                    <a:lnL w="6350" cap="flat" cmpd="sng" algn="ctr">
+                      <a:solidFill>
+                        <a:srgbClr val="DCE2D6"/>
+                      </a:solidFill>
+                      <a:prstDash val="solid"/>
+                      <a:round/>
+                      <a:headEnd type="none" w="med" len="med"/>
+                      <a:tailEnd type="none" w="med" len="med"/>
+                    </a:lnL>
+                    <a:lnR w="6350" cap="flat" cmpd="sng" algn="ctr">
+                      <a:solidFill>
+                        <a:srgbClr val="DCE2D6"/>
+                      </a:solidFill>
+                      <a:prstDash val="solid"/>
+                      <a:round/>
+                      <a:headEnd type="none" w="med" len="med"/>
+                      <a:tailEnd type="none" w="med" len="med"/>
+                    </a:lnR>
+                    <a:lnT w="6350" cap="flat" cmpd="sng" algn="ctr">
+                      <a:solidFill>
+                        <a:srgbClr val="DCE2D6"/>
+                      </a:solidFill>
+                      <a:prstDash val="solid"/>
+                      <a:round/>
+                      <a:headEnd type="none" w="med" len="med"/>
+                      <a:tailEnd type="none" w="med" len="med"/>
+                    </a:lnT>
+                    <a:lnB w="6350" cap="flat" cmpd="sng" algn="ctr">
+                      <a:solidFill>
+                        <a:srgbClr val="DCE2D6"/>
+                      </a:solidFill>
+                      <a:prstDash val="solid"/>
+                      <a:round/>
+                      <a:headEnd type="none" w="med" len="med"/>
+                      <a:tailEnd type="none" w="med" len="med"/>
+                    </a:lnB>
+                  </a:tcPr>
+                </a:tc>
+                <a:tc>
+                  <a:txBody>
+                    <a:bodyPr/>
+                    <a:lstStyle/>
+                    <a:p>
+                      <a:pPr algn="r" indent="0" marL="0">
+                        <a:buNone/>
+                      </a:pPr>
+                      <a:r>
+                        <a:rPr lang="en-US" sz="900" dirty="0">
+                          <a:solidFill>
+                            <a:srgbClr val="2B2F28"/>
+                          </a:solidFill>
+                          <a:latin typeface="Plus Jakarta Sans" pitchFamily="34" charset="0"/>
+                          <a:ea typeface="Plus Jakarta Sans" pitchFamily="34" charset="-122"/>
+                          <a:cs typeface="Plus Jakarta Sans" pitchFamily="34" charset="-120"/>
+                        </a:rPr>
+                        <a:t>2 / 1</a:t>
+                      </a:r>
+                      <a:endParaRPr lang="en-US" sz="900" dirty="0">
+                        <a:latin typeface="Plus Jakarta Sans" charset="0"/>
+                        <a:ea typeface="Plus Jakarta Sans" charset="0"/>
+                        <a:cs typeface="Plus Jakarta Sans" charset="0"/>
+                      </a:endParaRPr>
+                    </a:p>
+                  </a:txBody>
+                  <a:tcPr marL="36576" marR="36576" marT="36576" marB="36576" anchor="ctr">
+                    <a:lnL w="6350" cap="flat" cmpd="sng" algn="ctr">
+                      <a:solidFill>
+                        <a:srgbClr val="DCE2D6"/>
+                      </a:solidFill>
+                      <a:prstDash val="solid"/>
+                      <a:round/>
+                      <a:headEnd type="none" w="med" len="med"/>
+                      <a:tailEnd type="none" w="med" len="med"/>
+                    </a:lnL>
+                    <a:lnR w="6350" cap="flat" cmpd="sng" algn="ctr">
+                      <a:solidFill>
+                        <a:srgbClr val="DCE2D6"/>
+                      </a:solidFill>
+                      <a:prstDash val="solid"/>
+                      <a:round/>
+                      <a:headEnd type="none" w="med" len="med"/>
+                      <a:tailEnd type="none" w="med" len="med"/>
+                    </a:lnR>
+                    <a:lnT w="6350" cap="flat" cmpd="sng" algn="ctr">
+                      <a:solidFill>
+                        <a:srgbClr val="DCE2D6"/>
+                      </a:solidFill>
+                      <a:prstDash val="solid"/>
+                      <a:round/>
+                      <a:headEnd type="none" w="med" len="med"/>
+                      <a:tailEnd type="none" w="med" len="med"/>
+                    </a:lnT>
+                    <a:lnB w="6350" cap="flat" cmpd="sng" algn="ctr">
+                      <a:solidFill>
+                        <a:srgbClr val="DCE2D6"/>
+                      </a:solidFill>
+                      <a:prstDash val="solid"/>
+                      <a:round/>
+                      <a:headEnd type="none" w="med" len="med"/>
+                      <a:tailEnd type="none" w="med" len="med"/>
+                    </a:lnB>
+                  </a:tcPr>
+                </a:tc>
+              </a:tr>
+              <a:tr h="0">
+                <a:tc>
+                  <a:txBody>
+                    <a:bodyPr/>
+                    <a:lstStyle/>
+                    <a:p>
+                      <a:pPr algn="l" indent="0" marL="0">
+                        <a:buNone/>
+                      </a:pPr>
+                      <a:r>
+                        <a:rPr lang="en-US" sz="900" dirty="0">
+                          <a:solidFill>
+                            <a:srgbClr val="2B2F28"/>
+                          </a:solidFill>
+                          <a:latin typeface="Plus Jakarta Sans" pitchFamily="34" charset="0"/>
+                          <a:ea typeface="Plus Jakarta Sans" pitchFamily="34" charset="-122"/>
+                          <a:cs typeface="Plus Jakarta Sans" pitchFamily="34" charset="-120"/>
+                        </a:rPr>
+                        <a:t>Simon</a:t>
+                      </a:r>
+                      <a:endParaRPr lang="en-US" sz="900" dirty="0">
+                        <a:latin typeface="Plus Jakarta Sans" charset="0"/>
+                        <a:ea typeface="Plus Jakarta Sans" charset="0"/>
+                        <a:cs typeface="Plus Jakarta Sans" charset="0"/>
+                      </a:endParaRPr>
+                    </a:p>
+                  </a:txBody>
+                  <a:tcPr marL="36576" marR="36576" marT="36576" marB="36576" anchor="ctr">
+                    <a:lnL w="6350" cap="flat" cmpd="sng" algn="ctr">
+                      <a:solidFill>
+                        <a:srgbClr val="DCE2D6"/>
+                      </a:solidFill>
+                      <a:prstDash val="solid"/>
+                      <a:round/>
+                      <a:headEnd type="none" w="med" len="med"/>
+                      <a:tailEnd type="none" w="med" len="med"/>
+                    </a:lnL>
+                    <a:lnR w="6350" cap="flat" cmpd="sng" algn="ctr">
+                      <a:solidFill>
+                        <a:srgbClr val="DCE2D6"/>
+                      </a:solidFill>
+                      <a:prstDash val="solid"/>
+                      <a:round/>
+                      <a:headEnd type="none" w="med" len="med"/>
+                      <a:tailEnd type="none" w="med" len="med"/>
+                    </a:lnR>
+                    <a:lnT w="6350" cap="flat" cmpd="sng" algn="ctr">
+                      <a:solidFill>
+                        <a:srgbClr val="DCE2D6"/>
+                      </a:solidFill>
+                      <a:prstDash val="solid"/>
+                      <a:round/>
+                      <a:headEnd type="none" w="med" len="med"/>
+                      <a:tailEnd type="none" w="med" len="med"/>
+                    </a:lnT>
+                    <a:lnB w="6350" cap="flat" cmpd="sng" algn="ctr">
+                      <a:solidFill>
+                        <a:srgbClr val="DCE2D6"/>
+                      </a:solidFill>
+                      <a:prstDash val="solid"/>
+                      <a:round/>
+                      <a:headEnd type="none" w="med" len="med"/>
+                      <a:tailEnd type="none" w="med" len="med"/>
+                    </a:lnB>
+                  </a:tcPr>
+                </a:tc>
+                <a:tc>
+                  <a:txBody>
+                    <a:bodyPr/>
+                    <a:lstStyle/>
+                    <a:p>
+                      <a:pPr algn="l" indent="0" marL="0">
+                        <a:buNone/>
+                      </a:pPr>
+                      <a:r>
+                        <a:rPr lang="en-US" sz="900" dirty="0">
+                          <a:solidFill>
+                            <a:srgbClr val="2B2F28"/>
+                          </a:solidFill>
+                          <a:latin typeface="Plus Jakarta Sans" pitchFamily="34" charset="0"/>
+                          <a:ea typeface="Plus Jakarta Sans" pitchFamily="34" charset="-122"/>
+                          <a:cs typeface="Plus Jakarta Sans" pitchFamily="34" charset="-120"/>
+                        </a:rPr>
+                        <a:t>Internal team</a:t>
+                      </a:r>
+                      <a:endParaRPr lang="en-US" sz="900" dirty="0">
+                        <a:latin typeface="Plus Jakarta Sans" charset="0"/>
+                        <a:ea typeface="Plus Jakarta Sans" charset="0"/>
+                        <a:cs typeface="Plus Jakarta Sans" charset="0"/>
+                      </a:endParaRPr>
+                    </a:p>
+                  </a:txBody>
+                  <a:tcPr marL="36576" marR="36576" marT="36576" marB="36576" anchor="ctr">
+                    <a:lnL w="6350" cap="flat" cmpd="sng" algn="ctr">
+                      <a:solidFill>
+                        <a:srgbClr val="DCE2D6"/>
+                      </a:solidFill>
+                      <a:prstDash val="solid"/>
+                      <a:round/>
+                      <a:headEnd type="none" w="med" len="med"/>
+                      <a:tailEnd type="none" w="med" len="med"/>
+                    </a:lnL>
+                    <a:lnR w="6350" cap="flat" cmpd="sng" algn="ctr">
+                      <a:solidFill>
+                        <a:srgbClr val="DCE2D6"/>
+                      </a:solidFill>
+                      <a:prstDash val="solid"/>
+                      <a:round/>
+                      <a:headEnd type="none" w="med" len="med"/>
+                      <a:tailEnd type="none" w="med" len="med"/>
+                    </a:lnR>
+                    <a:lnT w="6350" cap="flat" cmpd="sng" algn="ctr">
+                      <a:solidFill>
+                        <a:srgbClr val="DCE2D6"/>
+                      </a:solidFill>
+                      <a:prstDash val="solid"/>
+                      <a:round/>
+                      <a:headEnd type="none" w="med" len="med"/>
+                      <a:tailEnd type="none" w="med" len="med"/>
+                    </a:lnT>
+                    <a:lnB w="6350" cap="flat" cmpd="sng" algn="ctr">
+                      <a:solidFill>
+                        <a:srgbClr val="DCE2D6"/>
+                      </a:solidFill>
+                      <a:prstDash val="solid"/>
+                      <a:round/>
+                      <a:headEnd type="none" w="med" len="med"/>
+                      <a:tailEnd type="none" w="med" len="med"/>
+                    </a:lnB>
+                  </a:tcPr>
+                </a:tc>
+                <a:tc>
+                  <a:txBody>
+                    <a:bodyPr/>
+                    <a:lstStyle/>
+                    <a:p>
+                      <a:pPr algn="r" indent="0" marL="0">
+                        <a:buNone/>
+                      </a:pPr>
+                      <a:r>
+                        <a:rPr lang="en-US" sz="900" dirty="0">
+                          <a:solidFill>
+                            <a:srgbClr val="2B2F28"/>
+                          </a:solidFill>
+                          <a:latin typeface="Plus Jakarta Sans" pitchFamily="34" charset="0"/>
+                          <a:ea typeface="Plus Jakarta Sans" pitchFamily="34" charset="-122"/>
+                          <a:cs typeface="Plus Jakarta Sans" pitchFamily="34" charset="-120"/>
+                        </a:rPr>
+                        <a:t>–</a:t>
+                      </a:r>
+                      <a:endParaRPr lang="en-US" sz="900" dirty="0">
+                        <a:latin typeface="Plus Jakarta Sans" charset="0"/>
+                        <a:ea typeface="Plus Jakarta Sans" charset="0"/>
+                        <a:cs typeface="Plus Jakarta Sans" charset="0"/>
+                      </a:endParaRPr>
+                    </a:p>
+                  </a:txBody>
+                  <a:tcPr marL="36576" marR="36576" marT="36576" marB="36576" anchor="ctr">
+                    <a:lnL w="6350" cap="flat" cmpd="sng" algn="ctr">
+                      <a:solidFill>
+                        <a:srgbClr val="DCE2D6"/>
+                      </a:solidFill>
+                      <a:prstDash val="solid"/>
+                      <a:round/>
+                      <a:headEnd type="none" w="med" len="med"/>
+                      <a:tailEnd type="none" w="med" len="med"/>
+                    </a:lnL>
+                    <a:lnR w="6350" cap="flat" cmpd="sng" algn="ctr">
+                      <a:solidFill>
+                        <a:srgbClr val="DCE2D6"/>
+                      </a:solidFill>
+                      <a:prstDash val="solid"/>
+                      <a:round/>
+                      <a:headEnd type="none" w="med" len="med"/>
+                      <a:tailEnd type="none" w="med" len="med"/>
+                    </a:lnR>
+                    <a:lnT w="6350" cap="flat" cmpd="sng" algn="ctr">
+                      <a:solidFill>
+                        <a:srgbClr val="DCE2D6"/>
+                      </a:solidFill>
+                      <a:prstDash val="solid"/>
+                      <a:round/>
+                      <a:headEnd type="none" w="med" len="med"/>
+                      <a:tailEnd type="none" w="med" len="med"/>
+                    </a:lnT>
+                    <a:lnB w="6350" cap="flat" cmpd="sng" algn="ctr">
+                      <a:solidFill>
+                        <a:srgbClr val="DCE2D6"/>
+                      </a:solidFill>
+                      <a:prstDash val="solid"/>
+                      <a:round/>
+                      <a:headEnd type="none" w="med" len="med"/>
+                      <a:tailEnd type="none" w="med" len="med"/>
+                    </a:lnB>
+                  </a:tcPr>
+                </a:tc>
+                <a:tc>
+                  <a:txBody>
+                    <a:bodyPr/>
+                    <a:lstStyle/>
+                    <a:p>
+                      <a:pPr algn="r" indent="0" marL="0">
+                        <a:buNone/>
+                      </a:pPr>
+                      <a:r>
+                        <a:rPr lang="en-US" sz="900" dirty="0">
+                          <a:solidFill>
+                            <a:srgbClr val="2B2F28"/>
+                          </a:solidFill>
+                          <a:latin typeface="Plus Jakarta Sans" pitchFamily="34" charset="0"/>
+                          <a:ea typeface="Plus Jakarta Sans" pitchFamily="34" charset="-122"/>
+                          <a:cs typeface="Plus Jakarta Sans" pitchFamily="34" charset="-120"/>
+                        </a:rPr>
+                        <a:t>–</a:t>
+                      </a:r>
+                      <a:endParaRPr lang="en-US" sz="900" dirty="0">
+                        <a:latin typeface="Plus Jakarta Sans" charset="0"/>
+                        <a:ea typeface="Plus Jakarta Sans" charset="0"/>
+                        <a:cs typeface="Plus Jakarta Sans" charset="0"/>
+                      </a:endParaRPr>
+                    </a:p>
+                  </a:txBody>
+                  <a:tcPr marL="36576" marR="36576" marT="36576" marB="36576" anchor="ctr">
+                    <a:lnL w="6350" cap="flat" cmpd="sng" algn="ctr">
+                      <a:solidFill>
+                        <a:srgbClr val="DCE2D6"/>
+                      </a:solidFill>
+                      <a:prstDash val="solid"/>
+                      <a:round/>
+                      <a:headEnd type="none" w="med" len="med"/>
+                      <a:tailEnd type="none" w="med" len="med"/>
+                    </a:lnL>
+                    <a:lnR w="6350" cap="flat" cmpd="sng" algn="ctr">
+                      <a:solidFill>
+                        <a:srgbClr val="DCE2D6"/>
+                      </a:solidFill>
+                      <a:prstDash val="solid"/>
+                      <a:round/>
+                      <a:headEnd type="none" w="med" len="med"/>
+                      <a:tailEnd type="none" w="med" len="med"/>
+                    </a:lnR>
+                    <a:lnT w="6350" cap="flat" cmpd="sng" algn="ctr">
+                      <a:solidFill>
+                        <a:srgbClr val="DCE2D6"/>
+                      </a:solidFill>
+                      <a:prstDash val="solid"/>
+                      <a:round/>
+                      <a:headEnd type="none" w="med" len="med"/>
+                      <a:tailEnd type="none" w="med" len="med"/>
+                    </a:lnT>
+                    <a:lnB w="6350" cap="flat" cmpd="sng" algn="ctr">
+                      <a:solidFill>
+                        <a:srgbClr val="DCE2D6"/>
+                      </a:solidFill>
+                      <a:prstDash val="solid"/>
+                      <a:round/>
+                      <a:headEnd type="none" w="med" len="med"/>
+                      <a:tailEnd type="none" w="med" len="med"/>
+                    </a:lnB>
+                  </a:tcPr>
+                </a:tc>
+                <a:tc>
+                  <a:txBody>
+                    <a:bodyPr/>
+                    <a:lstStyle/>
+                    <a:p>
+                      <a:pPr algn="r" indent="0" marL="0">
+                        <a:buNone/>
+                      </a:pPr>
+                      <a:r>
+                        <a:rPr lang="en-US" sz="900" dirty="0">
+                          <a:solidFill>
+                            <a:srgbClr val="2B2F28"/>
+                          </a:solidFill>
+                          <a:latin typeface="Plus Jakarta Sans" pitchFamily="34" charset="0"/>
+                          <a:ea typeface="Plus Jakarta Sans" pitchFamily="34" charset="-122"/>
+                          <a:cs typeface="Plus Jakarta Sans" pitchFamily="34" charset="-120"/>
+                        </a:rPr>
+                        <a:t>2</a:t>
+                      </a:r>
+                      <a:endParaRPr lang="en-US" sz="900" dirty="0">
+                        <a:latin typeface="Plus Jakarta Sans" charset="0"/>
+                        <a:ea typeface="Plus Jakarta Sans" charset="0"/>
+                        <a:cs typeface="Plus Jakarta Sans" charset="0"/>
+                      </a:endParaRPr>
+                    </a:p>
+                  </a:txBody>
+                  <a:tcPr marL="36576" marR="36576" marT="36576" marB="36576" anchor="ctr">
+                    <a:lnL w="6350" cap="flat" cmpd="sng" algn="ctr">
+                      <a:solidFill>
+                        <a:srgbClr val="DCE2D6"/>
+                      </a:solidFill>
+                      <a:prstDash val="solid"/>
+                      <a:round/>
+                      <a:headEnd type="none" w="med" len="med"/>
+                      <a:tailEnd type="none" w="med" len="med"/>
+                    </a:lnL>
+                    <a:lnR w="6350" cap="flat" cmpd="sng" algn="ctr">
+                      <a:solidFill>
+                        <a:srgbClr val="DCE2D6"/>
+                      </a:solidFill>
+                      <a:prstDash val="solid"/>
+                      <a:round/>
+                      <a:headEnd type="none" w="med" len="med"/>
+                      <a:tailEnd type="none" w="med" len="med"/>
+                    </a:lnR>
+                    <a:lnT w="6350" cap="flat" cmpd="sng" algn="ctr">
+                      <a:solidFill>
+                        <a:srgbClr val="DCE2D6"/>
+                      </a:solidFill>
+                      <a:prstDash val="solid"/>
+                      <a:round/>
+                      <a:headEnd type="none" w="med" len="med"/>
+                      <a:tailEnd type="none" w="med" len="med"/>
+                    </a:lnT>
+                    <a:lnB w="6350" cap="flat" cmpd="sng" algn="ctr">
+                      <a:solidFill>
+                        <a:srgbClr val="DCE2D6"/>
+                      </a:solidFill>
+                      <a:prstDash val="solid"/>
+                      <a:round/>
+                      <a:headEnd type="none" w="med" len="med"/>
+                      <a:tailEnd type="none" w="med" len="med"/>
+                    </a:lnB>
+                  </a:tcPr>
+                </a:tc>
+                <a:tc>
+                  <a:txBody>
+                    <a:bodyPr/>
+                    <a:lstStyle/>
+                    <a:p>
+                      <a:pPr algn="r" indent="0" marL="0">
+                        <a:buNone/>
+                      </a:pPr>
+                      <a:r>
+                        <a:rPr lang="en-US" sz="900" dirty="0">
+                          <a:solidFill>
+                            <a:srgbClr val="2B2F28"/>
+                          </a:solidFill>
+                          <a:latin typeface="Plus Jakarta Sans" pitchFamily="34" charset="0"/>
+                          <a:ea typeface="Plus Jakarta Sans" pitchFamily="34" charset="-122"/>
+                          <a:cs typeface="Plus Jakarta Sans" pitchFamily="34" charset="-120"/>
+                        </a:rPr>
+                        <a:t>0 / 2</a:t>
+                      </a:r>
+                      <a:endParaRPr lang="en-US" sz="900" dirty="0">
+                        <a:latin typeface="Plus Jakarta Sans" charset="0"/>
+                        <a:ea typeface="Plus Jakarta Sans" charset="0"/>
+                        <a:cs typeface="Plus Jakarta Sans" charset="0"/>
+                      </a:endParaRPr>
+                    </a:p>
+                  </a:txBody>
+                  <a:tcPr marL="36576" marR="36576" marT="36576" marB="36576" anchor="ctr">
+                    <a:lnL w="6350" cap="flat" cmpd="sng" algn="ctr">
+                      <a:solidFill>
+                        <a:srgbClr val="DCE2D6"/>
+                      </a:solidFill>
+                      <a:prstDash val="solid"/>
+                      <a:round/>
+                      <a:headEnd type="none" w="med" len="med"/>
+                      <a:tailEnd type="none" w="med" len="med"/>
+                    </a:lnL>
+                    <a:lnR w="6350" cap="flat" cmpd="sng" algn="ctr">
+                      <a:solidFill>
+                        <a:srgbClr val="DCE2D6"/>
+                      </a:solidFill>
+                      <a:prstDash val="solid"/>
+                      <a:round/>
+                      <a:headEnd type="none" w="med" len="med"/>
+                      <a:tailEnd type="none" w="med" len="med"/>
+                    </a:lnR>
+                    <a:lnT w="6350" cap="flat" cmpd="sng" algn="ctr">
+                      <a:solidFill>
+                        <a:srgbClr val="DCE2D6"/>
+                      </a:solidFill>
+                      <a:prstDash val="solid"/>
+                      <a:round/>
+                      <a:headEnd type="none" w="med" len="med"/>
+                      <a:tailEnd type="none" w="med" len="med"/>
+                    </a:lnT>
+                    <a:lnB w="6350" cap="flat" cmpd="sng" algn="ctr">
+                      <a:solidFill>
+                        <a:srgbClr val="DCE2D6"/>
+                      </a:solidFill>
+                      <a:prstDash val="solid"/>
+                      <a:round/>
+                      <a:headEnd type="none" w="med" len="med"/>
+                      <a:tailEnd type="none" w="med" len="med"/>
+                    </a:lnB>
+                  </a:tcPr>
+                </a:tc>
+              </a:tr>
+              <a:tr h="0">
+                <a:tc>
+                  <a:txBody>
+                    <a:bodyPr/>
+                    <a:lstStyle/>
+                    <a:p>
+                      <a:pPr algn="l" indent="0" marL="0">
+                        <a:buNone/>
+                      </a:pPr>
+                      <a:r>
+                        <a:rPr lang="en-US" sz="900" dirty="0">
+                          <a:solidFill>
+                            <a:srgbClr val="2B2F28"/>
+                          </a:solidFill>
+                          <a:latin typeface="Plus Jakarta Sans" pitchFamily="34" charset="0"/>
+                          <a:ea typeface="Plus Jakarta Sans" pitchFamily="34" charset="-122"/>
+                          <a:cs typeface="Plus Jakarta Sans" pitchFamily="34" charset="-120"/>
+                        </a:rPr>
+                        <a:t>Wahab</a:t>
+                      </a:r>
+                      <a:endParaRPr lang="en-US" sz="900" dirty="0">
+                        <a:latin typeface="Plus Jakarta Sans" charset="0"/>
+                        <a:ea typeface="Plus Jakarta Sans" charset="0"/>
+                        <a:cs typeface="Plus Jakarta Sans" charset="0"/>
+                      </a:endParaRPr>
+                    </a:p>
+                  </a:txBody>
+                  <a:tcPr marL="36576" marR="36576" marT="36576" marB="36576" anchor="ctr">
+                    <a:lnL w="6350" cap="flat" cmpd="sng" algn="ctr">
+                      <a:solidFill>
+                        <a:srgbClr val="DCE2D6"/>
+                      </a:solidFill>
+                      <a:prstDash val="solid"/>
+                      <a:round/>
+                      <a:headEnd type="none" w="med" len="med"/>
+                      <a:tailEnd type="none" w="med" len="med"/>
+                    </a:lnL>
+                    <a:lnR w="6350" cap="flat" cmpd="sng" algn="ctr">
+                      <a:solidFill>
+                        <a:srgbClr val="DCE2D6"/>
+                      </a:solidFill>
+                      <a:prstDash val="solid"/>
+                      <a:round/>
+                      <a:headEnd type="none" w="med" len="med"/>
+                      <a:tailEnd type="none" w="med" len="med"/>
+                    </a:lnR>
+                    <a:lnT w="6350" cap="flat" cmpd="sng" algn="ctr">
+                      <a:solidFill>
+                        <a:srgbClr val="DCE2D6"/>
+                      </a:solidFill>
+                      <a:prstDash val="solid"/>
+                      <a:round/>
+                      <a:headEnd type="none" w="med" len="med"/>
+                      <a:tailEnd type="none" w="med" len="med"/>
+                    </a:lnT>
+                    <a:lnB w="6350" cap="flat" cmpd="sng" algn="ctr">
+                      <a:solidFill>
+                        <a:srgbClr val="DCE2D6"/>
+                      </a:solidFill>
+                      <a:prstDash val="solid"/>
+                      <a:round/>
+                      <a:headEnd type="none" w="med" len="med"/>
+                      <a:tailEnd type="none" w="med" len="med"/>
+                    </a:lnB>
+                  </a:tcPr>
+                </a:tc>
+                <a:tc>
+                  <a:txBody>
+                    <a:bodyPr/>
+                    <a:lstStyle/>
+                    <a:p>
+                      <a:pPr algn="l" indent="0" marL="0">
+                        <a:buNone/>
+                      </a:pPr>
+                      <a:r>
+                        <a:rPr lang="en-US" sz="900" dirty="0">
+                          <a:solidFill>
+                            <a:srgbClr val="2B2F28"/>
+                          </a:solidFill>
+                          <a:latin typeface="Plus Jakarta Sans" pitchFamily="34" charset="0"/>
+                          <a:ea typeface="Plus Jakarta Sans" pitchFamily="34" charset="-122"/>
+                          <a:cs typeface="Plus Jakarta Sans" pitchFamily="34" charset="-120"/>
+                        </a:rPr>
+                        <a:t>Internal team</a:t>
+                      </a:r>
+                      <a:endParaRPr lang="en-US" sz="900" dirty="0">
+                        <a:latin typeface="Plus Jakarta Sans" charset="0"/>
+                        <a:ea typeface="Plus Jakarta Sans" charset="0"/>
+                        <a:cs typeface="Plus Jakarta Sans" charset="0"/>
+                      </a:endParaRPr>
+                    </a:p>
+                  </a:txBody>
+                  <a:tcPr marL="36576" marR="36576" marT="36576" marB="36576" anchor="ctr">
+                    <a:lnL w="6350" cap="flat" cmpd="sng" algn="ctr">
+                      <a:solidFill>
+                        <a:srgbClr val="DCE2D6"/>
+                      </a:solidFill>
+                      <a:prstDash val="solid"/>
+                      <a:round/>
+                      <a:headEnd type="none" w="med" len="med"/>
+                      <a:tailEnd type="none" w="med" len="med"/>
+                    </a:lnL>
+                    <a:lnR w="6350" cap="flat" cmpd="sng" algn="ctr">
+                      <a:solidFill>
+                        <a:srgbClr val="DCE2D6"/>
+                      </a:solidFill>
+                      <a:prstDash val="solid"/>
+                      <a:round/>
+                      <a:headEnd type="none" w="med" len="med"/>
+                      <a:tailEnd type="none" w="med" len="med"/>
+                    </a:lnR>
+                    <a:lnT w="6350" cap="flat" cmpd="sng" algn="ctr">
+                      <a:solidFill>
+                        <a:srgbClr val="DCE2D6"/>
+                      </a:solidFill>
+                      <a:prstDash val="solid"/>
+                      <a:round/>
+                      <a:headEnd type="none" w="med" len="med"/>
+                      <a:tailEnd type="none" w="med" len="med"/>
+                    </a:lnT>
+                    <a:lnB w="6350" cap="flat" cmpd="sng" algn="ctr">
+                      <a:solidFill>
+                        <a:srgbClr val="DCE2D6"/>
+                      </a:solidFill>
+                      <a:prstDash val="solid"/>
+                      <a:round/>
+                      <a:headEnd type="none" w="med" len="med"/>
+                      <a:tailEnd type="none" w="med" len="med"/>
+                    </a:lnB>
+                  </a:tcPr>
+                </a:tc>
+                <a:tc>
+                  <a:txBody>
+                    <a:bodyPr/>
+                    <a:lstStyle/>
+                    <a:p>
+                      <a:pPr algn="r" indent="0" marL="0">
+                        <a:buNone/>
+                      </a:pPr>
+                      <a:r>
+                        <a:rPr lang="en-US" sz="900" dirty="0">
+                          <a:solidFill>
+                            <a:srgbClr val="2B2F28"/>
+                          </a:solidFill>
+                          <a:latin typeface="Plus Jakarta Sans" pitchFamily="34" charset="0"/>
+                          <a:ea typeface="Plus Jakarta Sans" pitchFamily="34" charset="-122"/>
+                          <a:cs typeface="Plus Jakarta Sans" pitchFamily="34" charset="-120"/>
+                        </a:rPr>
+                        <a:t>1</a:t>
+                      </a:r>
+                      <a:endParaRPr lang="en-US" sz="900" dirty="0">
+                        <a:latin typeface="Plus Jakarta Sans" charset="0"/>
+                        <a:ea typeface="Plus Jakarta Sans" charset="0"/>
+                        <a:cs typeface="Plus Jakarta Sans" charset="0"/>
+                      </a:endParaRPr>
+                    </a:p>
+                  </a:txBody>
+                  <a:tcPr marL="36576" marR="36576" marT="36576" marB="36576" anchor="ctr">
+                    <a:lnL w="6350" cap="flat" cmpd="sng" algn="ctr">
+                      <a:solidFill>
+                        <a:srgbClr val="DCE2D6"/>
+                      </a:solidFill>
+                      <a:prstDash val="solid"/>
+                      <a:round/>
+                      <a:headEnd type="none" w="med" len="med"/>
+                      <a:tailEnd type="none" w="med" len="med"/>
+                    </a:lnL>
+                    <a:lnR w="6350" cap="flat" cmpd="sng" algn="ctr">
+                      <a:solidFill>
+                        <a:srgbClr val="DCE2D6"/>
+                      </a:solidFill>
+                      <a:prstDash val="solid"/>
+                      <a:round/>
+                      <a:headEnd type="none" w="med" len="med"/>
+                      <a:tailEnd type="none" w="med" len="med"/>
+                    </a:lnR>
+                    <a:lnT w="6350" cap="flat" cmpd="sng" algn="ctr">
+                      <a:solidFill>
+                        <a:srgbClr val="DCE2D6"/>
+                      </a:solidFill>
+                      <a:prstDash val="solid"/>
+                      <a:round/>
+                      <a:headEnd type="none" w="med" len="med"/>
+                      <a:tailEnd type="none" w="med" len="med"/>
+                    </a:lnT>
+                    <a:lnB w="6350" cap="flat" cmpd="sng" algn="ctr">
+                      <a:solidFill>
+                        <a:srgbClr val="DCE2D6"/>
+                      </a:solidFill>
+                      <a:prstDash val="solid"/>
+                      <a:round/>
+                      <a:headEnd type="none" w="med" len="med"/>
+                      <a:tailEnd type="none" w="med" len="med"/>
+                    </a:lnB>
+                  </a:tcPr>
+                </a:tc>
+                <a:tc>
+                  <a:txBody>
+                    <a:bodyPr/>
+                    <a:lstStyle/>
+                    <a:p>
+                      <a:pPr algn="r" indent="0" marL="0">
+                        <a:buNone/>
+                      </a:pPr>
+                      <a:r>
+                        <a:rPr lang="en-US" sz="900" dirty="0">
+                          <a:solidFill>
+                            <a:srgbClr val="2B2F28"/>
+                          </a:solidFill>
+                          <a:latin typeface="Plus Jakarta Sans" pitchFamily="34" charset="0"/>
+                          <a:ea typeface="Plus Jakarta Sans" pitchFamily="34" charset="-122"/>
+                          <a:cs typeface="Plus Jakarta Sans" pitchFamily="34" charset="-120"/>
+                        </a:rPr>
+                        <a:t>–</a:t>
+                      </a:r>
+                      <a:endParaRPr lang="en-US" sz="900" dirty="0">
+                        <a:latin typeface="Plus Jakarta Sans" charset="0"/>
+                        <a:ea typeface="Plus Jakarta Sans" charset="0"/>
+                        <a:cs typeface="Plus Jakarta Sans" charset="0"/>
+                      </a:endParaRPr>
+                    </a:p>
+                  </a:txBody>
+                  <a:tcPr marL="36576" marR="36576" marT="36576" marB="36576" anchor="ctr">
+                    <a:lnL w="6350" cap="flat" cmpd="sng" algn="ctr">
+                      <a:solidFill>
+                        <a:srgbClr val="DCE2D6"/>
+                      </a:solidFill>
+                      <a:prstDash val="solid"/>
+                      <a:round/>
+                      <a:headEnd type="none" w="med" len="med"/>
+                      <a:tailEnd type="none" w="med" len="med"/>
+                    </a:lnL>
+                    <a:lnR w="6350" cap="flat" cmpd="sng" algn="ctr">
+                      <a:solidFill>
+                        <a:srgbClr val="DCE2D6"/>
+                      </a:solidFill>
+                      <a:prstDash val="solid"/>
+                      <a:round/>
+                      <a:headEnd type="none" w="med" len="med"/>
+                      <a:tailEnd type="none" w="med" len="med"/>
+                    </a:lnR>
+                    <a:lnT w="6350" cap="flat" cmpd="sng" algn="ctr">
+                      <a:solidFill>
+                        <a:srgbClr val="DCE2D6"/>
+                      </a:solidFill>
+                      <a:prstDash val="solid"/>
+                      <a:round/>
+                      <a:headEnd type="none" w="med" len="med"/>
+                      <a:tailEnd type="none" w="med" len="med"/>
+                    </a:lnT>
+                    <a:lnB w="6350" cap="flat" cmpd="sng" algn="ctr">
+                      <a:solidFill>
+                        <a:srgbClr val="DCE2D6"/>
+                      </a:solidFill>
+                      <a:prstDash val="solid"/>
+                      <a:round/>
+                      <a:headEnd type="none" w="med" len="med"/>
+                      <a:tailEnd type="none" w="med" len="med"/>
+                    </a:lnB>
+                  </a:tcPr>
+                </a:tc>
+                <a:tc>
+                  <a:txBody>
+                    <a:bodyPr/>
+                    <a:lstStyle/>
+                    <a:p>
+                      <a:pPr algn="r" indent="0" marL="0">
+                        <a:buNone/>
+                      </a:pPr>
+                      <a:r>
+                        <a:rPr lang="en-US" sz="900" dirty="0">
+                          <a:solidFill>
+                            <a:srgbClr val="2B2F28"/>
+                          </a:solidFill>
+                          <a:latin typeface="Plus Jakarta Sans" pitchFamily="34" charset="0"/>
+                          <a:ea typeface="Plus Jakarta Sans" pitchFamily="34" charset="-122"/>
+                          <a:cs typeface="Plus Jakarta Sans" pitchFamily="34" charset="-120"/>
+                        </a:rPr>
+                        <a:t>2</a:t>
+                      </a:r>
+                      <a:endParaRPr lang="en-US" sz="900" dirty="0">
+                        <a:latin typeface="Plus Jakarta Sans" charset="0"/>
+                        <a:ea typeface="Plus Jakarta Sans" charset="0"/>
+                        <a:cs typeface="Plus Jakarta Sans" charset="0"/>
+                      </a:endParaRPr>
+                    </a:p>
+                  </a:txBody>
+                  <a:tcPr marL="36576" marR="36576" marT="36576" marB="36576" anchor="ctr">
+                    <a:lnL w="6350" cap="flat" cmpd="sng" algn="ctr">
+                      <a:solidFill>
+                        <a:srgbClr val="DCE2D6"/>
+                      </a:solidFill>
+                      <a:prstDash val="solid"/>
+                      <a:round/>
+                      <a:headEnd type="none" w="med" len="med"/>
+                      <a:tailEnd type="none" w="med" len="med"/>
+                    </a:lnL>
+                    <a:lnR w="6350" cap="flat" cmpd="sng" algn="ctr">
+                      <a:solidFill>
+                        <a:srgbClr val="DCE2D6"/>
+                      </a:solidFill>
+                      <a:prstDash val="solid"/>
+                      <a:round/>
+                      <a:headEnd type="none" w="med" len="med"/>
+                      <a:tailEnd type="none" w="med" len="med"/>
+                    </a:lnR>
+                    <a:lnT w="6350" cap="flat" cmpd="sng" algn="ctr">
+                      <a:solidFill>
+                        <a:srgbClr val="DCE2D6"/>
+                      </a:solidFill>
+                      <a:prstDash val="solid"/>
+                      <a:round/>
+                      <a:headEnd type="none" w="med" len="med"/>
+                      <a:tailEnd type="none" w="med" len="med"/>
+                    </a:lnT>
+                    <a:lnB w="6350" cap="flat" cmpd="sng" algn="ctr">
+                      <a:solidFill>
+                        <a:srgbClr val="DCE2D6"/>
+                      </a:solidFill>
+                      <a:prstDash val="solid"/>
+                      <a:round/>
+                      <a:headEnd type="none" w="med" len="med"/>
+                      <a:tailEnd type="none" w="med" len="med"/>
+                    </a:lnB>
+                  </a:tcPr>
+                </a:tc>
+                <a:tc>
+                  <a:txBody>
+                    <a:bodyPr/>
+                    <a:lstStyle/>
+                    <a:p>
+                      <a:pPr algn="r" indent="0" marL="0">
+                        <a:buNone/>
+                      </a:pPr>
+                      <a:r>
+                        <a:rPr lang="en-US" sz="900" dirty="0">
+                          <a:solidFill>
+                            <a:srgbClr val="2B2F28"/>
+                          </a:solidFill>
+                          <a:latin typeface="Plus Jakarta Sans" pitchFamily="34" charset="0"/>
+                          <a:ea typeface="Plus Jakarta Sans" pitchFamily="34" charset="-122"/>
+                          <a:cs typeface="Plus Jakarta Sans" pitchFamily="34" charset="-120"/>
+                        </a:rPr>
+                        <a:t>0 / 2</a:t>
+                      </a:r>
+                      <a:endParaRPr lang="en-US" sz="900" dirty="0">
+                        <a:latin typeface="Plus Jakarta Sans" charset="0"/>
+                        <a:ea typeface="Plus Jakarta Sans" charset="0"/>
+                        <a:cs typeface="Plus Jakarta Sans" charset="0"/>
+                      </a:endParaRPr>
+                    </a:p>
+                  </a:txBody>
+                  <a:tcPr marL="36576" marR="36576" marT="36576" marB="36576" anchor="ctr">
+                    <a:lnL w="6350" cap="flat" cmpd="sng" algn="ctr">
+                      <a:solidFill>
+                        <a:srgbClr val="DCE2D6"/>
+                      </a:solidFill>
+                      <a:prstDash val="solid"/>
+                      <a:round/>
+                      <a:headEnd type="none" w="med" len="med"/>
+                      <a:tailEnd type="none" w="med" len="med"/>
+                    </a:lnL>
+                    <a:lnR w="6350" cap="flat" cmpd="sng" algn="ctr">
+                      <a:solidFill>
+                        <a:srgbClr val="DCE2D6"/>
+                      </a:solidFill>
+                      <a:prstDash val="solid"/>
+                      <a:round/>
+                      <a:headEnd type="none" w="med" len="med"/>
+                      <a:tailEnd type="none" w="med" len="med"/>
+                    </a:lnR>
+                    <a:lnT w="6350" cap="flat" cmpd="sng" algn="ctr">
+                      <a:solidFill>
+                        <a:srgbClr val="DCE2D6"/>
+                      </a:solidFill>
+                      <a:prstDash val="solid"/>
+                      <a:round/>
+                      <a:headEnd type="none" w="med" len="med"/>
+                      <a:tailEnd type="none" w="med" len="med"/>
+                    </a:lnT>
+                    <a:lnB w="6350" cap="flat" cmpd="sng" algn="ctr">
+                      <a:solidFill>
+                        <a:srgbClr val="DCE2D6"/>
+                      </a:solidFill>
+                      <a:prstDash val="solid"/>
+                      <a:round/>
+                      <a:headEnd type="none" w="med" len="med"/>
+                      <a:tailEnd type="none" w="med" len="med"/>
+                    </a:lnB>
+                  </a:tcPr>
+                </a:tc>
+              </a:tr>
+              <a:tr h="0">
+                <a:tc>
+                  <a:txBody>
+                    <a:bodyPr/>
+                    <a:lstStyle/>
+                    <a:p>
+                      <a:pPr algn="l" indent="0" marL="0">
+                        <a:buNone/>
+                      </a:pPr>
+                      <a:r>
+                        <a:rPr lang="en-US" sz="900" dirty="0">
+                          <a:solidFill>
+                            <a:srgbClr val="2B2F28"/>
+                          </a:solidFill>
+                          <a:latin typeface="Plus Jakarta Sans" pitchFamily="34" charset="0"/>
+                          <a:ea typeface="Plus Jakarta Sans" pitchFamily="34" charset="-122"/>
+                          <a:cs typeface="Plus Jakarta Sans" pitchFamily="34" charset="-120"/>
+                        </a:rPr>
+                        <a:t>Meri</a:t>
+                      </a:r>
+                      <a:endParaRPr lang="en-US" sz="900" dirty="0">
+                        <a:latin typeface="Plus Jakarta Sans" charset="0"/>
+                        <a:ea typeface="Plus Jakarta Sans" charset="0"/>
+                        <a:cs typeface="Plus Jakarta Sans" charset="0"/>
+                      </a:endParaRPr>
+                    </a:p>
+                  </a:txBody>
+                  <a:tcPr marL="36576" marR="36576" marT="36576" marB="36576" anchor="ctr">
+                    <a:lnL w="6350" cap="flat" cmpd="sng" algn="ctr">
+                      <a:solidFill>
+                        <a:srgbClr val="DCE2D6"/>
+                      </a:solidFill>
+                      <a:prstDash val="solid"/>
+                      <a:round/>
+                      <a:headEnd type="none" w="med" len="med"/>
+                      <a:tailEnd type="none" w="med" len="med"/>
+                    </a:lnL>
+                    <a:lnR w="6350" cap="flat" cmpd="sng" algn="ctr">
+                      <a:solidFill>
+                        <a:srgbClr val="DCE2D6"/>
+                      </a:solidFill>
+                      <a:prstDash val="solid"/>
+                      <a:round/>
+                      <a:headEnd type="none" w="med" len="med"/>
+                      <a:tailEnd type="none" w="med" len="med"/>
+                    </a:lnR>
+                    <a:lnT w="6350" cap="flat" cmpd="sng" algn="ctr">
+                      <a:solidFill>
+                        <a:srgbClr val="DCE2D6"/>
+                      </a:solidFill>
+                      <a:prstDash val="solid"/>
+                      <a:round/>
+                      <a:headEnd type="none" w="med" len="med"/>
+                      <a:tailEnd type="none" w="med" len="med"/>
+                    </a:lnT>
+                    <a:lnB w="6350" cap="flat" cmpd="sng" algn="ctr">
+                      <a:solidFill>
+                        <a:srgbClr val="DCE2D6"/>
+                      </a:solidFill>
+                      <a:prstDash val="solid"/>
+                      <a:round/>
+                      <a:headEnd type="none" w="med" len="med"/>
+                      <a:tailEnd type="none" w="med" len="med"/>
+                    </a:lnB>
+                  </a:tcPr>
+                </a:tc>
+                <a:tc>
+                  <a:txBody>
+                    <a:bodyPr/>
+                    <a:lstStyle/>
+                    <a:p>
+                      <a:pPr algn="l" indent="0" marL="0">
+                        <a:buNone/>
+                      </a:pPr>
+                      <a:r>
+                        <a:rPr lang="en-US" sz="900" dirty="0">
+                          <a:solidFill>
+                            <a:srgbClr val="2B2F28"/>
+                          </a:solidFill>
+                          <a:latin typeface="Plus Jakarta Sans" pitchFamily="34" charset="0"/>
+                          <a:ea typeface="Plus Jakarta Sans" pitchFamily="34" charset="-122"/>
+                          <a:cs typeface="Plus Jakarta Sans" pitchFamily="34" charset="-120"/>
+                        </a:rPr>
+                        <a:t>External</a:t>
+                      </a:r>
+                      <a:endParaRPr lang="en-US" sz="900" dirty="0">
+                        <a:latin typeface="Plus Jakarta Sans" charset="0"/>
+                        <a:ea typeface="Plus Jakarta Sans" charset="0"/>
+                        <a:cs typeface="Plus Jakarta Sans" charset="0"/>
+                      </a:endParaRPr>
+                    </a:p>
+                  </a:txBody>
+                  <a:tcPr marL="36576" marR="36576" marT="36576" marB="36576" anchor="ctr">
+                    <a:lnL w="6350" cap="flat" cmpd="sng" algn="ctr">
+                      <a:solidFill>
+                        <a:srgbClr val="DCE2D6"/>
+                      </a:solidFill>
+                      <a:prstDash val="solid"/>
+                      <a:round/>
+                      <a:headEnd type="none" w="med" len="med"/>
+                      <a:tailEnd type="none" w="med" len="med"/>
+                    </a:lnL>
+                    <a:lnR w="6350" cap="flat" cmpd="sng" algn="ctr">
+                      <a:solidFill>
+                        <a:srgbClr val="DCE2D6"/>
+                      </a:solidFill>
+                      <a:prstDash val="solid"/>
+                      <a:round/>
+                      <a:headEnd type="none" w="med" len="med"/>
+                      <a:tailEnd type="none" w="med" len="med"/>
+                    </a:lnR>
+                    <a:lnT w="6350" cap="flat" cmpd="sng" algn="ctr">
+                      <a:solidFill>
+                        <a:srgbClr val="DCE2D6"/>
+                      </a:solidFill>
+                      <a:prstDash val="solid"/>
+                      <a:round/>
+                      <a:headEnd type="none" w="med" len="med"/>
+                      <a:tailEnd type="none" w="med" len="med"/>
+                    </a:lnT>
+                    <a:lnB w="6350" cap="flat" cmpd="sng" algn="ctr">
+                      <a:solidFill>
+                        <a:srgbClr val="DCE2D6"/>
+                      </a:solidFill>
+                      <a:prstDash val="solid"/>
+                      <a:round/>
+                      <a:headEnd type="none" w="med" len="med"/>
+                      <a:tailEnd type="none" w="med" len="med"/>
+                    </a:lnB>
+                  </a:tcPr>
+                </a:tc>
+                <a:tc>
+                  <a:txBody>
+                    <a:bodyPr/>
+                    <a:lstStyle/>
+                    <a:p>
+                      <a:pPr algn="r" indent="0" marL="0">
+                        <a:buNone/>
+                      </a:pPr>
+                      <a:r>
+                        <a:rPr lang="en-US" sz="900" dirty="0">
+                          <a:solidFill>
+                            <a:srgbClr val="2B2F28"/>
+                          </a:solidFill>
+                          <a:latin typeface="Plus Jakarta Sans" pitchFamily="34" charset="0"/>
+                          <a:ea typeface="Plus Jakarta Sans" pitchFamily="34" charset="-122"/>
+                          <a:cs typeface="Plus Jakarta Sans" pitchFamily="34" charset="-120"/>
+                        </a:rPr>
+                        <a:t>–</a:t>
+                      </a:r>
+                      <a:endParaRPr lang="en-US" sz="900" dirty="0">
+                        <a:latin typeface="Plus Jakarta Sans" charset="0"/>
+                        <a:ea typeface="Plus Jakarta Sans" charset="0"/>
+                        <a:cs typeface="Plus Jakarta Sans" charset="0"/>
+                      </a:endParaRPr>
+                    </a:p>
+                  </a:txBody>
+                  <a:tcPr marL="36576" marR="36576" marT="36576" marB="36576" anchor="ctr">
+                    <a:lnL w="6350" cap="flat" cmpd="sng" algn="ctr">
+                      <a:solidFill>
+                        <a:srgbClr val="DCE2D6"/>
+                      </a:solidFill>
+                      <a:prstDash val="solid"/>
+                      <a:round/>
+                      <a:headEnd type="none" w="med" len="med"/>
+                      <a:tailEnd type="none" w="med" len="med"/>
+                    </a:lnL>
+                    <a:lnR w="6350" cap="flat" cmpd="sng" algn="ctr">
+                      <a:solidFill>
+                        <a:srgbClr val="DCE2D6"/>
+                      </a:solidFill>
+                      <a:prstDash val="solid"/>
+                      <a:round/>
+                      <a:headEnd type="none" w="med" len="med"/>
+                      <a:tailEnd type="none" w="med" len="med"/>
+                    </a:lnR>
+                    <a:lnT w="6350" cap="flat" cmpd="sng" algn="ctr">
+                      <a:solidFill>
+                        <a:srgbClr val="DCE2D6"/>
+                      </a:solidFill>
+                      <a:prstDash val="solid"/>
+                      <a:round/>
+                      <a:headEnd type="none" w="med" len="med"/>
+                      <a:tailEnd type="none" w="med" len="med"/>
+                    </a:lnT>
+                    <a:lnB w="6350" cap="flat" cmpd="sng" algn="ctr">
+                      <a:solidFill>
+                        <a:srgbClr val="DCE2D6"/>
+                      </a:solidFill>
+                      <a:prstDash val="solid"/>
+                      <a:round/>
+                      <a:headEnd type="none" w="med" len="med"/>
+                      <a:tailEnd type="none" w="med" len="med"/>
+                    </a:lnB>
+                  </a:tcPr>
+                </a:tc>
+                <a:tc>
+                  <a:txBody>
+                    <a:bodyPr/>
+                    <a:lstStyle/>
+                    <a:p>
+                      <a:pPr algn="r" indent="0" marL="0">
+                        <a:buNone/>
+                      </a:pPr>
+                      <a:r>
+                        <a:rPr lang="en-US" sz="900" dirty="0">
+                          <a:solidFill>
+                            <a:srgbClr val="2B2F28"/>
+                          </a:solidFill>
+                          <a:latin typeface="Plus Jakarta Sans" pitchFamily="34" charset="0"/>
+                          <a:ea typeface="Plus Jakarta Sans" pitchFamily="34" charset="-122"/>
+                          <a:cs typeface="Plus Jakarta Sans" pitchFamily="34" charset="-120"/>
+                        </a:rPr>
+                        <a:t>–</a:t>
+                      </a:r>
+                      <a:endParaRPr lang="en-US" sz="900" dirty="0">
+                        <a:latin typeface="Plus Jakarta Sans" charset="0"/>
+                        <a:ea typeface="Plus Jakarta Sans" charset="0"/>
+                        <a:cs typeface="Plus Jakarta Sans" charset="0"/>
+                      </a:endParaRPr>
+                    </a:p>
+                  </a:txBody>
+                  <a:tcPr marL="36576" marR="36576" marT="36576" marB="36576" anchor="ctr">
+                    <a:lnL w="6350" cap="flat" cmpd="sng" algn="ctr">
+                      <a:solidFill>
+                        <a:srgbClr val="DCE2D6"/>
+                      </a:solidFill>
+                      <a:prstDash val="solid"/>
+                      <a:round/>
+                      <a:headEnd type="none" w="med" len="med"/>
+                      <a:tailEnd type="none" w="med" len="med"/>
+                    </a:lnL>
+                    <a:lnR w="6350" cap="flat" cmpd="sng" algn="ctr">
+                      <a:solidFill>
+                        <a:srgbClr val="DCE2D6"/>
+                      </a:solidFill>
+                      <a:prstDash val="solid"/>
+                      <a:round/>
+                      <a:headEnd type="none" w="med" len="med"/>
+                      <a:tailEnd type="none" w="med" len="med"/>
+                    </a:lnR>
+                    <a:lnT w="6350" cap="flat" cmpd="sng" algn="ctr">
+                      <a:solidFill>
+                        <a:srgbClr val="DCE2D6"/>
+                      </a:solidFill>
+                      <a:prstDash val="solid"/>
+                      <a:round/>
+                      <a:headEnd type="none" w="med" len="med"/>
+                      <a:tailEnd type="none" w="med" len="med"/>
+                    </a:lnT>
+                    <a:lnB w="6350" cap="flat" cmpd="sng" algn="ctr">
+                      <a:solidFill>
+                        <a:srgbClr val="DCE2D6"/>
+                      </a:solidFill>
+                      <a:prstDash val="solid"/>
+                      <a:round/>
+                      <a:headEnd type="none" w="med" len="med"/>
+                      <a:tailEnd type="none" w="med" len="med"/>
+                    </a:lnB>
+                  </a:tcPr>
+                </a:tc>
+                <a:tc>
+                  <a:txBody>
+                    <a:bodyPr/>
+                    <a:lstStyle/>
+                    <a:p>
+                      <a:pPr algn="r" indent="0" marL="0">
+                        <a:buNone/>
+                      </a:pPr>
+                      <a:r>
+                        <a:rPr lang="en-US" sz="900" dirty="0">
+                          <a:solidFill>
+                            <a:srgbClr val="2B2F28"/>
+                          </a:solidFill>
+                          <a:latin typeface="Plus Jakarta Sans" pitchFamily="34" charset="0"/>
+                          <a:ea typeface="Plus Jakarta Sans" pitchFamily="34" charset="-122"/>
+                          <a:cs typeface="Plus Jakarta Sans" pitchFamily="34" charset="-120"/>
+                        </a:rPr>
+                        <a:t>1</a:t>
+                      </a:r>
+                      <a:endParaRPr lang="en-US" sz="900" dirty="0">
+                        <a:latin typeface="Plus Jakarta Sans" charset="0"/>
+                        <a:ea typeface="Plus Jakarta Sans" charset="0"/>
+                        <a:cs typeface="Plus Jakarta Sans" charset="0"/>
+                      </a:endParaRPr>
+                    </a:p>
+                  </a:txBody>
+                  <a:tcPr marL="36576" marR="36576" marT="36576" marB="36576" anchor="ctr">
+                    <a:lnL w="6350" cap="flat" cmpd="sng" algn="ctr">
+                      <a:solidFill>
+                        <a:srgbClr val="DCE2D6"/>
+                      </a:solidFill>
+                      <a:prstDash val="solid"/>
+                      <a:round/>
+                      <a:headEnd type="none" w="med" len="med"/>
+                      <a:tailEnd type="none" w="med" len="med"/>
+                    </a:lnL>
+                    <a:lnR w="6350" cap="flat" cmpd="sng" algn="ctr">
+                      <a:solidFill>
+                        <a:srgbClr val="DCE2D6"/>
+                      </a:solidFill>
+                      <a:prstDash val="solid"/>
+                      <a:round/>
+                      <a:headEnd type="none" w="med" len="med"/>
+                      <a:tailEnd type="none" w="med" len="med"/>
+                    </a:lnR>
+                    <a:lnT w="6350" cap="flat" cmpd="sng" algn="ctr">
+                      <a:solidFill>
+                        <a:srgbClr val="DCE2D6"/>
+                      </a:solidFill>
+                      <a:prstDash val="solid"/>
+                      <a:round/>
+                      <a:headEnd type="none" w="med" len="med"/>
+                      <a:tailEnd type="none" w="med" len="med"/>
+                    </a:lnT>
+                    <a:lnB w="6350" cap="flat" cmpd="sng" algn="ctr">
+                      <a:solidFill>
+                        <a:srgbClr val="DCE2D6"/>
+                      </a:solidFill>
+                      <a:prstDash val="solid"/>
+                      <a:round/>
+                      <a:headEnd type="none" w="med" len="med"/>
+                      <a:tailEnd type="none" w="med" len="med"/>
+                    </a:lnB>
+                  </a:tcPr>
+                </a:tc>
+                <a:tc>
+                  <a:txBody>
+                    <a:bodyPr/>
+                    <a:lstStyle/>
+                    <a:p>
+                      <a:pPr algn="r" indent="0" marL="0">
+                        <a:buNone/>
+                      </a:pPr>
+                      <a:r>
+                        <a:rPr lang="en-US" sz="900" dirty="0">
+                          <a:solidFill>
+                            <a:srgbClr val="2B2F28"/>
+                          </a:solidFill>
+                          <a:latin typeface="Plus Jakarta Sans" pitchFamily="34" charset="0"/>
+                          <a:ea typeface="Plus Jakarta Sans" pitchFamily="34" charset="-122"/>
+                          <a:cs typeface="Plus Jakarta Sans" pitchFamily="34" charset="-120"/>
+                        </a:rPr>
+                        <a:t>1 / 0</a:t>
+                      </a:r>
+                      <a:endParaRPr lang="en-US" sz="900" dirty="0">
+                        <a:latin typeface="Plus Jakarta Sans" charset="0"/>
+                        <a:ea typeface="Plus Jakarta Sans" charset="0"/>
+                        <a:cs typeface="Plus Jakarta Sans" charset="0"/>
+                      </a:endParaRPr>
+                    </a:p>
+                  </a:txBody>
+                  <a:tcPr marL="36576" marR="36576" marT="36576" marB="36576" anchor="ctr">
+                    <a:lnL w="6350" cap="flat" cmpd="sng" algn="ctr">
+                      <a:solidFill>
+                        <a:srgbClr val="DCE2D6"/>
+                      </a:solidFill>
+                      <a:prstDash val="solid"/>
+                      <a:round/>
+                      <a:headEnd type="none" w="med" len="med"/>
+                      <a:tailEnd type="none" w="med" len="med"/>
+                    </a:lnL>
+                    <a:lnR w="6350" cap="flat" cmpd="sng" algn="ctr">
+                      <a:solidFill>
+                        <a:srgbClr val="DCE2D6"/>
+                      </a:solidFill>
+                      <a:prstDash val="solid"/>
+                      <a:round/>
+                      <a:headEnd type="none" w="med" len="med"/>
+                      <a:tailEnd type="none" w="med" len="med"/>
+                    </a:lnR>
+                    <a:lnT w="6350" cap="flat" cmpd="sng" algn="ctr">
+                      <a:solidFill>
+                        <a:srgbClr val="DCE2D6"/>
+                      </a:solidFill>
+                      <a:prstDash val="solid"/>
+                      <a:round/>
+                      <a:headEnd type="none" w="med" len="med"/>
+                      <a:tailEnd type="none" w="med" len="med"/>
+                    </a:lnT>
+                    <a:lnB w="6350" cap="flat" cmpd="sng" algn="ctr">
+                      <a:solidFill>
+                        <a:srgbClr val="DCE2D6"/>
+                      </a:solidFill>
+                      <a:prstDash val="solid"/>
+                      <a:round/>
+                      <a:headEnd type="none" w="med" len="med"/>
+                      <a:tailEnd type="none" w="med" len="med"/>
+                    </a:lnB>
+                  </a:tcPr>
+                </a:tc>
+              </a:tr>
+            </a:tbl>
+          </a:graphicData>
+        </a:graphic>
+      </p:graphicFrame>
+      <p:sp>
+        <p:nvSpPr>
+          <p:cNvPr id="19" name="Shape 12"/>
           <p:cNvSpPr/>
           <p:nvPr/>
         </p:nvSpPr>
@@ -7372,7 +9348,7 @@
       </p:sp>
       <p:sp>
         <p:nvSpPr>
-          <p:cNvPr id="63" name="Text 57"/>
+          <p:cNvPr id="20" name="Text 13"/>
           <p:cNvSpPr txBox="1"/>
           <p:nvPr/>
         </p:nvSpPr>
@@ -7408,7 +9384,7 @@
                 <a:ea typeface="Plus Jakarta Sans" pitchFamily="34" charset="-122"/>
                 <a:cs typeface="Plus Jakarta Sans" pitchFamily="34" charset="-120"/>
               </a:rPr>
-              <a:t>Under Duta is a test channel today: 4 of the 4 under-Duta farmers last week and 8 of 8 the week before sit under Duta accounts flagged as test (is_test_duta = 1 or “Test” in the name); their status was Sale 1 / Leads 3 (week before 6 / 2). Across 7 weeks only 1 farmer came through a real Duta.</a:t>
+              <a:t>Dutas: 4 farmers last week came through 3 Dutas (Rudi 2, Satria K 1, Sazali Wandana 1), all from internal-team Dutas. 7 of the 8 Dutas with farmers in 7 weeks are internal team; external Dutas brought 1.</a:t>
             </a:r>
             <a:endParaRPr lang="en-US" sz="1000" dirty="0"/>
           </a:p>
@@ -21262,7 +23238,7 @@
                 <a:ea typeface="Plus Jakarta Sans" pitchFamily="34" charset="-122"/>
                 <a:cs typeface="Plus Jakarta Sans" pitchFamily="34" charset="-120"/>
               </a:rPr>
-              <a:t>[DRAFT] Take test Duta accounts out of the acquisition count</a:t>
+              <a:t>[DRAFT] Find out why Organic fell −95</a:t>
             </a:r>
             <a:endParaRPr lang="en-US" sz="1200" dirty="0"/>
           </a:p>
@@ -21303,7 +23279,7 @@
                 <a:ea typeface="Plus Jakarta Sans" pitchFamily="34" charset="-122"/>
                 <a:cs typeface="Plus Jakarta Sans" pitchFamily="34" charset="-120"/>
               </a:rPr>
-              <a:t>21 farmers in 7 weeks sit under test Duta accounts. Exclude is_test_duta = 1 from the report, or move these farmers to their real channel, so Under Duta shows real Dutas only.</a:t>
+              <a:t>Organic went 313 → 218, mostly “organic” (111 → 47). Check what drove the 28 Sep peak (a broadcast, a post, an app release) and repeat it.</a:t>
             </a:r>
             <a:endParaRPr lang="en-US" sz="950" dirty="0"/>
           </a:p>
@@ -21438,7 +23414,7 @@
                 <a:ea typeface="Plus Jakarta Sans" pitchFamily="34" charset="-122"/>
                 <a:cs typeface="Plus Jakarta Sans" pitchFamily="34" charset="-120"/>
               </a:rPr>
-              <a:t>[DRAFT] Set a weekly target for real Duta acquisition</a:t>
+              <a:t>[DRAFT] Set a weekly farmer target per Duta</a:t>
             </a:r>
             <a:endParaRPr lang="en-US" sz="1200" dirty="0"/>
           </a:p>
@@ -21479,7 +23455,7 @@
                 <a:ea typeface="Plus Jakarta Sans" pitchFamily="34" charset="-122"/>
                 <a:cs typeface="Plus Jakarta Sans" pitchFamily="34" charset="-120"/>
               </a:rPr>
-              <a:t>1 real-Duta farmer in 7 weeks. Agree how many active Dutas register farmers each week, and track it in this deck.</a:t>
+              <a:t>Dutas brought 4 farmers last week (8 the week before). Edi Sutarsan, Hendrik Budianto, Simon, Wahab, Meri registered none last week. Agree a weekly number per Duta and track it in this deck.</a:t>
             </a:r>
             <a:endParaRPr lang="en-US" sz="950" dirty="0"/>
           </a:p>
@@ -21614,7 +23590,7 @@
                 <a:ea typeface="Plus Jakarta Sans" pitchFamily="34" charset="-122"/>
                 <a:cs typeface="Plus Jakarta Sans" pitchFamily="34" charset="-120"/>
               </a:rPr>
-              <a:t>[DRAFT] Find out why Organic fell −95</a:t>
+              <a:t>[DRAFT] Grow the external Duta network</a:t>
             </a:r>
             <a:endParaRPr lang="en-US" sz="1200" dirty="0"/>
           </a:p>
@@ -21655,7 +23631,7 @@
                 <a:ea typeface="Plus Jakarta Sans" pitchFamily="34" charset="-122"/>
                 <a:cs typeface="Plus Jakarta Sans" pitchFamily="34" charset="-120"/>
               </a:rPr>
-              <a:t>Organic went 313 → 218, mostly “organic” (111 → 47). Check what drove the 28 Sep peak (a broadcast, a post, an app release) and repeat it.</a:t>
+              <a:t>7 of the 8 Dutas with farmers are internal team; external Dutas brought 1 farmer in 7 weeks (Meri). Recruit and activate external Dutas in the main areas.</a:t>
             </a:r>
             <a:endParaRPr lang="en-US" sz="950" dirty="0"/>
           </a:p>

--- a/deck/output/Farmer Acquisition 5-11 Oct 2026.pptx
+++ b/deck/output/Farmer Acquisition 5-11 Oct 2026.pptx
@@ -2812,7 +2812,7 @@
                 <a:ea typeface="Plus Jakarta Sans" pitchFamily="34" charset="-122"/>
                 <a:cs typeface="Plus Jakarta Sans" pitchFamily="34" charset="-120"/>
               </a:rPr>
-              <a:t>Farmers counted by registration week (minggu_register). The week of 12 Oct is in progress and left out. Duta = akuisisi_type “Under Duta”, internal-team and external Dutas alike.</a:t>
+              <a:t>Farmers counted by the week they registered. The week of 12 Oct is in progress and left out. Duta covers internal-team and external Dutas alike.</a:t>
             </a:r>
             <a:endParaRPr lang="en-US" sz="950" dirty="0"/>
           </a:p>
@@ -5762,12 +5762,11 @@
             <a:tbl>
               <a:tblPr/>
               <a:tblGrid>
-                <a:gridCol w="1279585"/>
-                <a:gridCol w="938362"/>
-                <a:gridCol w="554487"/>
-                <a:gridCol w="554487"/>
-                <a:gridCol w="511834"/>
-                <a:gridCol w="682445"/>
+                <a:gridCol w="1446784"/>
+                <a:gridCol w="1085088"/>
+                <a:gridCol w="678180"/>
+                <a:gridCol w="678180"/>
+                <a:gridCol w="632968"/>
               </a:tblGrid>
               <a:tr h="0">
                 <a:tc>
@@ -6060,74 +6059,6 @@
                           <a:cs typeface="Plus Jakarta Sans" pitchFamily="34" charset="-120"/>
                         </a:rPr>
                         <a:t>7 weeks</a:t>
-                      </a:r>
-                      <a:endParaRPr lang="en-US" sz="900" dirty="0">
-                        <a:latin typeface="Plus Jakarta Sans" charset="0"/>
-                        <a:ea typeface="Plus Jakarta Sans" charset="0"/>
-                        <a:cs typeface="Plus Jakarta Sans" charset="0"/>
-                      </a:endParaRPr>
-                    </a:p>
-                  </a:txBody>
-                  <a:tcPr marL="36576" marR="36576" marT="36576" marB="36576" anchor="ctr">
-                    <a:lnL w="6350" cap="flat" cmpd="sng" algn="ctr">
-                      <a:solidFill>
-                        <a:srgbClr val="DCE2D6"/>
-                      </a:solidFill>
-                      <a:prstDash val="solid"/>
-                      <a:round/>
-                      <a:headEnd type="none" w="med" len="med"/>
-                      <a:tailEnd type="none" w="med" len="med"/>
-                    </a:lnL>
-                    <a:lnR w="6350" cap="flat" cmpd="sng" algn="ctr">
-                      <a:solidFill>
-                        <a:srgbClr val="DCE2D6"/>
-                      </a:solidFill>
-                      <a:prstDash val="solid"/>
-                      <a:round/>
-                      <a:headEnd type="none" w="med" len="med"/>
-                      <a:tailEnd type="none" w="med" len="med"/>
-                    </a:lnR>
-                    <a:lnT w="6350" cap="flat" cmpd="sng" algn="ctr">
-                      <a:solidFill>
-                        <a:srgbClr val="DCE2D6"/>
-                      </a:solidFill>
-                      <a:prstDash val="solid"/>
-                      <a:round/>
-                      <a:headEnd type="none" w="med" len="med"/>
-                      <a:tailEnd type="none" w="med" len="med"/>
-                    </a:lnT>
-                    <a:lnB w="6350" cap="flat" cmpd="sng" algn="ctr">
-                      <a:solidFill>
-                        <a:srgbClr val="DCE2D6"/>
-                      </a:solidFill>
-                      <a:prstDash val="solid"/>
-                      <a:round/>
-                      <a:headEnd type="none" w="med" len="med"/>
-                      <a:tailEnd type="none" w="med" len="med"/>
-                    </a:lnB>
-                    <a:solidFill>
-                      <a:srgbClr val="4A653B"/>
-                    </a:solidFill>
-                  </a:tcPr>
-                </a:tc>
-                <a:tc>
-                  <a:txBody>
-                    <a:bodyPr/>
-                    <a:lstStyle/>
-                    <a:p>
-                      <a:pPr algn="r" indent="0" marL="0">
-                        <a:buNone/>
-                      </a:pPr>
-                      <a:r>
-                        <a:rPr lang="en-US" sz="900" b="1" dirty="0">
-                          <a:solidFill>
-                            <a:srgbClr val="FFFFFF"/>
-                          </a:solidFill>
-                          <a:latin typeface="Plus Jakarta Sans" pitchFamily="34" charset="0"/>
-                          <a:ea typeface="Plus Jakarta Sans" pitchFamily="34" charset="-122"/>
-                          <a:cs typeface="Plus Jakarta Sans" pitchFamily="34" charset="-120"/>
-                        </a:rPr>
-                        <a:t>Sale / Leads</a:t>
                       </a:r>
                       <a:endParaRPr lang="en-US" sz="900" dirty="0">
                         <a:latin typeface="Plus Jakarta Sans" charset="0"/>
@@ -6505,71 +6436,6 @@
                     </a:lnB>
                   </a:tcPr>
                 </a:tc>
-                <a:tc>
-                  <a:txBody>
-                    <a:bodyPr/>
-                    <a:lstStyle/>
-                    <a:p>
-                      <a:pPr algn="r" indent="0" marL="0">
-                        <a:buNone/>
-                      </a:pPr>
-                      <a:r>
-                        <a:rPr lang="en-US" sz="900" dirty="0">
-                          <a:solidFill>
-                            <a:srgbClr val="2B2F28"/>
-                          </a:solidFill>
-                          <a:latin typeface="Plus Jakarta Sans" pitchFamily="34" charset="0"/>
-                          <a:ea typeface="Plus Jakarta Sans" pitchFamily="34" charset="-122"/>
-                          <a:cs typeface="Plus Jakarta Sans" pitchFamily="34" charset="-120"/>
-                        </a:rPr>
-                        <a:t>5 / 4</a:t>
-                      </a:r>
-                      <a:endParaRPr lang="en-US" sz="900" dirty="0">
-                        <a:latin typeface="Plus Jakarta Sans" charset="0"/>
-                        <a:ea typeface="Plus Jakarta Sans" charset="0"/>
-                        <a:cs typeface="Plus Jakarta Sans" charset="0"/>
-                      </a:endParaRPr>
-                    </a:p>
-                  </a:txBody>
-                  <a:tcPr marL="36576" marR="36576" marT="36576" marB="36576" anchor="ctr">
-                    <a:lnL w="6350" cap="flat" cmpd="sng" algn="ctr">
-                      <a:solidFill>
-                        <a:srgbClr val="DCE2D6"/>
-                      </a:solidFill>
-                      <a:prstDash val="solid"/>
-                      <a:round/>
-                      <a:headEnd type="none" w="med" len="med"/>
-                      <a:tailEnd type="none" w="med" len="med"/>
-                    </a:lnL>
-                    <a:lnR w="6350" cap="flat" cmpd="sng" algn="ctr">
-                      <a:solidFill>
-                        <a:srgbClr val="DCE2D6"/>
-                      </a:solidFill>
-                      <a:prstDash val="solid"/>
-                      <a:round/>
-                      <a:headEnd type="none" w="med" len="med"/>
-                      <a:tailEnd type="none" w="med" len="med"/>
-                    </a:lnR>
-                    <a:lnT w="6350" cap="flat" cmpd="sng" algn="ctr">
-                      <a:solidFill>
-                        <a:srgbClr val="DCE2D6"/>
-                      </a:solidFill>
-                      <a:prstDash val="solid"/>
-                      <a:round/>
-                      <a:headEnd type="none" w="med" len="med"/>
-                      <a:tailEnd type="none" w="med" len="med"/>
-                    </a:lnT>
-                    <a:lnB w="6350" cap="flat" cmpd="sng" algn="ctr">
-                      <a:solidFill>
-                        <a:srgbClr val="DCE2D6"/>
-                      </a:solidFill>
-                      <a:prstDash val="solid"/>
-                      <a:round/>
-                      <a:headEnd type="none" w="med" len="med"/>
-                      <a:tailEnd type="none" w="med" len="med"/>
-                    </a:lnB>
-                  </a:tcPr>
-                </a:tc>
               </a:tr>
               <a:tr h="0">
                 <a:tc>
@@ -6850,71 +6716,6 @@
                           <a:cs typeface="Plus Jakarta Sans" pitchFamily="34" charset="-120"/>
                         </a:rPr>
                         <a:t>1</a:t>
-                      </a:r>
-                      <a:endParaRPr lang="en-US" sz="900" dirty="0">
-                        <a:latin typeface="Plus Jakarta Sans" charset="0"/>
-                        <a:ea typeface="Plus Jakarta Sans" charset="0"/>
-                        <a:cs typeface="Plus Jakarta Sans" charset="0"/>
-                      </a:endParaRPr>
-                    </a:p>
-                  </a:txBody>
-                  <a:tcPr marL="36576" marR="36576" marT="36576" marB="36576" anchor="ctr">
-                    <a:lnL w="6350" cap="flat" cmpd="sng" algn="ctr">
-                      <a:solidFill>
-                        <a:srgbClr val="DCE2D6"/>
-                      </a:solidFill>
-                      <a:prstDash val="solid"/>
-                      <a:round/>
-                      <a:headEnd type="none" w="med" len="med"/>
-                      <a:tailEnd type="none" w="med" len="med"/>
-                    </a:lnL>
-                    <a:lnR w="6350" cap="flat" cmpd="sng" algn="ctr">
-                      <a:solidFill>
-                        <a:srgbClr val="DCE2D6"/>
-                      </a:solidFill>
-                      <a:prstDash val="solid"/>
-                      <a:round/>
-                      <a:headEnd type="none" w="med" len="med"/>
-                      <a:tailEnd type="none" w="med" len="med"/>
-                    </a:lnR>
-                    <a:lnT w="6350" cap="flat" cmpd="sng" algn="ctr">
-                      <a:solidFill>
-                        <a:srgbClr val="DCE2D6"/>
-                      </a:solidFill>
-                      <a:prstDash val="solid"/>
-                      <a:round/>
-                      <a:headEnd type="none" w="med" len="med"/>
-                      <a:tailEnd type="none" w="med" len="med"/>
-                    </a:lnT>
-                    <a:lnB w="6350" cap="flat" cmpd="sng" algn="ctr">
-                      <a:solidFill>
-                        <a:srgbClr val="DCE2D6"/>
-                      </a:solidFill>
-                      <a:prstDash val="solid"/>
-                      <a:round/>
-                      <a:headEnd type="none" w="med" len="med"/>
-                      <a:tailEnd type="none" w="med" len="med"/>
-                    </a:lnB>
-                  </a:tcPr>
-                </a:tc>
-                <a:tc>
-                  <a:txBody>
-                    <a:bodyPr/>
-                    <a:lstStyle/>
-                    <a:p>
-                      <a:pPr algn="r" indent="0" marL="0">
-                        <a:buNone/>
-                      </a:pPr>
-                      <a:r>
-                        <a:rPr lang="en-US" sz="900" dirty="0">
-                          <a:solidFill>
-                            <a:srgbClr val="2B2F28"/>
-                          </a:solidFill>
-                          <a:latin typeface="Plus Jakarta Sans" pitchFamily="34" charset="0"/>
-                          <a:ea typeface="Plus Jakarta Sans" pitchFamily="34" charset="-122"/>
-                          <a:cs typeface="Plus Jakarta Sans" pitchFamily="34" charset="-120"/>
-                        </a:rPr>
-                        <a:t>1 / 0</a:t>
                       </a:r>
                       <a:endParaRPr lang="en-US" sz="900" dirty="0">
                         <a:latin typeface="Plus Jakarta Sans" charset="0"/>
@@ -7289,71 +7090,6 @@
                     </a:lnB>
                   </a:tcPr>
                 </a:tc>
-                <a:tc>
-                  <a:txBody>
-                    <a:bodyPr/>
-                    <a:lstStyle/>
-                    <a:p>
-                      <a:pPr algn="r" indent="0" marL="0">
-                        <a:buNone/>
-                      </a:pPr>
-                      <a:r>
-                        <a:rPr lang="en-US" sz="900" dirty="0">
-                          <a:solidFill>
-                            <a:srgbClr val="2B2F28"/>
-                          </a:solidFill>
-                          <a:latin typeface="Plus Jakarta Sans" pitchFamily="34" charset="0"/>
-                          <a:ea typeface="Plus Jakarta Sans" pitchFamily="34" charset="-122"/>
-                          <a:cs typeface="Plus Jakarta Sans" pitchFamily="34" charset="-120"/>
-                        </a:rPr>
-                        <a:t>0 / 1</a:t>
-                      </a:r>
-                      <a:endParaRPr lang="en-US" sz="900" dirty="0">
-                        <a:latin typeface="Plus Jakarta Sans" charset="0"/>
-                        <a:ea typeface="Plus Jakarta Sans" charset="0"/>
-                        <a:cs typeface="Plus Jakarta Sans" charset="0"/>
-                      </a:endParaRPr>
-                    </a:p>
-                  </a:txBody>
-                  <a:tcPr marL="36576" marR="36576" marT="36576" marB="36576" anchor="ctr">
-                    <a:lnL w="6350" cap="flat" cmpd="sng" algn="ctr">
-                      <a:solidFill>
-                        <a:srgbClr val="DCE2D6"/>
-                      </a:solidFill>
-                      <a:prstDash val="solid"/>
-                      <a:round/>
-                      <a:headEnd type="none" w="med" len="med"/>
-                      <a:tailEnd type="none" w="med" len="med"/>
-                    </a:lnL>
-                    <a:lnR w="6350" cap="flat" cmpd="sng" algn="ctr">
-                      <a:solidFill>
-                        <a:srgbClr val="DCE2D6"/>
-                      </a:solidFill>
-                      <a:prstDash val="solid"/>
-                      <a:round/>
-                      <a:headEnd type="none" w="med" len="med"/>
-                      <a:tailEnd type="none" w="med" len="med"/>
-                    </a:lnR>
-                    <a:lnT w="6350" cap="flat" cmpd="sng" algn="ctr">
-                      <a:solidFill>
-                        <a:srgbClr val="DCE2D6"/>
-                      </a:solidFill>
-                      <a:prstDash val="solid"/>
-                      <a:round/>
-                      <a:headEnd type="none" w="med" len="med"/>
-                      <a:tailEnd type="none" w="med" len="med"/>
-                    </a:lnT>
-                    <a:lnB w="6350" cap="flat" cmpd="sng" algn="ctr">
-                      <a:solidFill>
-                        <a:srgbClr val="DCE2D6"/>
-                      </a:solidFill>
-                      <a:prstDash val="solid"/>
-                      <a:round/>
-                      <a:headEnd type="none" w="med" len="med"/>
-                      <a:tailEnd type="none" w="med" len="med"/>
-                    </a:lnB>
-                  </a:tcPr>
-                </a:tc>
               </a:tr>
               <a:tr h="0">
                 <a:tc>
@@ -7634,71 +7370,6 @@
                           <a:cs typeface="Plus Jakarta Sans" pitchFamily="34" charset="-120"/>
                         </a:rPr>
                         <a:t>3</a:t>
-                      </a:r>
-                      <a:endParaRPr lang="en-US" sz="900" dirty="0">
-                        <a:latin typeface="Plus Jakarta Sans" charset="0"/>
-                        <a:ea typeface="Plus Jakarta Sans" charset="0"/>
-                        <a:cs typeface="Plus Jakarta Sans" charset="0"/>
-                      </a:endParaRPr>
-                    </a:p>
-                  </a:txBody>
-                  <a:tcPr marL="36576" marR="36576" marT="36576" marB="36576" anchor="ctr">
-                    <a:lnL w="6350" cap="flat" cmpd="sng" algn="ctr">
-                      <a:solidFill>
-                        <a:srgbClr val="DCE2D6"/>
-                      </a:solidFill>
-                      <a:prstDash val="solid"/>
-                      <a:round/>
-                      <a:headEnd type="none" w="med" len="med"/>
-                      <a:tailEnd type="none" w="med" len="med"/>
-                    </a:lnL>
-                    <a:lnR w="6350" cap="flat" cmpd="sng" algn="ctr">
-                      <a:solidFill>
-                        <a:srgbClr val="DCE2D6"/>
-                      </a:solidFill>
-                      <a:prstDash val="solid"/>
-                      <a:round/>
-                      <a:headEnd type="none" w="med" len="med"/>
-                      <a:tailEnd type="none" w="med" len="med"/>
-                    </a:lnR>
-                    <a:lnT w="6350" cap="flat" cmpd="sng" algn="ctr">
-                      <a:solidFill>
-                        <a:srgbClr val="DCE2D6"/>
-                      </a:solidFill>
-                      <a:prstDash val="solid"/>
-                      <a:round/>
-                      <a:headEnd type="none" w="med" len="med"/>
-                      <a:tailEnd type="none" w="med" len="med"/>
-                    </a:lnT>
-                    <a:lnB w="6350" cap="flat" cmpd="sng" algn="ctr">
-                      <a:solidFill>
-                        <a:srgbClr val="DCE2D6"/>
-                      </a:solidFill>
-                      <a:prstDash val="solid"/>
-                      <a:round/>
-                      <a:headEnd type="none" w="med" len="med"/>
-                      <a:tailEnd type="none" w="med" len="med"/>
-                    </a:lnB>
-                  </a:tcPr>
-                </a:tc>
-                <a:tc>
-                  <a:txBody>
-                    <a:bodyPr/>
-                    <a:lstStyle/>
-                    <a:p>
-                      <a:pPr algn="r" indent="0" marL="0">
-                        <a:buNone/>
-                      </a:pPr>
-                      <a:r>
-                        <a:rPr lang="en-US" sz="900" dirty="0">
-                          <a:solidFill>
-                            <a:srgbClr val="2B2F28"/>
-                          </a:solidFill>
-                          <a:latin typeface="Plus Jakarta Sans" pitchFamily="34" charset="0"/>
-                          <a:ea typeface="Plus Jakarta Sans" pitchFamily="34" charset="-122"/>
-                          <a:cs typeface="Plus Jakarta Sans" pitchFamily="34" charset="-120"/>
-                        </a:rPr>
-                        <a:t>3 / 0</a:t>
                       </a:r>
                       <a:endParaRPr lang="en-US" sz="900" dirty="0">
                         <a:latin typeface="Plus Jakarta Sans" charset="0"/>
@@ -8073,71 +7744,6 @@
                     </a:lnB>
                   </a:tcPr>
                 </a:tc>
-                <a:tc>
-                  <a:txBody>
-                    <a:bodyPr/>
-                    <a:lstStyle/>
-                    <a:p>
-                      <a:pPr algn="r" indent="0" marL="0">
-                        <a:buNone/>
-                      </a:pPr>
-                      <a:r>
-                        <a:rPr lang="en-US" sz="900" dirty="0">
-                          <a:solidFill>
-                            <a:srgbClr val="2B2F28"/>
-                          </a:solidFill>
-                          <a:latin typeface="Plus Jakarta Sans" pitchFamily="34" charset="0"/>
-                          <a:ea typeface="Plus Jakarta Sans" pitchFamily="34" charset="-122"/>
-                          <a:cs typeface="Plus Jakarta Sans" pitchFamily="34" charset="-120"/>
-                        </a:rPr>
-                        <a:t>2 / 1</a:t>
-                      </a:r>
-                      <a:endParaRPr lang="en-US" sz="900" dirty="0">
-                        <a:latin typeface="Plus Jakarta Sans" charset="0"/>
-                        <a:ea typeface="Plus Jakarta Sans" charset="0"/>
-                        <a:cs typeface="Plus Jakarta Sans" charset="0"/>
-                      </a:endParaRPr>
-                    </a:p>
-                  </a:txBody>
-                  <a:tcPr marL="36576" marR="36576" marT="36576" marB="36576" anchor="ctr">
-                    <a:lnL w="6350" cap="flat" cmpd="sng" algn="ctr">
-                      <a:solidFill>
-                        <a:srgbClr val="DCE2D6"/>
-                      </a:solidFill>
-                      <a:prstDash val="solid"/>
-                      <a:round/>
-                      <a:headEnd type="none" w="med" len="med"/>
-                      <a:tailEnd type="none" w="med" len="med"/>
-                    </a:lnL>
-                    <a:lnR w="6350" cap="flat" cmpd="sng" algn="ctr">
-                      <a:solidFill>
-                        <a:srgbClr val="DCE2D6"/>
-                      </a:solidFill>
-                      <a:prstDash val="solid"/>
-                      <a:round/>
-                      <a:headEnd type="none" w="med" len="med"/>
-                      <a:tailEnd type="none" w="med" len="med"/>
-                    </a:lnR>
-                    <a:lnT w="6350" cap="flat" cmpd="sng" algn="ctr">
-                      <a:solidFill>
-                        <a:srgbClr val="DCE2D6"/>
-                      </a:solidFill>
-                      <a:prstDash val="solid"/>
-                      <a:round/>
-                      <a:headEnd type="none" w="med" len="med"/>
-                      <a:tailEnd type="none" w="med" len="med"/>
-                    </a:lnT>
-                    <a:lnB w="6350" cap="flat" cmpd="sng" algn="ctr">
-                      <a:solidFill>
-                        <a:srgbClr val="DCE2D6"/>
-                      </a:solidFill>
-                      <a:prstDash val="solid"/>
-                      <a:round/>
-                      <a:headEnd type="none" w="med" len="med"/>
-                      <a:tailEnd type="none" w="med" len="med"/>
-                    </a:lnB>
-                  </a:tcPr>
-                </a:tc>
               </a:tr>
               <a:tr h="0">
                 <a:tc>
@@ -8418,71 +8024,6 @@
                           <a:cs typeface="Plus Jakarta Sans" pitchFamily="34" charset="-120"/>
                         </a:rPr>
                         <a:t>2</a:t>
-                      </a:r>
-                      <a:endParaRPr lang="en-US" sz="900" dirty="0">
-                        <a:latin typeface="Plus Jakarta Sans" charset="0"/>
-                        <a:ea typeface="Plus Jakarta Sans" charset="0"/>
-                        <a:cs typeface="Plus Jakarta Sans" charset="0"/>
-                      </a:endParaRPr>
-                    </a:p>
-                  </a:txBody>
-                  <a:tcPr marL="36576" marR="36576" marT="36576" marB="36576" anchor="ctr">
-                    <a:lnL w="6350" cap="flat" cmpd="sng" algn="ctr">
-                      <a:solidFill>
-                        <a:srgbClr val="DCE2D6"/>
-                      </a:solidFill>
-                      <a:prstDash val="solid"/>
-                      <a:round/>
-                      <a:headEnd type="none" w="med" len="med"/>
-                      <a:tailEnd type="none" w="med" len="med"/>
-                    </a:lnL>
-                    <a:lnR w="6350" cap="flat" cmpd="sng" algn="ctr">
-                      <a:solidFill>
-                        <a:srgbClr val="DCE2D6"/>
-                      </a:solidFill>
-                      <a:prstDash val="solid"/>
-                      <a:round/>
-                      <a:headEnd type="none" w="med" len="med"/>
-                      <a:tailEnd type="none" w="med" len="med"/>
-                    </a:lnR>
-                    <a:lnT w="6350" cap="flat" cmpd="sng" algn="ctr">
-                      <a:solidFill>
-                        <a:srgbClr val="DCE2D6"/>
-                      </a:solidFill>
-                      <a:prstDash val="solid"/>
-                      <a:round/>
-                      <a:headEnd type="none" w="med" len="med"/>
-                      <a:tailEnd type="none" w="med" len="med"/>
-                    </a:lnT>
-                    <a:lnB w="6350" cap="flat" cmpd="sng" algn="ctr">
-                      <a:solidFill>
-                        <a:srgbClr val="DCE2D6"/>
-                      </a:solidFill>
-                      <a:prstDash val="solid"/>
-                      <a:round/>
-                      <a:headEnd type="none" w="med" len="med"/>
-                      <a:tailEnd type="none" w="med" len="med"/>
-                    </a:lnB>
-                  </a:tcPr>
-                </a:tc>
-                <a:tc>
-                  <a:txBody>
-                    <a:bodyPr/>
-                    <a:lstStyle/>
-                    <a:p>
-                      <a:pPr algn="r" indent="0" marL="0">
-                        <a:buNone/>
-                      </a:pPr>
-                      <a:r>
-                        <a:rPr lang="en-US" sz="900" dirty="0">
-                          <a:solidFill>
-                            <a:srgbClr val="2B2F28"/>
-                          </a:solidFill>
-                          <a:latin typeface="Plus Jakarta Sans" pitchFamily="34" charset="0"/>
-                          <a:ea typeface="Plus Jakarta Sans" pitchFamily="34" charset="-122"/>
-                          <a:cs typeface="Plus Jakarta Sans" pitchFamily="34" charset="-120"/>
-                        </a:rPr>
-                        <a:t>0 / 2</a:t>
                       </a:r>
                       <a:endParaRPr lang="en-US" sz="900" dirty="0">
                         <a:latin typeface="Plus Jakarta Sans" charset="0"/>
@@ -8857,71 +8398,6 @@
                     </a:lnB>
                   </a:tcPr>
                 </a:tc>
-                <a:tc>
-                  <a:txBody>
-                    <a:bodyPr/>
-                    <a:lstStyle/>
-                    <a:p>
-                      <a:pPr algn="r" indent="0" marL="0">
-                        <a:buNone/>
-                      </a:pPr>
-                      <a:r>
-                        <a:rPr lang="en-US" sz="900" dirty="0">
-                          <a:solidFill>
-                            <a:srgbClr val="2B2F28"/>
-                          </a:solidFill>
-                          <a:latin typeface="Plus Jakarta Sans" pitchFamily="34" charset="0"/>
-                          <a:ea typeface="Plus Jakarta Sans" pitchFamily="34" charset="-122"/>
-                          <a:cs typeface="Plus Jakarta Sans" pitchFamily="34" charset="-120"/>
-                        </a:rPr>
-                        <a:t>0 / 2</a:t>
-                      </a:r>
-                      <a:endParaRPr lang="en-US" sz="900" dirty="0">
-                        <a:latin typeface="Plus Jakarta Sans" charset="0"/>
-                        <a:ea typeface="Plus Jakarta Sans" charset="0"/>
-                        <a:cs typeface="Plus Jakarta Sans" charset="0"/>
-                      </a:endParaRPr>
-                    </a:p>
-                  </a:txBody>
-                  <a:tcPr marL="36576" marR="36576" marT="36576" marB="36576" anchor="ctr">
-                    <a:lnL w="6350" cap="flat" cmpd="sng" algn="ctr">
-                      <a:solidFill>
-                        <a:srgbClr val="DCE2D6"/>
-                      </a:solidFill>
-                      <a:prstDash val="solid"/>
-                      <a:round/>
-                      <a:headEnd type="none" w="med" len="med"/>
-                      <a:tailEnd type="none" w="med" len="med"/>
-                    </a:lnL>
-                    <a:lnR w="6350" cap="flat" cmpd="sng" algn="ctr">
-                      <a:solidFill>
-                        <a:srgbClr val="DCE2D6"/>
-                      </a:solidFill>
-                      <a:prstDash val="solid"/>
-                      <a:round/>
-                      <a:headEnd type="none" w="med" len="med"/>
-                      <a:tailEnd type="none" w="med" len="med"/>
-                    </a:lnR>
-                    <a:lnT w="6350" cap="flat" cmpd="sng" algn="ctr">
-                      <a:solidFill>
-                        <a:srgbClr val="DCE2D6"/>
-                      </a:solidFill>
-                      <a:prstDash val="solid"/>
-                      <a:round/>
-                      <a:headEnd type="none" w="med" len="med"/>
-                      <a:tailEnd type="none" w="med" len="med"/>
-                    </a:lnT>
-                    <a:lnB w="6350" cap="flat" cmpd="sng" algn="ctr">
-                      <a:solidFill>
-                        <a:srgbClr val="DCE2D6"/>
-                      </a:solidFill>
-                      <a:prstDash val="solid"/>
-                      <a:round/>
-                      <a:headEnd type="none" w="med" len="med"/>
-                      <a:tailEnd type="none" w="med" len="med"/>
-                    </a:lnB>
-                  </a:tcPr>
-                </a:tc>
               </a:tr>
               <a:tr h="0">
                 <a:tc>
@@ -9202,71 +8678,6 @@
                           <a:cs typeface="Plus Jakarta Sans" pitchFamily="34" charset="-120"/>
                         </a:rPr>
                         <a:t>1</a:t>
-                      </a:r>
-                      <a:endParaRPr lang="en-US" sz="900" dirty="0">
-                        <a:latin typeface="Plus Jakarta Sans" charset="0"/>
-                        <a:ea typeface="Plus Jakarta Sans" charset="0"/>
-                        <a:cs typeface="Plus Jakarta Sans" charset="0"/>
-                      </a:endParaRPr>
-                    </a:p>
-                  </a:txBody>
-                  <a:tcPr marL="36576" marR="36576" marT="36576" marB="36576" anchor="ctr">
-                    <a:lnL w="6350" cap="flat" cmpd="sng" algn="ctr">
-                      <a:solidFill>
-                        <a:srgbClr val="DCE2D6"/>
-                      </a:solidFill>
-                      <a:prstDash val="solid"/>
-                      <a:round/>
-                      <a:headEnd type="none" w="med" len="med"/>
-                      <a:tailEnd type="none" w="med" len="med"/>
-                    </a:lnL>
-                    <a:lnR w="6350" cap="flat" cmpd="sng" algn="ctr">
-                      <a:solidFill>
-                        <a:srgbClr val="DCE2D6"/>
-                      </a:solidFill>
-                      <a:prstDash val="solid"/>
-                      <a:round/>
-                      <a:headEnd type="none" w="med" len="med"/>
-                      <a:tailEnd type="none" w="med" len="med"/>
-                    </a:lnR>
-                    <a:lnT w="6350" cap="flat" cmpd="sng" algn="ctr">
-                      <a:solidFill>
-                        <a:srgbClr val="DCE2D6"/>
-                      </a:solidFill>
-                      <a:prstDash val="solid"/>
-                      <a:round/>
-                      <a:headEnd type="none" w="med" len="med"/>
-                      <a:tailEnd type="none" w="med" len="med"/>
-                    </a:lnT>
-                    <a:lnB w="6350" cap="flat" cmpd="sng" algn="ctr">
-                      <a:solidFill>
-                        <a:srgbClr val="DCE2D6"/>
-                      </a:solidFill>
-                      <a:prstDash val="solid"/>
-                      <a:round/>
-                      <a:headEnd type="none" w="med" len="med"/>
-                      <a:tailEnd type="none" w="med" len="med"/>
-                    </a:lnB>
-                  </a:tcPr>
-                </a:tc>
-                <a:tc>
-                  <a:txBody>
-                    <a:bodyPr/>
-                    <a:lstStyle/>
-                    <a:p>
-                      <a:pPr algn="r" indent="0" marL="0">
-                        <a:buNone/>
-                      </a:pPr>
-                      <a:r>
-                        <a:rPr lang="en-US" sz="900" dirty="0">
-                          <a:solidFill>
-                            <a:srgbClr val="2B2F28"/>
-                          </a:solidFill>
-                          <a:latin typeface="Plus Jakarta Sans" pitchFamily="34" charset="0"/>
-                          <a:ea typeface="Plus Jakarta Sans" pitchFamily="34" charset="-122"/>
-                          <a:cs typeface="Plus Jakarta Sans" pitchFamily="34" charset="-120"/>
-                        </a:rPr>
-                        <a:t>1 / 0</a:t>
                       </a:r>
                       <a:endParaRPr lang="en-US" sz="900" dirty="0">
                         <a:latin typeface="Plus Jakarta Sans" charset="0"/>
@@ -9836,7 +9247,7 @@
                 <a:ea typeface="Plus Jakarta Sans" pitchFamily="34" charset="-122"/>
                 <a:cs typeface="Plus Jakarta Sans" pitchFamily="34" charset="-120"/>
               </a:rPr>
-              <a:t>Farmers registered (utm_source)</a:t>
+              <a:t>Farmers registered, by acquisition channel</a:t>
             </a:r>
             <a:endParaRPr lang="en-US" sz="950" dirty="0"/>
           </a:p>
@@ -10957,7 +10368,7 @@
                 <a:ea typeface="Plus Jakarta Sans" pitchFamily="34" charset="-122"/>
                 <a:cs typeface="Plus Jakarta Sans" pitchFamily="34" charset="-120"/>
               </a:rPr>
-              <a:t>Change in farmers (utm_source_name); hover for week before → last week</a:t>
+              <a:t>Change in farmers; hover for week before → last week</a:t>
             </a:r>
             <a:endParaRPr lang="en-US" sz="950" dirty="0"/>
           </a:p>
@@ -11597,7 +11008,27 @@
                 <a:ea typeface="Plus Jakarta Sans" pitchFamily="34" charset="-122"/>
                 <a:cs typeface="Plus Jakarta Sans" pitchFamily="34" charset="-120"/>
               </a:rPr>
-              <a:t>Online_Komunitas_Dow…</a:t>
+              <a:t>Online Komunitas</a:t>
+            </a:r>
+            <a:endParaRPr lang="en-US" sz="900" dirty="0"/>
+          </a:p>
+          <a:p>
+            <a:pPr algn="l" indent="0" marL="0">
+              <a:lnSpc>
+                <a:spcPct val="95000"/>
+              </a:lnSpc>
+              <a:buNone/>
+            </a:pPr>
+            <a:r>
+              <a:rPr lang="en-US" sz="900" dirty="0">
+                <a:solidFill>
+                  <a:srgbClr val="2B2F28"/>
+                </a:solidFill>
+                <a:latin typeface="Plus Jakarta Sans" pitchFamily="34" charset="0"/>
+                <a:ea typeface="Plus Jakarta Sans" pitchFamily="34" charset="-122"/>
+                <a:cs typeface="Plus Jakarta Sans" pitchFamily="34" charset="-120"/>
+              </a:rPr>
+              <a:t>DownloadPSP</a:t>
             </a:r>
             <a:endParaRPr lang="en-US" sz="900" dirty="0"/>
           </a:p>
@@ -11706,7 +11137,7 @@
                 <a:ea typeface="Plus Jakarta Sans" pitchFamily="34" charset="-122"/>
                 <a:cs typeface="Plus Jakarta Sans" pitchFamily="34" charset="-120"/>
               </a:rPr>
-              <a:t>broadcast_500k_farmer</a:t>
+              <a:t>broadcast 500k farmer</a:t>
             </a:r>
             <a:endParaRPr lang="en-US" sz="900" dirty="0"/>
           </a:p>
@@ -12409,7 +11840,7 @@
                 <a:ea typeface="Plus Jakarta Sans" pitchFamily="34" charset="-122"/>
                 <a:cs typeface="Plus Jakarta Sans" pitchFamily="34" charset="-120"/>
               </a:rPr>
-              <a:t>Weeks start on Monday (minggu_register); the week of 12 Oct is left out</a:t>
+              <a:t>Registration weeks start on Monday; the week of 12 Oct is left out</a:t>
             </a:r>
             <a:endParaRPr lang="en-US" sz="950" dirty="0"/>
           </a:p>
@@ -17152,7 +16583,7 @@
                 <a:ea typeface="Plus Jakarta Sans" pitchFamily="34" charset="-122"/>
                 <a:cs typeface="Plus Jakarta Sans" pitchFamily="34" charset="-120"/>
               </a:rPr>
-              <a:t>utm_source</a:t>
+              <a:t>Acquisition channel</a:t>
             </a:r>
             <a:endParaRPr lang="en-US" sz="950" dirty="0"/>
           </a:p>
@@ -20096,7 +19527,7 @@
                 <a:ea typeface="Plus Jakarta Sans" pitchFamily="34" charset="-122"/>
                 <a:cs typeface="Plus Jakarta Sans" pitchFamily="34" charset="-120"/>
               </a:rPr>
-              <a:t>utm_source_name, largest last week first</a:t>
+              <a:t>Largest last week first</a:t>
             </a:r>
             <a:endParaRPr lang="en-US" sz="950" dirty="0"/>
           </a:p>
@@ -21470,7 +20901,7 @@
                           <a:ea typeface="Plus Jakarta Sans" pitchFamily="34" charset="-122"/>
                           <a:cs typeface="Plus Jakarta Sans" pitchFamily="34" charset="-120"/>
                         </a:rPr>
-                        <a:t>(no campaign)</a:t>
+                        <a:t>No campaign</a:t>
                       </a:r>
                       <a:endParaRPr lang="en-US" sz="900" dirty="0">
                         <a:latin typeface="Plus Jakarta Sans" charset="0"/>
@@ -22256,7 +21687,7 @@
                           <a:ea typeface="Plus Jakarta Sans" pitchFamily="34" charset="-122"/>
                           <a:cs typeface="Plus Jakarta Sans" pitchFamily="34" charset="-120"/>
                         </a:rPr>
-                        <a:t>broadcast_500k_farmer</a:t>
+                        <a:t>broadcast 500k farmer</a:t>
                       </a:r>
                       <a:endParaRPr lang="en-US" sz="900" dirty="0">
                         <a:latin typeface="Plus Jakarta Sans" charset="0"/>

--- a/deck/output/Farmer Acquisition 5-11 Oct 2026.pptx
+++ b/deck/output/Farmer Acquisition 5-11 Oct 2026.pptx
@@ -1686,7 +1686,7 @@
                 <a:ea typeface="Plus Jakarta Sans" pitchFamily="34" charset="-122"/>
                 <a:cs typeface="Plus Jakarta Sans" pitchFamily="34" charset="-120"/>
               </a:rPr>
-              <a:t>Duta vs Non-Duta Last Week</a:t>
+              <a:t>Duta vs Non-Duta, 5–11 Oct</a:t>
             </a:r>
             <a:endParaRPr lang="en-US" sz="3400" dirty="0"/>
           </a:p>
